--- a/skill/references/examples/components.pptx
+++ b/skill/references/examples/components.pptx
@@ -36,7 +36,7 @@
     <p:sldId id="281" r:id="rId27"/>
     <p:sldId id="283" r:id="rId28"/>
     <p:sldId id="284" r:id="rId29"/>
-    <p:sldId id="286" r:id="rId30"/>
+    <p:sldId id="293" r:id="rId30"/>
     <p:sldId id="287" r:id="rId31"/>
     <p:sldId id="288" r:id="rId32"/>
   </p:sldIdLst>
@@ -326,273 +326,729 @@
           <a:lstStyle/>
           <a:p>
             <a:r>
-              <a:rPr lang="en-US" dirty="0">
-                <a:solidFill>
-                  <a:srgbClr val="FFFFFF"/>
-                </a:solidFill>
-                <a:latin typeface="Calibri"/>
+              <a:rPr kumimoji="1" lang="en-US" altLang="ja-JP" sz="1200" b="0" kern="1200" dirty="0">
+                <a:solidFill>
+                  <a:schemeClr val="tx1"/>
+                </a:solidFill>
+                <a:effectLst/>
+                <a:latin typeface="+mn-lt"/>
+                <a:ea typeface="+mn-ea"/>
+                <a:cs typeface="+mn-cs"/>
               </a:rPr>
               <a:t>[Constraints] Global Rules &amp; Color System</a:t>
             </a:r>
           </a:p>
           <a:p>
-            <a:endParaRPr lang="en-US" dirty="0">
-              <a:solidFill>
-                <a:srgbClr val="FFFFFF"/>
-              </a:solidFill>
-              <a:latin typeface="Calibri"/>
-            </a:endParaRPr>
-          </a:p>
-          <a:p>
-            <a:r>
-              <a:rPr lang="en-US" dirty="0">
-                <a:solidFill>
-                  <a:srgbClr val="FFFFFF"/>
-                </a:solidFill>
-                <a:latin typeface="Calibri"/>
+            <a:endParaRPr kumimoji="1" lang="en-US" altLang="ja-JP" sz="1200" b="0" kern="1200" dirty="0">
+              <a:solidFill>
+                <a:schemeClr val="tx1"/>
+              </a:solidFill>
+              <a:effectLst/>
+              <a:latin typeface="+mn-lt"/>
+              <a:ea typeface="+mn-ea"/>
+              <a:cs typeface="+mn-cs"/>
+            </a:endParaRPr>
+          </a:p>
+          <a:p>
+            <a:r>
+              <a:rPr kumimoji="1" lang="en-US" altLang="ja-JP" sz="1200" b="0" kern="1200" dirty="0">
+                <a:solidFill>
+                  <a:schemeClr val="tx1"/>
+                </a:solidFill>
+                <a:effectLst/>
+                <a:latin typeface="+mn-lt"/>
+                <a:ea typeface="+mn-ea"/>
+                <a:cs typeface="+mn-cs"/>
               </a:rPr>
               <a:t>Primitive component catalog. Always load.</a:t>
             </a:r>
           </a:p>
           <a:p>
-            <a:endParaRPr lang="en-US" dirty="0">
-              <a:solidFill>
-                <a:srgbClr val="FFFFFF"/>
-              </a:solidFill>
-              <a:latin typeface="Calibri"/>
-            </a:endParaRPr>
-          </a:p>
-          <a:p>
-            <a:r>
-              <a:rPr lang="en-US" dirty="0">
-                <a:solidFill>
-                  <a:srgbClr val="FFFFFF"/>
-                </a:solidFill>
-                <a:latin typeface="Calibri"/>
+            <a:endParaRPr kumimoji="1" lang="en-US" altLang="ja-JP" sz="1200" b="0" kern="1200" dirty="0">
+              <a:solidFill>
+                <a:schemeClr val="tx1"/>
+              </a:solidFill>
+              <a:effectLst/>
+              <a:latin typeface="+mn-lt"/>
+              <a:ea typeface="+mn-ea"/>
+              <a:cs typeface="+mn-cs"/>
+            </a:endParaRPr>
+          </a:p>
+          <a:p>
+            <a:r>
+              <a:rPr kumimoji="1" lang="en-US" altLang="ja-JP" sz="1200" b="0" kern="1200" dirty="0">
+                <a:solidFill>
+                  <a:schemeClr val="tx1"/>
+                </a:solidFill>
+                <a:effectLst/>
+                <a:latin typeface="+mn-lt"/>
+                <a:ea typeface="+mn-ea"/>
+                <a:cs typeface="+mn-cs"/>
               </a:rPr>
               <a:t>Always start from the slide's purpose — what should the viewer understand or feel? Choose components and styles that serve that purpose.</a:t>
             </a:r>
           </a:p>
           <a:p>
-            <a:endParaRPr lang="en-US" dirty="0">
-              <a:solidFill>
-                <a:srgbClr val="FFFFFF"/>
-              </a:solidFill>
-              <a:latin typeface="Calibri"/>
-            </a:endParaRPr>
-          </a:p>
-          <a:p>
-            <a:r>
-              <a:rPr lang="en-US" dirty="0">
-                <a:solidFill>
-                  <a:srgbClr val="FFFFFF"/>
-                </a:solidFill>
-                <a:latin typeface="Calibri"/>
+            <a:endParaRPr kumimoji="1" lang="en-US" altLang="ja-JP" sz="1200" b="0" kern="1200" dirty="0">
+              <a:solidFill>
+                <a:schemeClr val="tx1"/>
+              </a:solidFill>
+              <a:effectLst/>
+              <a:latin typeface="+mn-lt"/>
+              <a:ea typeface="+mn-ea"/>
+              <a:cs typeface="+mn-cs"/>
+            </a:endParaRPr>
+          </a:p>
+          <a:p>
+            <a:r>
+              <a:rPr kumimoji="1" lang="en-US" altLang="ja-JP" sz="1200" b="0" kern="1200" dirty="0">
+                <a:solidFill>
+                  <a:schemeClr val="tx1"/>
+                </a:solidFill>
+                <a:effectLst/>
+                <a:latin typeface="+mn-lt"/>
+                <a:ea typeface="+mn-ea"/>
+                <a:cs typeface="+mn-cs"/>
               </a:rPr>
               <a:t>Each component starts with its essence, then "Let's build this." — a walkthrough of the thinking behind the sample. Follow the reasoning, not the specific values.</a:t>
             </a:r>
           </a:p>
           <a:p>
-            <a:endParaRPr lang="en-US" dirty="0">
-              <a:solidFill>
-                <a:srgbClr val="FFFFFF"/>
-              </a:solidFill>
-              <a:latin typeface="Calibri"/>
-            </a:endParaRPr>
-          </a:p>
-          <a:p>
-            <a:r>
-              <a:rPr lang="en-US" dirty="0">
-                <a:solidFill>
-                  <a:srgbClr val="FFFFFF"/>
-                </a:solidFill>
-                <a:latin typeface="Calibri"/>
+            <a:endParaRPr kumimoji="1" lang="en-US" altLang="ja-JP" sz="1200" b="0" kern="1200" dirty="0">
+              <a:solidFill>
+                <a:schemeClr val="tx1"/>
+              </a:solidFill>
+              <a:effectLst/>
+              <a:latin typeface="+mn-lt"/>
+              <a:ea typeface="+mn-ea"/>
+              <a:cs typeface="+mn-cs"/>
+            </a:endParaRPr>
+          </a:p>
+          <a:p>
+            <a:r>
+              <a:rPr kumimoji="1" lang="en-US" altLang="ja-JP" sz="1200" b="0" kern="1200" dirty="0">
+                <a:solidFill>
+                  <a:schemeClr val="tx1"/>
+                </a:solidFill>
+                <a:effectLst/>
+                <a:latin typeface="+mn-lt"/>
+                <a:ea typeface="+mn-ea"/>
+                <a:cs typeface="+mn-cs"/>
               </a:rPr>
               <a:t>Constraints:</a:t>
             </a:r>
           </a:p>
           <a:p>
             <a:r>
-              <a:rPr lang="en-US" dirty="0">
-                <a:solidFill>
-                  <a:srgbClr val="FFFFFF"/>
-                </a:solidFill>
-                <a:latin typeface="Calibri"/>
+              <a:rPr kumimoji="1" lang="en-US" altLang="ja-JP" sz="1200" b="0" kern="1200" dirty="0">
+                <a:solidFill>
+                  <a:schemeClr val="tx1"/>
+                </a:solidFill>
+                <a:effectLst/>
+                <a:latin typeface="+mn-lt"/>
+                <a:ea typeface="+mn-ea"/>
+                <a:cs typeface="+mn-cs"/>
               </a:rPr>
               <a:t>- You SHOULD vary component styles across slides — do NOT reuse the same design repeatedly</a:t>
             </a:r>
           </a:p>
           <a:p>
             <a:r>
-              <a:rPr lang="en-US" dirty="0">
-                <a:solidFill>
-                  <a:srgbClr val="FFFFFF"/>
-                </a:solidFill>
-                <a:latin typeface="Calibri"/>
-              </a:rPr>
-              <a:t>- You MUST adjust colors for light/dark theme</a:t>
-            </a:r>
-          </a:p>
-          <a:p>
-            <a:r>
-              <a:rPr lang="en-US" dirty="0">
-                <a:solidFill>
-                  <a:srgbClr val="FFFFFF"/>
-                </a:solidFill>
-                <a:latin typeface="Calibri"/>
+              <a:rPr kumimoji="1" lang="en-US" altLang="ja-JP" sz="1200" b="0" kern="1200" dirty="0">
+                <a:solidFill>
+                  <a:schemeClr val="tx1"/>
+                </a:solidFill>
+                <a:effectLst/>
+                <a:latin typeface="+mn-lt"/>
+                <a:ea typeface="+mn-ea"/>
+                <a:cs typeface="+mn-cs"/>
               </a:rPr>
               <a:t>- You MUST NOT use textbox </a:t>
             </a:r>
             <a:r>
-              <a:rPr lang="en-US" dirty="0" err="1">
-                <a:solidFill>
-                  <a:srgbClr val="FFFFFF"/>
-                </a:solidFill>
-                <a:latin typeface="Calibri"/>
-              </a:rPr>
-              <a:t>verticalAlign</a:t>
-            </a:r>
-            <a:r>
-              <a:rPr lang="en-US" dirty="0">
-                <a:solidFill>
-                  <a:srgbClr val="FFFFFF"/>
-                </a:solidFill>
-                <a:latin typeface="Calibri"/>
+              <a:rPr kumimoji="1" lang="en-US" altLang="ja-JP" sz="1200" b="0" kern="1200" dirty="0" err="1">
+                <a:solidFill>
+                  <a:schemeClr val="tx1"/>
+                </a:solidFill>
+                <a:effectLst/>
+                <a:latin typeface="+mn-lt"/>
+                <a:ea typeface="+mn-ea"/>
+                <a:cs typeface="+mn-cs"/>
+              </a:rPr>
+              <a:t>verticalAnchor</a:t>
+            </a:r>
+            <a:r>
+              <a:rPr kumimoji="1" lang="en-US" altLang="ja-JP" sz="1200" b="0" kern="1200" dirty="0">
+                <a:solidFill>
+                  <a:schemeClr val="tx1"/>
+                </a:solidFill>
+                <a:effectLst/>
+                <a:latin typeface="+mn-lt"/>
+                <a:ea typeface="+mn-ea"/>
+                <a:cs typeface="+mn-cs"/>
               </a:rPr>
               <a:t> for vertical centering — use shape text + </a:t>
             </a:r>
             <a:r>
-              <a:rPr lang="en-US" dirty="0" err="1">
-                <a:solidFill>
-                  <a:srgbClr val="FFFFFF"/>
-                </a:solidFill>
-                <a:latin typeface="Calibri"/>
-              </a:rPr>
-              <a:t>verticalAlign</a:t>
-            </a:r>
-            <a:r>
-              <a:rPr lang="en-US" dirty="0">
-                <a:solidFill>
-                  <a:srgbClr val="FFFFFF"/>
-                </a:solidFill>
-                <a:latin typeface="Calibri"/>
-              </a:rPr>
-              <a:t>: "middle" or manual y calculation instead</a:t>
-            </a:r>
-          </a:p>
-          <a:p>
-            <a:r>
-              <a:rPr lang="en-US" dirty="0">
-                <a:solidFill>
-                  <a:srgbClr val="FFFFFF"/>
-                </a:solidFill>
-                <a:latin typeface="Calibri"/>
+              <a:rPr kumimoji="1" lang="en-US" altLang="ja-JP" sz="1200" b="0" kern="1200" dirty="0" err="1">
+                <a:solidFill>
+                  <a:schemeClr val="tx1"/>
+                </a:solidFill>
+                <a:effectLst/>
+                <a:latin typeface="+mn-lt"/>
+                <a:ea typeface="+mn-ea"/>
+                <a:cs typeface="+mn-cs"/>
+              </a:rPr>
+              <a:t>verticalAnchor</a:t>
+            </a:r>
+            <a:r>
+              <a:rPr kumimoji="1" lang="en-US" altLang="ja-JP" sz="1200" b="0" kern="1200" dirty="0">
+                <a:solidFill>
+                  <a:schemeClr val="tx1"/>
+                </a:solidFill>
+                <a:effectLst/>
+                <a:latin typeface="+mn-lt"/>
+                <a:ea typeface="+mn-ea"/>
+                <a:cs typeface="+mn-cs"/>
+              </a:rPr>
+              <a:t>: 3 or manual y calculation instead</a:t>
+            </a:r>
+          </a:p>
+          <a:p>
+            <a:r>
+              <a:rPr kumimoji="1" lang="en-US" altLang="ja-JP" sz="1200" b="0" kern="1200" dirty="0">
+                <a:solidFill>
+                  <a:schemeClr val="tx1"/>
+                </a:solidFill>
+                <a:effectLst/>
+                <a:latin typeface="+mn-lt"/>
+                <a:ea typeface="+mn-ea"/>
+                <a:cs typeface="+mn-cs"/>
               </a:rPr>
               <a:t>- You MUST specify height on textboxes — text auto-shrinks to fit. Guide: 1 line = </a:t>
             </a:r>
             <a:r>
-              <a:rPr lang="en-US" dirty="0" err="1">
-                <a:solidFill>
-                  <a:srgbClr val="FFFFFF"/>
-                </a:solidFill>
-                <a:latin typeface="Calibri"/>
+              <a:rPr kumimoji="1" lang="en-US" altLang="ja-JP" sz="1200" b="0" kern="1200" dirty="0" err="1">
+                <a:solidFill>
+                  <a:schemeClr val="tx1"/>
+                </a:solidFill>
+                <a:effectLst/>
+                <a:latin typeface="+mn-lt"/>
+                <a:ea typeface="+mn-ea"/>
+                <a:cs typeface="+mn-cs"/>
               </a:rPr>
               <a:t>fontSize</a:t>
             </a:r>
             <a:r>
-              <a:rPr lang="en-US" dirty="0">
-                <a:solidFill>
-                  <a:srgbClr val="FFFFFF"/>
-                </a:solidFill>
-                <a:latin typeface="Calibri"/>
+              <a:rPr kumimoji="1" lang="en-US" altLang="ja-JP" sz="1200" b="0" kern="1200" dirty="0">
+                <a:solidFill>
+                  <a:schemeClr val="tx1"/>
+                </a:solidFill>
+                <a:effectLst/>
+                <a:latin typeface="+mn-lt"/>
+                <a:ea typeface="+mn-ea"/>
+                <a:cs typeface="+mn-cs"/>
               </a:rPr>
               <a:t> × 3.5, multi-line = lines × </a:t>
             </a:r>
             <a:r>
-              <a:rPr lang="en-US" dirty="0" err="1">
-                <a:solidFill>
-                  <a:srgbClr val="FFFFFF"/>
-                </a:solidFill>
-                <a:latin typeface="Calibri"/>
+              <a:rPr kumimoji="1" lang="en-US" altLang="ja-JP" sz="1200" b="0" kern="1200" dirty="0" err="1">
+                <a:solidFill>
+                  <a:schemeClr val="tx1"/>
+                </a:solidFill>
+                <a:effectLst/>
+                <a:latin typeface="+mn-lt"/>
+                <a:ea typeface="+mn-ea"/>
+                <a:cs typeface="+mn-cs"/>
               </a:rPr>
               <a:t>fontSize</a:t>
             </a:r>
             <a:r>
-              <a:rPr lang="en-US" dirty="0">
-                <a:solidFill>
-                  <a:srgbClr val="FFFFFF"/>
-                </a:solidFill>
-                <a:latin typeface="Calibri"/>
+              <a:rPr kumimoji="1" lang="en-US" altLang="ja-JP" sz="1200" b="0" kern="1200" dirty="0">
+                <a:solidFill>
+                  <a:schemeClr val="tx1"/>
+                </a:solidFill>
+                <a:effectLst/>
+                <a:latin typeface="+mn-lt"/>
+                <a:ea typeface="+mn-ea"/>
+                <a:cs typeface="+mn-cs"/>
               </a:rPr>
               <a:t> × 2.7</a:t>
             </a:r>
           </a:p>
           <a:p>
             <a:r>
-              <a:rPr lang="en-US" dirty="0">
-                <a:solidFill>
-                  <a:srgbClr val="FFFFFF"/>
-                </a:solidFill>
-                <a:latin typeface="Calibri"/>
+              <a:rPr kumimoji="1" lang="en-US" altLang="ja-JP" sz="1200" b="0" kern="1200" dirty="0">
+                <a:solidFill>
+                  <a:schemeClr val="tx1"/>
+                </a:solidFill>
+                <a:effectLst/>
+                <a:latin typeface="+mn-lt"/>
+                <a:ea typeface="+mn-ea"/>
+                <a:cs typeface="+mn-cs"/>
               </a:rPr>
               <a:t>- You SHOULD set </a:t>
             </a:r>
             <a:r>
-              <a:rPr lang="en-US" dirty="0" err="1">
-                <a:solidFill>
-                  <a:srgbClr val="FFFFFF"/>
-                </a:solidFill>
-                <a:latin typeface="Calibri"/>
+              <a:rPr kumimoji="1" lang="en-US" altLang="ja-JP" sz="1200" b="0" kern="1200" dirty="0" err="1">
+                <a:solidFill>
+                  <a:schemeClr val="tx1"/>
+                </a:solidFill>
+                <a:effectLst/>
+                <a:latin typeface="+mn-lt"/>
+                <a:ea typeface="+mn-ea"/>
+                <a:cs typeface="+mn-cs"/>
               </a:rPr>
               <a:t>marginTop</a:t>
             </a:r>
             <a:r>
-              <a:rPr lang="en-US" dirty="0">
-                <a:solidFill>
-                  <a:srgbClr val="FFFFFF"/>
-                </a:solidFill>
-                <a:latin typeface="Calibri"/>
+              <a:rPr kumimoji="1" lang="en-US" altLang="ja-JP" sz="1200" b="0" kern="1200" dirty="0">
+                <a:solidFill>
+                  <a:schemeClr val="tx1"/>
+                </a:solidFill>
+                <a:effectLst/>
+                <a:latin typeface="+mn-lt"/>
+                <a:ea typeface="+mn-ea"/>
+                <a:cs typeface="+mn-cs"/>
               </a:rPr>
               <a:t>: 0 on textboxes when precise positioning is needed</a:t>
             </a:r>
           </a:p>
           <a:p>
-            <a:endParaRPr lang="en-US" dirty="0">
-              <a:solidFill>
-                <a:srgbClr val="FFFFFF"/>
-              </a:solidFill>
-              <a:latin typeface="Calibri"/>
-            </a:endParaRPr>
-          </a:p>
-          <a:p>
-            <a:r>
-              <a:rPr lang="en-US" dirty="0">
-                <a:solidFill>
-                  <a:srgbClr val="FFFFFF"/>
-                </a:solidFill>
-                <a:latin typeface="Calibri"/>
+            <a:endParaRPr kumimoji="1" lang="en-US" altLang="ja-JP" sz="1200" b="0" kern="1200" dirty="0">
+              <a:solidFill>
+                <a:schemeClr val="tx1"/>
+              </a:solidFill>
+              <a:effectLst/>
+              <a:latin typeface="+mn-lt"/>
+              <a:ea typeface="+mn-ea"/>
+              <a:cs typeface="+mn-cs"/>
+            </a:endParaRPr>
+          </a:p>
+          <a:p>
+            <a:r>
+              <a:rPr kumimoji="1" lang="en-US" altLang="ja-JP" sz="1200" b="0" kern="1200" dirty="0">
+                <a:solidFill>
+                  <a:schemeClr val="tx1"/>
+                </a:solidFill>
+                <a:effectLst/>
+                <a:latin typeface="+mn-lt"/>
+                <a:ea typeface="+mn-ea"/>
+                <a:cs typeface="+mn-cs"/>
+              </a:rPr>
+              <a:t>Elements here show only the parameters that matter for the lesson. Required parameters like x, y, width, height, text may be omitted — always supply them in actual slides.</a:t>
+            </a:r>
+          </a:p>
+          <a:p>
+            <a:r>
+              <a:rPr kumimoji="1" lang="en-US" altLang="ja-JP" sz="1200" b="0" kern="1200" dirty="0">
+                <a:solidFill>
+                  <a:schemeClr val="tx1"/>
+                </a:solidFill>
+                <a:effectLst/>
+                <a:latin typeface="+mn-lt"/>
+                <a:ea typeface="+mn-ea"/>
+                <a:cs typeface="+mn-cs"/>
+              </a:rPr>
+              <a:t>When elements use ${</a:t>
+            </a:r>
+            <a:r>
+              <a:rPr kumimoji="1" lang="en-US" altLang="ja-JP" sz="1200" b="0" kern="1200" dirty="0" err="1">
+                <a:solidFill>
+                  <a:schemeClr val="tx1"/>
+                </a:solidFill>
+                <a:effectLst/>
+                <a:latin typeface="+mn-lt"/>
+                <a:ea typeface="+mn-ea"/>
+                <a:cs typeface="+mn-cs"/>
+              </a:rPr>
+              <a:t>x+N</a:t>
+            </a:r>
+            <a:r>
+              <a:rPr kumimoji="1" lang="en-US" altLang="ja-JP" sz="1200" b="0" kern="1200" dirty="0">
+                <a:solidFill>
+                  <a:schemeClr val="tx1"/>
+                </a:solidFill>
+                <a:effectLst/>
+                <a:latin typeface="+mn-lt"/>
+                <a:ea typeface="+mn-ea"/>
+                <a:cs typeface="+mn-cs"/>
+              </a:rPr>
+              <a:t>} notation, it means "base position + offset N." In actual slides, calculate and write the final number (e.g., if your base x is 200, ${x+178} becomes 378).</a:t>
+            </a:r>
+          </a:p>
+          <a:p>
+            <a:endParaRPr kumimoji="1" lang="en-US" altLang="ja-JP" sz="1200" b="0" kern="1200" dirty="0">
+              <a:solidFill>
+                <a:schemeClr val="tx1"/>
+              </a:solidFill>
+              <a:effectLst/>
+              <a:latin typeface="+mn-lt"/>
+              <a:ea typeface="+mn-ea"/>
+              <a:cs typeface="+mn-cs"/>
+            </a:endParaRPr>
+          </a:p>
+          <a:p>
+            <a:r>
+              <a:rPr kumimoji="1" lang="en-US" altLang="ja-JP" sz="1200" b="0" kern="1200" dirty="0">
+                <a:solidFill>
+                  <a:schemeClr val="tx1"/>
+                </a:solidFill>
+                <a:effectLst/>
+                <a:latin typeface="+mn-lt"/>
+                <a:ea typeface="+mn-ea"/>
+                <a:cs typeface="+mn-cs"/>
               </a:rPr>
               <a:t>Icons:</a:t>
             </a:r>
           </a:p>
           <a:p>
             <a:r>
-              <a:rPr lang="en-US" dirty="0">
-                <a:solidFill>
-                  <a:srgbClr val="FFFFFF"/>
-                </a:solidFill>
-                <a:latin typeface="Calibri"/>
+              <a:rPr kumimoji="1" lang="en-US" altLang="ja-JP" sz="1200" b="0" kern="1200" dirty="0">
+                <a:solidFill>
+                  <a:schemeClr val="tx1"/>
+                </a:solidFill>
+                <a:effectLst/>
+                <a:latin typeface="+mn-lt"/>
+                <a:ea typeface="+mn-ea"/>
+                <a:cs typeface="+mn-cs"/>
               </a:rPr>
               <a:t>Icons anchor the eye — viewers grasp "what this is about" before reading text. Actively search icons with icon-search and combine with components.</a:t>
             </a:r>
           </a:p>
           <a:p>
-            <a:endParaRPr dirty="0">
-              <a:solidFill>
-                <a:srgbClr val="FFFFFF"/>
-              </a:solidFill>
-              <a:latin typeface="Calibri"/>
-            </a:endParaRPr>
+            <a:endParaRPr kumimoji="1" lang="en-US" altLang="ja-JP" sz="1200" b="0" kern="1200" dirty="0">
+              <a:solidFill>
+                <a:schemeClr val="tx1"/>
+              </a:solidFill>
+              <a:effectLst/>
+              <a:latin typeface="+mn-lt"/>
+              <a:ea typeface="+mn-ea"/>
+              <a:cs typeface="+mn-cs"/>
+            </a:endParaRPr>
+          </a:p>
+          <a:p>
+            <a:r>
+              <a:rPr kumimoji="1" lang="en-US" altLang="ja-JP" sz="1200" b="0" kern="1200" dirty="0">
+                <a:solidFill>
+                  <a:schemeClr val="tx1"/>
+                </a:solidFill>
+                <a:effectLst/>
+                <a:latin typeface="+mn-lt"/>
+                <a:ea typeface="+mn-ea"/>
+                <a:cs typeface="+mn-cs"/>
+              </a:rPr>
+              <a:t>Color Contrast:</a:t>
+            </a:r>
+          </a:p>
+          <a:p>
+            <a:r>
+              <a:rPr kumimoji="1" lang="en-US" altLang="ja-JP" sz="1200" b="0" kern="1200" dirty="0" err="1">
+                <a:solidFill>
+                  <a:schemeClr val="tx1"/>
+                </a:solidFill>
+                <a:effectLst/>
+                <a:latin typeface="+mn-lt"/>
+                <a:ea typeface="+mn-ea"/>
+                <a:cs typeface="+mn-cs"/>
+              </a:rPr>
+              <a:t>defaultTextColor</a:t>
+            </a:r>
+            <a:r>
+              <a:rPr kumimoji="1" lang="en-US" altLang="ja-JP" sz="1200" b="0" kern="1200" dirty="0">
+                <a:solidFill>
+                  <a:schemeClr val="tx1"/>
+                </a:solidFill>
+                <a:effectLst/>
+                <a:latin typeface="+mn-lt"/>
+                <a:ea typeface="+mn-ea"/>
+                <a:cs typeface="+mn-cs"/>
+              </a:rPr>
+              <a:t> in </a:t>
+            </a:r>
+            <a:r>
+              <a:rPr kumimoji="1" lang="en-US" altLang="ja-JP" sz="1200" b="0" kern="1200" dirty="0" err="1">
+                <a:solidFill>
+                  <a:schemeClr val="tx1"/>
+                </a:solidFill>
+                <a:effectLst/>
+                <a:latin typeface="+mn-lt"/>
+                <a:ea typeface="+mn-ea"/>
+                <a:cs typeface="+mn-cs"/>
+              </a:rPr>
+              <a:t>presentation.json</a:t>
+            </a:r>
+            <a:r>
+              <a:rPr kumimoji="1" lang="en-US" altLang="ja-JP" sz="1200" b="0" kern="1200" dirty="0">
+                <a:solidFill>
+                  <a:schemeClr val="tx1"/>
+                </a:solidFill>
+                <a:effectLst/>
+                <a:latin typeface="+mn-lt"/>
+                <a:ea typeface="+mn-ea"/>
+                <a:cs typeface="+mn-cs"/>
+              </a:rPr>
+              <a:t> is the baseline for all text and icons. Every element inherits this color unless </a:t>
+            </a:r>
+            <a:r>
+              <a:rPr kumimoji="1" lang="en-US" altLang="ja-JP" sz="1200" b="0" kern="1200" dirty="0" err="1">
+                <a:solidFill>
+                  <a:schemeClr val="tx1"/>
+                </a:solidFill>
+                <a:effectLst/>
+                <a:latin typeface="+mn-lt"/>
+                <a:ea typeface="+mn-ea"/>
+                <a:cs typeface="+mn-cs"/>
+              </a:rPr>
+              <a:t>fontColor</a:t>
+            </a:r>
+            <a:r>
+              <a:rPr kumimoji="1" lang="en-US" altLang="ja-JP" sz="1200" b="0" kern="1200" dirty="0">
+                <a:solidFill>
+                  <a:schemeClr val="tx1"/>
+                </a:solidFill>
+                <a:effectLst/>
+                <a:latin typeface="+mn-lt"/>
+                <a:ea typeface="+mn-ea"/>
+                <a:cs typeface="+mn-cs"/>
+              </a:rPr>
+              <a:t> or </a:t>
+            </a:r>
+            <a:r>
+              <a:rPr kumimoji="1" lang="en-US" altLang="ja-JP" sz="1200" b="0" kern="1200" dirty="0" err="1">
+                <a:solidFill>
+                  <a:schemeClr val="tx1"/>
+                </a:solidFill>
+                <a:effectLst/>
+                <a:latin typeface="+mn-lt"/>
+                <a:ea typeface="+mn-ea"/>
+                <a:cs typeface="+mn-cs"/>
+              </a:rPr>
+              <a:t>iconColor</a:t>
+            </a:r>
+            <a:r>
+              <a:rPr kumimoji="1" lang="en-US" altLang="ja-JP" sz="1200" b="0" kern="1200" dirty="0">
+                <a:solidFill>
+                  <a:schemeClr val="tx1"/>
+                </a:solidFill>
+                <a:effectLst/>
+                <a:latin typeface="+mn-lt"/>
+                <a:ea typeface="+mn-ea"/>
+                <a:cs typeface="+mn-cs"/>
+              </a:rPr>
+              <a:t> overrides it.</a:t>
+            </a:r>
+          </a:p>
+          <a:p>
+            <a:endParaRPr kumimoji="1" lang="en-US" altLang="ja-JP" sz="1200" b="0" kern="1200" dirty="0">
+              <a:solidFill>
+                <a:schemeClr val="tx1"/>
+              </a:solidFill>
+              <a:effectLst/>
+              <a:latin typeface="+mn-lt"/>
+              <a:ea typeface="+mn-ea"/>
+              <a:cs typeface="+mn-cs"/>
+            </a:endParaRPr>
+          </a:p>
+          <a:p>
+            <a:r>
+              <a:rPr kumimoji="1" lang="en-US" altLang="ja-JP" sz="1200" b="0" kern="1200" dirty="0">
+                <a:solidFill>
+                  <a:schemeClr val="tx1"/>
+                </a:solidFill>
+                <a:effectLst/>
+                <a:latin typeface="+mn-lt"/>
+                <a:ea typeface="+mn-ea"/>
+                <a:cs typeface="+mn-cs"/>
+              </a:rPr>
+              <a:t>Dark fill absorbs dark text. Light fill absorbs light text. When an element's fill fights the default, override explicitly — </a:t>
+            </a:r>
+            <a:r>
+              <a:rPr kumimoji="1" lang="en-US" altLang="ja-JP" sz="1200" b="0" kern="1200" dirty="0" err="1">
+                <a:solidFill>
+                  <a:schemeClr val="tx1"/>
+                </a:solidFill>
+                <a:effectLst/>
+                <a:latin typeface="+mn-lt"/>
+                <a:ea typeface="+mn-ea"/>
+                <a:cs typeface="+mn-cs"/>
+              </a:rPr>
+              <a:t>fontColor</a:t>
+            </a:r>
+            <a:r>
+              <a:rPr kumimoji="1" lang="en-US" altLang="ja-JP" sz="1200" b="0" kern="1200" dirty="0">
+                <a:solidFill>
+                  <a:schemeClr val="tx1"/>
+                </a:solidFill>
+                <a:effectLst/>
+                <a:latin typeface="+mn-lt"/>
+                <a:ea typeface="+mn-ea"/>
+                <a:cs typeface="+mn-cs"/>
+              </a:rPr>
+              <a:t> for text, </a:t>
+            </a:r>
+            <a:r>
+              <a:rPr kumimoji="1" lang="en-US" altLang="ja-JP" sz="1200" b="0" kern="1200" dirty="0" err="1">
+                <a:solidFill>
+                  <a:schemeClr val="tx1"/>
+                </a:solidFill>
+                <a:effectLst/>
+                <a:latin typeface="+mn-lt"/>
+                <a:ea typeface="+mn-ea"/>
+                <a:cs typeface="+mn-cs"/>
+              </a:rPr>
+              <a:t>iconColor</a:t>
+            </a:r>
+            <a:r>
+              <a:rPr kumimoji="1" lang="en-US" altLang="ja-JP" sz="1200" b="0" kern="1200" dirty="0">
+                <a:solidFill>
+                  <a:schemeClr val="tx1"/>
+                </a:solidFill>
+                <a:effectLst/>
+                <a:latin typeface="+mn-lt"/>
+                <a:ea typeface="+mn-ea"/>
+                <a:cs typeface="+mn-cs"/>
+              </a:rPr>
+              <a:t> for icons.</a:t>
+            </a:r>
+          </a:p>
+          <a:p>
+            <a:endParaRPr kumimoji="1" lang="en-US" altLang="ja-JP" sz="1200" b="0" kern="1200" dirty="0">
+              <a:solidFill>
+                <a:schemeClr val="tx1"/>
+              </a:solidFill>
+              <a:effectLst/>
+              <a:latin typeface="+mn-lt"/>
+              <a:ea typeface="+mn-ea"/>
+              <a:cs typeface="+mn-cs"/>
+            </a:endParaRPr>
+          </a:p>
+          <a:p>
+            <a:pPr marL="0" marR="0" lvl="0" indent="0" algn="l" defTabSz="914400" rtl="0" eaLnBrk="1" fontAlgn="auto" latinLnBrk="0" hangingPunct="1">
+              <a:lnSpc>
+                <a:spcPct val="100000"/>
+              </a:lnSpc>
+              <a:spcBef>
+                <a:spcPts val="0"/>
+              </a:spcBef>
+              <a:spcAft>
+                <a:spcPts val="0"/>
+              </a:spcAft>
+              <a:buClrTx/>
+              <a:buSzTx/>
+              <a:buFontTx/>
+              <a:buNone/>
+              <a:tabLst/>
+              <a:defRPr/>
+            </a:pPr>
+            <a:r>
+              <a:rPr kumimoji="1" lang="en-US" altLang="ja-JP" sz="1200" b="0" kern="1200" dirty="0">
+                <a:solidFill>
+                  <a:schemeClr val="tx1"/>
+                </a:solidFill>
+                <a:effectLst/>
+                <a:latin typeface="+mn-lt"/>
+                <a:ea typeface="+mn-ea"/>
+                <a:cs typeface="+mn-cs"/>
+              </a:rPr>
+              <a:t>Icons are always recolored to </a:t>
+            </a:r>
+            <a:r>
+              <a:rPr kumimoji="1" lang="en-US" altLang="ja-JP" sz="1200" b="0" kern="1200" dirty="0" err="1">
+                <a:solidFill>
+                  <a:schemeClr val="tx1"/>
+                </a:solidFill>
+                <a:effectLst/>
+                <a:latin typeface="+mn-lt"/>
+                <a:ea typeface="+mn-ea"/>
+                <a:cs typeface="+mn-cs"/>
+              </a:rPr>
+              <a:t>defaultTextColor</a:t>
+            </a:r>
+            <a:r>
+              <a:rPr kumimoji="1" lang="en-US" altLang="ja-JP" sz="1200" b="0" kern="1200" dirty="0">
+                <a:solidFill>
+                  <a:schemeClr val="tx1"/>
+                </a:solidFill>
+                <a:effectLst/>
+                <a:latin typeface="+mn-lt"/>
+                <a:ea typeface="+mn-ea"/>
+                <a:cs typeface="+mn-cs"/>
+              </a:rPr>
+              <a:t> or </a:t>
+            </a:r>
+            <a:r>
+              <a:rPr kumimoji="1" lang="en-US" altLang="ja-JP" sz="1200" kern="1200" dirty="0" err="1">
+                <a:solidFill>
+                  <a:schemeClr val="tx1"/>
+                </a:solidFill>
+                <a:effectLst/>
+                <a:latin typeface="+mn-lt"/>
+                <a:ea typeface="+mn-ea"/>
+                <a:cs typeface="+mn-cs"/>
+              </a:rPr>
+              <a:t>iconColor</a:t>
+            </a:r>
+            <a:r>
+              <a:rPr kumimoji="1" lang="en-US" altLang="ja-JP" sz="1200" b="0" kern="1200" dirty="0">
+                <a:solidFill>
+                  <a:schemeClr val="tx1"/>
+                </a:solidFill>
+                <a:effectLst/>
+                <a:latin typeface="+mn-lt"/>
+                <a:ea typeface="+mn-ea"/>
+                <a:cs typeface="+mn-cs"/>
+              </a:rPr>
+              <a:t>, so light/dark icon variants (e.g. </a:t>
+            </a:r>
+            <a:r>
+              <a:rPr kumimoji="1" lang="en-US" altLang="ja-JP" sz="1200" b="0" kern="1200" dirty="0" err="1">
+                <a:solidFill>
+                  <a:schemeClr val="tx1"/>
+                </a:solidFill>
+                <a:effectLst/>
+                <a:latin typeface="+mn-lt"/>
+                <a:ea typeface="+mn-ea"/>
+                <a:cs typeface="+mn-cs"/>
+              </a:rPr>
+              <a:t>user_light</a:t>
+            </a:r>
+            <a:r>
+              <a:rPr kumimoji="1" lang="en-US" altLang="ja-JP" sz="1200" b="0" kern="1200" dirty="0">
+                <a:solidFill>
+                  <a:schemeClr val="tx1"/>
+                </a:solidFill>
+                <a:effectLst/>
+                <a:latin typeface="+mn-lt"/>
+                <a:ea typeface="+mn-ea"/>
+                <a:cs typeface="+mn-cs"/>
+              </a:rPr>
+              <a:t>, </a:t>
+            </a:r>
+            <a:r>
+              <a:rPr kumimoji="1" lang="en-US" altLang="ja-JP" sz="1200" b="0" kern="1200" dirty="0" err="1">
+                <a:solidFill>
+                  <a:schemeClr val="tx1"/>
+                </a:solidFill>
+                <a:effectLst/>
+                <a:latin typeface="+mn-lt"/>
+                <a:ea typeface="+mn-ea"/>
+                <a:cs typeface="+mn-cs"/>
+              </a:rPr>
+              <a:t>user_dark</a:t>
+            </a:r>
+            <a:r>
+              <a:rPr kumimoji="1" lang="en-US" altLang="ja-JP" sz="1200" b="0" kern="1200" dirty="0">
+                <a:solidFill>
+                  <a:schemeClr val="tx1"/>
+                </a:solidFill>
+                <a:effectLst/>
+                <a:latin typeface="+mn-lt"/>
+                <a:ea typeface="+mn-ea"/>
+                <a:cs typeface="+mn-cs"/>
+              </a:rPr>
+              <a:t>) are unnecessary. </a:t>
+            </a:r>
           </a:p>
         </p:txBody>
       </p:sp>
@@ -661,11 +1117,14 @@
           <a:lstStyle/>
           <a:p>
             <a:r>
-              <a:rPr>
-                <a:solidFill>
-                  <a:srgbClr val="FFFFFF"/>
-                </a:solidFill>
-                <a:latin typeface="Calibri"/>
+              <a:rPr kumimoji="1" lang="en-US" altLang="ja-JP" sz="1200" b="0" kern="1200" dirty="0">
+                <a:solidFill>
+                  <a:schemeClr val="tx1"/>
+                </a:solidFill>
+                <a:effectLst/>
+                <a:latin typeface="+mn-lt"/>
+                <a:ea typeface="+mn-ea"/>
+                <a:cs typeface="+mn-cs"/>
               </a:rPr>
               <a:t>[Section] Connectors &amp; Flow — Connections, processes, and flow headers</a:t>
             </a:r>
@@ -819,7 +1278,7 @@
                 </a:solidFill>
                 <a:latin typeface="Calibri"/>
               </a:rPr>
-              <a:t>Line with an arrow ending — the lightest. It connects two things. The eye follows the path, not the arrow. Flow diagrams, architecture diagrams, any place where the arrow serves the structure. Straight line for direct paths, elbow when you need to route around things. Need a label? Place text above or below — the line itself carries no words.</a:t>
+              <a:t>Line with a tail end — the lightest. It connects two things. The eye follows the path, not the arrow. Flow diagrams, architecture diagrams, any place where the arrow serves the structure. Straight line for direct paths, elbow when you need to route around things. Need a label? Place text above or below — the line itself carries no words.</a:t>
             </a:r>
           </a:p>
           <a:p>
@@ -877,6 +1336,160 @@
                 <a:latin typeface="Calibri"/>
               </a:rPr>
               <a:t>Block arrow and triangle compete for the same role — "standalone direction signal." The choice is tone: bold and explicit, or minimal and subtle. Line ending doesn't compete. It belongs to a different job entirely.</a:t>
+            </a:r>
+          </a:p>
+          <a:p>
+            <a:endParaRPr lang="en-US" dirty="0">
+              <a:solidFill>
+                <a:srgbClr val="FFFFFF"/>
+              </a:solidFill>
+              <a:latin typeface="Calibri"/>
+            </a:endParaRPr>
+          </a:p>
+          <a:p>
+            <a:r>
+              <a:rPr lang="en-US" dirty="0">
+                <a:solidFill>
+                  <a:srgbClr val="FFFFFF"/>
+                </a:solidFill>
+                <a:latin typeface="Calibri"/>
+              </a:rPr>
+              <a:t>```</a:t>
+            </a:r>
+            <a:r>
+              <a:rPr lang="en-US" dirty="0" err="1">
+                <a:solidFill>
+                  <a:srgbClr val="FFFFFF"/>
+                </a:solidFill>
+                <a:latin typeface="Calibri"/>
+              </a:rPr>
+              <a:t>json</a:t>
+            </a:r>
+            <a:endParaRPr lang="en-US" dirty="0">
+              <a:solidFill>
+                <a:srgbClr val="FFFFFF"/>
+              </a:solidFill>
+              <a:latin typeface="Calibri"/>
+            </a:endParaRPr>
+          </a:p>
+          <a:p>
+            <a:r>
+              <a:rPr lang="en-US" dirty="0">
+                <a:solidFill>
+                  <a:srgbClr val="FFFFFF"/>
+                </a:solidFill>
+                <a:latin typeface="Calibri"/>
+              </a:rPr>
+              <a:t>[</a:t>
+            </a:r>
+          </a:p>
+          <a:p>
+            <a:r>
+              <a:rPr lang="en-US" dirty="0">
+                <a:solidFill>
+                  <a:srgbClr val="FFFFFF"/>
+                </a:solidFill>
+                <a:latin typeface="Calibri"/>
+              </a:rPr>
+              <a:t>  {"type": "line", "width": 134, "height": 0, "</a:t>
+            </a:r>
+            <a:r>
+              <a:rPr lang="en-US" dirty="0" err="1">
+                <a:solidFill>
+                  <a:srgbClr val="FFFFFF"/>
+                </a:solidFill>
+                <a:latin typeface="Calibri"/>
+              </a:rPr>
+              <a:t>lineWidth</a:t>
+            </a:r>
+            <a:r>
+              <a:rPr lang="en-US" dirty="0">
+                <a:solidFill>
+                  <a:srgbClr val="FFFFFF"/>
+                </a:solidFill>
+                <a:latin typeface="Calibri"/>
+              </a:rPr>
+              <a:t>": 4.5, "</a:t>
+            </a:r>
+            <a:r>
+              <a:rPr lang="en-US" dirty="0" err="1">
+                <a:solidFill>
+                  <a:srgbClr val="FFFFFF"/>
+                </a:solidFill>
+                <a:latin typeface="Calibri"/>
+              </a:rPr>
+              <a:t>tailEnd</a:t>
+            </a:r>
+            <a:r>
+              <a:rPr lang="en-US" dirty="0">
+                <a:solidFill>
+                  <a:srgbClr val="FFFFFF"/>
+                </a:solidFill>
+                <a:latin typeface="Calibri"/>
+              </a:rPr>
+              <a:t>": "arrow", "color": "#FFFFFF"},</a:t>
+            </a:r>
+          </a:p>
+          <a:p>
+            <a:r>
+              <a:rPr lang="en-US" dirty="0">
+                <a:solidFill>
+                  <a:srgbClr val="FFFFFF"/>
+                </a:solidFill>
+                <a:latin typeface="Calibri"/>
+              </a:rPr>
+              <a:t>  {"type": "shape", "shape": "</a:t>
+            </a:r>
+            <a:r>
+              <a:rPr lang="en-US" dirty="0" err="1">
+                <a:solidFill>
+                  <a:srgbClr val="FFFFFF"/>
+                </a:solidFill>
+                <a:latin typeface="Calibri"/>
+              </a:rPr>
+              <a:t>arrow_right</a:t>
+            </a:r>
+            <a:r>
+              <a:rPr lang="en-US" dirty="0">
+                <a:solidFill>
+                  <a:srgbClr val="FFFFFF"/>
+                </a:solidFill>
+                <a:latin typeface="Calibri"/>
+              </a:rPr>
+              <a:t>", "width": 183, "height": 110, "adjustments": [0.5, 0.97886], "fill": "#FFFFFF"},</a:t>
+            </a:r>
+          </a:p>
+          <a:p>
+            <a:r>
+              <a:rPr lang="en-US" dirty="0">
+                <a:solidFill>
+                  <a:srgbClr val="FFFFFF"/>
+                </a:solidFill>
+                <a:latin typeface="Calibri"/>
+              </a:rPr>
+              <a:t>  {"type": "shape", "shape": "triangle", "width": 110, "height": 95, "rotation": 90.0, "fill": "#FFFFFF"}</a:t>
+            </a:r>
+          </a:p>
+          <a:p>
+            <a:r>
+              <a:rPr lang="en-US" dirty="0">
+                <a:solidFill>
+                  <a:srgbClr val="FFFFFF"/>
+                </a:solidFill>
+                <a:latin typeface="Calibri"/>
+              </a:rPr>
+              <a:t>]</a:t>
+            </a:r>
+          </a:p>
+          <a:p>
+            <a:r>
+              <a:rPr lang="en-US" dirty="0">
+                <a:solidFill>
+                  <a:srgbClr val="FFFFFF"/>
+                </a:solidFill>
+                <a:latin typeface="Calibri"/>
+              </a:rPr>
+              <a:t>```</a:t>
             </a:r>
             <a:endParaRPr dirty="0">
               <a:solidFill>
@@ -970,7 +1583,7 @@
           <a:lstStyle/>
           <a:p>
             <a:r>
-              <a:rPr dirty="0">
+              <a:rPr lang="en-US" dirty="0">
                 <a:solidFill>
                   <a:srgbClr val="FFFFFF"/>
                 </a:solidFill>
@@ -978,6 +1591,8 @@
               </a:rPr>
               <a:t>[Component] flow-step — Flow connectors for processes, timelines, and cycles</a:t>
             </a:r>
+          </a:p>
+          <a:p>
             <a:endParaRPr lang="en-US" dirty="0">
               <a:solidFill>
                 <a:srgbClr val="FFFFFF"/>
@@ -986,6 +1601,17 @@
             </a:endParaRPr>
           </a:p>
           <a:p>
+            <a:r>
+              <a:rPr lang="en-US" dirty="0">
+                <a:solidFill>
+                  <a:srgbClr val="FFFFFF"/>
+                </a:solidFill>
+                <a:latin typeface="Calibri"/>
+              </a:rPr>
+              <a:t>Flow shows sequence and direction. Cards are the what, connectors are the where-to.</a:t>
+            </a:r>
+          </a:p>
+          <a:p>
             <a:endParaRPr lang="en-US" dirty="0">
               <a:solidFill>
                 <a:srgbClr val="FFFFFF"/>
@@ -1001,7 +1627,7 @@
                 </a:solidFill>
                 <a:latin typeface="Calibri"/>
               </a:rPr>
-              <a:t>Flow shows sequence and direction. Cards are the what, connectors are the where-to.</a:t>
+              <a:t>Let's build this.</a:t>
             </a:r>
           </a:p>
           <a:p>
@@ -1020,7 +1646,7 @@
                 </a:solidFill>
                 <a:latin typeface="Calibri"/>
               </a:rPr>
-              <a:t>Let's build this.</a:t>
+              <a:t>Cyclic process — four steps looping back. Need something to show direction between cards. Arrows, triangles, chevrons, numbering, even a color gradient — anything that implies "from here to there." Arrows are the most explicit, so arrows here.</a:t>
             </a:r>
           </a:p>
           <a:p>
@@ -1039,7 +1665,43 @@
                 </a:solidFill>
                 <a:latin typeface="Calibri"/>
               </a:rPr>
-              <a:t>Cyclic process — four steps looping back. Need something to show direction between cards. Arrows, triangles, chevrons, numbering, even a color gradient — anything that implies "from here to there." Arrows are the most explicit, so arrows here.</a:t>
+              <a:t>Need four directions. Left-going and up-going point against the default — </a:t>
+            </a:r>
+            <a:r>
+              <a:rPr lang="en-US" dirty="0" err="1">
+                <a:solidFill>
+                  <a:srgbClr val="FFFFFF"/>
+                </a:solidFill>
+                <a:latin typeface="Calibri"/>
+              </a:rPr>
+              <a:t>flipH</a:t>
+            </a:r>
+            <a:r>
+              <a:rPr lang="en-US" dirty="0">
+                <a:solidFill>
+                  <a:srgbClr val="FFFFFF"/>
+                </a:solidFill>
+                <a:latin typeface="Calibri"/>
+              </a:rPr>
+              <a:t>/</a:t>
+            </a:r>
+            <a:r>
+              <a:rPr lang="en-US" dirty="0" err="1">
+                <a:solidFill>
+                  <a:srgbClr val="FFFFFF"/>
+                </a:solidFill>
+                <a:latin typeface="Calibri"/>
+              </a:rPr>
+              <a:t>flipV</a:t>
+            </a:r>
+            <a:r>
+              <a:rPr lang="en-US" dirty="0">
+                <a:solidFill>
+                  <a:srgbClr val="FFFFFF"/>
+                </a:solidFill>
+                <a:latin typeface="Calibri"/>
+              </a:rPr>
+              <a:t> reverses them. Without flips, all arrows face one way and the loop can't close.</a:t>
             </a:r>
           </a:p>
           <a:p>
@@ -1058,7 +1720,26 @@
                 </a:solidFill>
                 <a:latin typeface="Calibri"/>
               </a:rPr>
-              <a:t>Need four directions. Left-going and up-going point against the default — </a:t>
+              <a:t>Solid line feels certain. Dashed line feels broken, tentative — the eye reads gaps as doubt. All paths here are confirmed, so solid. Dash one when it's optional or uncertain.</a:t>
+            </a:r>
+          </a:p>
+          <a:p>
+            <a:endParaRPr lang="en-US" dirty="0">
+              <a:solidFill>
+                <a:srgbClr val="FFFFFF"/>
+              </a:solidFill>
+              <a:latin typeface="Calibri"/>
+            </a:endParaRPr>
+          </a:p>
+          <a:p>
+            <a:r>
+              <a:rPr lang="en-US" dirty="0">
+                <a:solidFill>
+                  <a:srgbClr val="FFFFFF"/>
+                </a:solidFill>
+                <a:latin typeface="Calibri"/>
+              </a:rPr>
+              <a:t>```</a:t>
             </a:r>
             <a:r>
               <a:rPr lang="en-US" dirty="0" err="1">
@@ -1067,6 +1748,325 @@
                 </a:solidFill>
                 <a:latin typeface="Calibri"/>
               </a:rPr>
+              <a:t>json</a:t>
+            </a:r>
+            <a:endParaRPr lang="en-US" dirty="0">
+              <a:solidFill>
+                <a:srgbClr val="FFFFFF"/>
+              </a:solidFill>
+              <a:latin typeface="Calibri"/>
+            </a:endParaRPr>
+          </a:p>
+          <a:p>
+            <a:r>
+              <a:rPr lang="en-US" dirty="0">
+                <a:solidFill>
+                  <a:srgbClr val="FFFFFF"/>
+                </a:solidFill>
+                <a:latin typeface="Calibri"/>
+              </a:rPr>
+              <a:t>[</a:t>
+            </a:r>
+          </a:p>
+          <a:p>
+            <a:r>
+              <a:rPr lang="en-US" dirty="0">
+                <a:solidFill>
+                  <a:srgbClr val="FFFFFF"/>
+                </a:solidFill>
+                <a:latin typeface="Calibri"/>
+              </a:rPr>
+              <a:t>  {"type": "shape", "shape": "</a:t>
+            </a:r>
+            <a:r>
+              <a:rPr lang="en-US" dirty="0" err="1">
+                <a:solidFill>
+                  <a:srgbClr val="FFFFFF"/>
+                </a:solidFill>
+                <a:latin typeface="Calibri"/>
+              </a:rPr>
+              <a:t>rounded_rectangle</a:t>
+            </a:r>
+            <a:r>
+              <a:rPr lang="en-US" dirty="0">
+                <a:solidFill>
+                  <a:srgbClr val="FFFFFF"/>
+                </a:solidFill>
+                <a:latin typeface="Calibri"/>
+              </a:rPr>
+              <a:t>", "x": "${x}", "y": "${y}", "width": 400, "height": 225, "adjustments": [0.15], "line": "#FF9900", "</a:t>
+            </a:r>
+            <a:r>
+              <a:rPr lang="en-US" dirty="0" err="1">
+                <a:solidFill>
+                  <a:srgbClr val="FFFFFF"/>
+                </a:solidFill>
+                <a:latin typeface="Calibri"/>
+              </a:rPr>
+              <a:t>lineWidth</a:t>
+            </a:r>
+            <a:r>
+              <a:rPr lang="en-US" dirty="0">
+                <a:solidFill>
+                  <a:srgbClr val="FFFFFF"/>
+                </a:solidFill>
+                <a:latin typeface="Calibri"/>
+              </a:rPr>
+              <a:t>": 1.5},</a:t>
+            </a:r>
+          </a:p>
+          <a:p>
+            <a:r>
+              <a:rPr lang="en-US" dirty="0">
+                <a:solidFill>
+                  <a:srgbClr val="FFFFFF"/>
+                </a:solidFill>
+                <a:latin typeface="Calibri"/>
+              </a:rPr>
+              <a:t>  {"type": "shape", "shape": "</a:t>
+            </a:r>
+            <a:r>
+              <a:rPr lang="en-US" dirty="0" err="1">
+                <a:solidFill>
+                  <a:srgbClr val="FFFFFF"/>
+                </a:solidFill>
+                <a:latin typeface="Calibri"/>
+              </a:rPr>
+              <a:t>rounded_rectangle</a:t>
+            </a:r>
+            <a:r>
+              <a:rPr lang="en-US" dirty="0">
+                <a:solidFill>
+                  <a:srgbClr val="FFFFFF"/>
+                </a:solidFill>
+                <a:latin typeface="Calibri"/>
+              </a:rPr>
+              <a:t>", "x": "${x+534}", "y": "${y}", "width": 400, "height": 225, "adjustments": [0.15], "line": "#FF9900", "</a:t>
+            </a:r>
+            <a:r>
+              <a:rPr lang="en-US" dirty="0" err="1">
+                <a:solidFill>
+                  <a:srgbClr val="FFFFFF"/>
+                </a:solidFill>
+                <a:latin typeface="Calibri"/>
+              </a:rPr>
+              <a:t>lineWidth</a:t>
+            </a:r>
+            <a:r>
+              <a:rPr lang="en-US" dirty="0">
+                <a:solidFill>
+                  <a:srgbClr val="FFFFFF"/>
+                </a:solidFill>
+                <a:latin typeface="Calibri"/>
+              </a:rPr>
+              <a:t>": 1.5},</a:t>
+            </a:r>
+          </a:p>
+          <a:p>
+            <a:r>
+              <a:rPr lang="en-US" dirty="0">
+                <a:solidFill>
+                  <a:srgbClr val="FFFFFF"/>
+                </a:solidFill>
+                <a:latin typeface="Calibri"/>
+              </a:rPr>
+              <a:t>  {"type": "shape", "shape": "</a:t>
+            </a:r>
+            <a:r>
+              <a:rPr lang="en-US" dirty="0" err="1">
+                <a:solidFill>
+                  <a:srgbClr val="FFFFFF"/>
+                </a:solidFill>
+                <a:latin typeface="Calibri"/>
+              </a:rPr>
+              <a:t>rounded_rectangle</a:t>
+            </a:r>
+            <a:r>
+              <a:rPr lang="en-US" dirty="0">
+                <a:solidFill>
+                  <a:srgbClr val="FFFFFF"/>
+                </a:solidFill>
+                <a:latin typeface="Calibri"/>
+              </a:rPr>
+              <a:t>", "x": "${x+534}", "y": "${y+398}", "width": 400, "height": 225, "adjustments": [0.15], "line": "#FF9900", "</a:t>
+            </a:r>
+            <a:r>
+              <a:rPr lang="en-US" dirty="0" err="1">
+                <a:solidFill>
+                  <a:srgbClr val="FFFFFF"/>
+                </a:solidFill>
+                <a:latin typeface="Calibri"/>
+              </a:rPr>
+              <a:t>lineWidth</a:t>
+            </a:r>
+            <a:r>
+              <a:rPr lang="en-US" dirty="0">
+                <a:solidFill>
+                  <a:srgbClr val="FFFFFF"/>
+                </a:solidFill>
+                <a:latin typeface="Calibri"/>
+              </a:rPr>
+              <a:t>": 1.5},</a:t>
+            </a:r>
+          </a:p>
+          <a:p>
+            <a:r>
+              <a:rPr lang="en-US" dirty="0">
+                <a:solidFill>
+                  <a:srgbClr val="FFFFFF"/>
+                </a:solidFill>
+                <a:latin typeface="Calibri"/>
+              </a:rPr>
+              <a:t>  {"type": "shape", "shape": "</a:t>
+            </a:r>
+            <a:r>
+              <a:rPr lang="en-US" dirty="0" err="1">
+                <a:solidFill>
+                  <a:srgbClr val="FFFFFF"/>
+                </a:solidFill>
+                <a:latin typeface="Calibri"/>
+              </a:rPr>
+              <a:t>rounded_rectangle</a:t>
+            </a:r>
+            <a:r>
+              <a:rPr lang="en-US" dirty="0">
+                <a:solidFill>
+                  <a:srgbClr val="FFFFFF"/>
+                </a:solidFill>
+                <a:latin typeface="Calibri"/>
+              </a:rPr>
+              <a:t>", "x": "${x}", "y": "${y+398}", "width": 400, "height": 225, "adjustments": [0.15], "line": "#FF9900", "</a:t>
+            </a:r>
+            <a:r>
+              <a:rPr lang="en-US" dirty="0" err="1">
+                <a:solidFill>
+                  <a:srgbClr val="FFFFFF"/>
+                </a:solidFill>
+                <a:latin typeface="Calibri"/>
+              </a:rPr>
+              <a:t>lineWidth</a:t>
+            </a:r>
+            <a:r>
+              <a:rPr lang="en-US" dirty="0">
+                <a:solidFill>
+                  <a:srgbClr val="FFFFFF"/>
+                </a:solidFill>
+                <a:latin typeface="Calibri"/>
+              </a:rPr>
+              <a:t>": 1.5},</a:t>
+            </a:r>
+          </a:p>
+          <a:p>
+            <a:r>
+              <a:rPr lang="en-US" dirty="0">
+                <a:solidFill>
+                  <a:srgbClr val="FFFFFF"/>
+                </a:solidFill>
+                <a:latin typeface="Calibri"/>
+              </a:rPr>
+              <a:t>  {"type": "line", "x": "${x+400}", "y": "${y+113}", "width": 134, "height": 0, "</a:t>
+            </a:r>
+            <a:r>
+              <a:rPr lang="en-US" dirty="0" err="1">
+                <a:solidFill>
+                  <a:srgbClr val="FFFFFF"/>
+                </a:solidFill>
+                <a:latin typeface="Calibri"/>
+              </a:rPr>
+              <a:t>lineWidth</a:t>
+            </a:r>
+            <a:r>
+              <a:rPr lang="en-US" dirty="0">
+                <a:solidFill>
+                  <a:srgbClr val="FFFFFF"/>
+                </a:solidFill>
+                <a:latin typeface="Calibri"/>
+              </a:rPr>
+              <a:t>": 4.5, "</a:t>
+            </a:r>
+            <a:r>
+              <a:rPr lang="en-US" dirty="0" err="1">
+                <a:solidFill>
+                  <a:srgbClr val="FFFFFF"/>
+                </a:solidFill>
+                <a:latin typeface="Calibri"/>
+              </a:rPr>
+              <a:t>tailEnd</a:t>
+            </a:r>
+            <a:r>
+              <a:rPr lang="en-US" dirty="0">
+                <a:solidFill>
+                  <a:srgbClr val="FFFFFF"/>
+                </a:solidFill>
+                <a:latin typeface="Calibri"/>
+              </a:rPr>
+              <a:t>": "arrow", "color": "#FF9900"},</a:t>
+            </a:r>
+          </a:p>
+          <a:p>
+            <a:r>
+              <a:rPr lang="en-US" dirty="0">
+                <a:solidFill>
+                  <a:srgbClr val="FFFFFF"/>
+                </a:solidFill>
+                <a:latin typeface="Calibri"/>
+              </a:rPr>
+              <a:t>  {"type": "line", "x": "${x+734}", "y": "${y+225}", "width": 0, "height": 173, "</a:t>
+            </a:r>
+            <a:r>
+              <a:rPr lang="en-US" dirty="0" err="1">
+                <a:solidFill>
+                  <a:srgbClr val="FFFFFF"/>
+                </a:solidFill>
+                <a:latin typeface="Calibri"/>
+              </a:rPr>
+              <a:t>lineWidth</a:t>
+            </a:r>
+            <a:r>
+              <a:rPr lang="en-US" dirty="0">
+                <a:solidFill>
+                  <a:srgbClr val="FFFFFF"/>
+                </a:solidFill>
+                <a:latin typeface="Calibri"/>
+              </a:rPr>
+              <a:t>": 4.5, "</a:t>
+            </a:r>
+            <a:r>
+              <a:rPr lang="en-US" dirty="0" err="1">
+                <a:solidFill>
+                  <a:srgbClr val="FFFFFF"/>
+                </a:solidFill>
+                <a:latin typeface="Calibri"/>
+              </a:rPr>
+              <a:t>tailEnd</a:t>
+            </a:r>
+            <a:r>
+              <a:rPr lang="en-US" dirty="0">
+                <a:solidFill>
+                  <a:srgbClr val="FFFFFF"/>
+                </a:solidFill>
+                <a:latin typeface="Calibri"/>
+              </a:rPr>
+              <a:t>": "arrow", "color": "#FF9900"},</a:t>
+            </a:r>
+          </a:p>
+          <a:p>
+            <a:r>
+              <a:rPr lang="en-US" dirty="0">
+                <a:solidFill>
+                  <a:srgbClr val="FFFFFF"/>
+                </a:solidFill>
+                <a:latin typeface="Calibri"/>
+              </a:rPr>
+              <a:t>  {"type": "line", "x": "${x+400}", "y": "${y+511}", "width": 134, "height": 0, "</a:t>
+            </a:r>
+            <a:r>
+              <a:rPr lang="en-US" dirty="0" err="1">
+                <a:solidFill>
+                  <a:srgbClr val="FFFFFF"/>
+                </a:solidFill>
+                <a:latin typeface="Calibri"/>
+              </a:rPr>
               <a:t>flipH</a:t>
             </a:r>
             <a:r>
@@ -1076,7 +2076,7 @@
                 </a:solidFill>
                 <a:latin typeface="Calibri"/>
               </a:rPr>
-              <a:t>/</a:t>
+              <a:t>": true, "</a:t>
             </a:r>
             <a:r>
               <a:rPr lang="en-US" dirty="0" err="1">
@@ -1085,6 +2085,53 @@
                 </a:solidFill>
                 <a:latin typeface="Calibri"/>
               </a:rPr>
+              <a:t>lineWidth</a:t>
+            </a:r>
+            <a:r>
+              <a:rPr lang="en-US" dirty="0">
+                <a:solidFill>
+                  <a:srgbClr val="FFFFFF"/>
+                </a:solidFill>
+                <a:latin typeface="Calibri"/>
+              </a:rPr>
+              <a:t>": 4.5, "</a:t>
+            </a:r>
+            <a:r>
+              <a:rPr lang="en-US" dirty="0" err="1">
+                <a:solidFill>
+                  <a:srgbClr val="FFFFFF"/>
+                </a:solidFill>
+                <a:latin typeface="Calibri"/>
+              </a:rPr>
+              <a:t>tailEnd</a:t>
+            </a:r>
+            <a:r>
+              <a:rPr lang="en-US" dirty="0">
+                <a:solidFill>
+                  <a:srgbClr val="FFFFFF"/>
+                </a:solidFill>
+                <a:latin typeface="Calibri"/>
+              </a:rPr>
+              <a:t>": "arrow", "color": "#FF9900"},</a:t>
+            </a:r>
+          </a:p>
+          <a:p>
+            <a:r>
+              <a:rPr lang="en-US" dirty="0">
+                <a:solidFill>
+                  <a:srgbClr val="FFFFFF"/>
+                </a:solidFill>
+                <a:latin typeface="Calibri"/>
+              </a:rPr>
+              <a:t>  {"type": "line", "x": "${x+200}", "y": "${y+225}", "width": 0, "height": 173, "</a:t>
+            </a:r>
+            <a:r>
+              <a:rPr lang="en-US" dirty="0" err="1">
+                <a:solidFill>
+                  <a:srgbClr val="FFFFFF"/>
+                </a:solidFill>
+                <a:latin typeface="Calibri"/>
+              </a:rPr>
               <a:t>flipV</a:t>
             </a:r>
             <a:r>
@@ -1094,26 +2141,65 @@
                 </a:solidFill>
                 <a:latin typeface="Calibri"/>
               </a:rPr>
-              <a:t> reverses them. Without flips, all arrows face one way and the loop can't close.</a:t>
-            </a:r>
-          </a:p>
-          <a:p>
-            <a:endParaRPr lang="en-US" dirty="0">
-              <a:solidFill>
-                <a:srgbClr val="FFFFFF"/>
-              </a:solidFill>
-              <a:latin typeface="Calibri"/>
-            </a:endParaRPr>
-          </a:p>
-          <a:p>
-            <a:r>
-              <a:rPr lang="en-US" dirty="0">
-                <a:solidFill>
-                  <a:srgbClr val="FFFFFF"/>
-                </a:solidFill>
-                <a:latin typeface="Calibri"/>
-              </a:rPr>
-              <a:t>Solid line feels certain. Dashed line feels broken, tentative — the eye reads gaps as doubt. All paths here are confirmed, so solid. Dash one when it's optional or uncertain.</a:t>
+              <a:t>": true, "</a:t>
+            </a:r>
+            <a:r>
+              <a:rPr lang="en-US" dirty="0" err="1">
+                <a:solidFill>
+                  <a:srgbClr val="FFFFFF"/>
+                </a:solidFill>
+                <a:latin typeface="Calibri"/>
+              </a:rPr>
+              <a:t>lineWidth</a:t>
+            </a:r>
+            <a:r>
+              <a:rPr lang="en-US" dirty="0">
+                <a:solidFill>
+                  <a:srgbClr val="FFFFFF"/>
+                </a:solidFill>
+                <a:latin typeface="Calibri"/>
+              </a:rPr>
+              <a:t>": 4.5, "</a:t>
+            </a:r>
+            <a:r>
+              <a:rPr lang="en-US" dirty="0" err="1">
+                <a:solidFill>
+                  <a:srgbClr val="FFFFFF"/>
+                </a:solidFill>
+                <a:latin typeface="Calibri"/>
+              </a:rPr>
+              <a:t>tailEnd</a:t>
+            </a:r>
+            <a:r>
+              <a:rPr lang="en-US" dirty="0">
+                <a:solidFill>
+                  <a:srgbClr val="FFFFFF"/>
+                </a:solidFill>
+                <a:latin typeface="Calibri"/>
+              </a:rPr>
+              <a:t>": "arrow", "color": "#FF9900"}</a:t>
+            </a:r>
+          </a:p>
+          <a:p>
+            <a:r>
+              <a:rPr lang="en-US" dirty="0">
+                <a:solidFill>
+                  <a:srgbClr val="FFFFFF"/>
+                </a:solidFill>
+                <a:latin typeface="Calibri"/>
+              </a:rPr>
+              <a:t>]</a:t>
+            </a:r>
+          </a:p>
+          <a:p>
+            <a:r>
+              <a:rPr lang="en-US" dirty="0">
+                <a:solidFill>
+                  <a:srgbClr val="FFFFFF"/>
+                </a:solidFill>
+                <a:latin typeface="Calibri"/>
+              </a:rPr>
+              <a:t>```</a:t>
             </a:r>
             <a:endParaRPr dirty="0">
               <a:solidFill>
@@ -1210,6 +2296,14 @@
             </a:r>
           </a:p>
           <a:p>
+            <a:endParaRPr lang="en-US" dirty="0">
+              <a:solidFill>
+                <a:srgbClr val="FFFFFF"/>
+              </a:solidFill>
+              <a:latin typeface="Calibri"/>
+            </a:endParaRPr>
+          </a:p>
+          <a:p>
             <a:r>
               <a:rPr lang="en-US" dirty="0">
                 <a:solidFill>
@@ -1285,18 +2379,409 @@
                 </a:solidFill>
                 <a:latin typeface="Calibri"/>
               </a:rPr>
-              <a:t>Need to show which phases are done and which aren't. Filled shape feels complete. Border only feels pending — the emptiness reads as "not</a:t>
-            </a:r>
-          </a:p>
-          <a:p>
-            <a:r>
-              <a:rPr lang="en-US" dirty="0">
-                <a:solidFill>
-                  <a:srgbClr val="FFFFFF"/>
-                </a:solidFill>
-                <a:latin typeface="Calibri"/>
-              </a:rPr>
-              <a:t>yet." Fill the completed ones, leave pending as border only.</a:t>
+              <a:t>Need to show which phases are done and which aren't. Filled shape feels complete.</a:t>
+            </a:r>
+          </a:p>
+          <a:p>
+            <a:endParaRPr lang="en-US" dirty="0">
+              <a:solidFill>
+                <a:srgbClr val="FFFFFF"/>
+              </a:solidFill>
+              <a:latin typeface="Calibri"/>
+            </a:endParaRPr>
+          </a:p>
+          <a:p>
+            <a:r>
+              <a:rPr lang="en-US" dirty="0">
+                <a:solidFill>
+                  <a:srgbClr val="FFFFFF"/>
+                </a:solidFill>
+                <a:latin typeface="Calibri"/>
+              </a:rPr>
+              <a:t>```</a:t>
+            </a:r>
+            <a:r>
+              <a:rPr lang="en-US" dirty="0" err="1">
+                <a:solidFill>
+                  <a:srgbClr val="FFFFFF"/>
+                </a:solidFill>
+                <a:latin typeface="Calibri"/>
+              </a:rPr>
+              <a:t>json</a:t>
+            </a:r>
+            <a:endParaRPr lang="en-US" dirty="0">
+              <a:solidFill>
+                <a:srgbClr val="FFFFFF"/>
+              </a:solidFill>
+              <a:latin typeface="Calibri"/>
+            </a:endParaRPr>
+          </a:p>
+          <a:p>
+            <a:r>
+              <a:rPr lang="en-US" dirty="0">
+                <a:solidFill>
+                  <a:srgbClr val="FFFFFF"/>
+                </a:solidFill>
+                <a:latin typeface="Calibri"/>
+              </a:rPr>
+              <a:t>[</a:t>
+            </a:r>
+          </a:p>
+          <a:p>
+            <a:r>
+              <a:rPr lang="en-US" dirty="0">
+                <a:solidFill>
+                  <a:srgbClr val="FFFFFF"/>
+                </a:solidFill>
+                <a:latin typeface="Calibri"/>
+              </a:rPr>
+              <a:t>  {"type": "shape", "shape": "pentagon", "x": "${x}", "y": "${y}", "width": 550, "height": 74, "fill": "#FF9300", "text": "{{</a:t>
+            </a:r>
+            <a:r>
+              <a:rPr lang="en-US" dirty="0" err="1">
+                <a:solidFill>
+                  <a:srgbClr val="FFFFFF"/>
+                </a:solidFill>
+                <a:latin typeface="Calibri"/>
+              </a:rPr>
+              <a:t>bold:Phase</a:t>
+            </a:r>
+            <a:r>
+              <a:rPr lang="en-US" dirty="0">
+                <a:solidFill>
+                  <a:srgbClr val="FFFFFF"/>
+                </a:solidFill>
+                <a:latin typeface="Calibri"/>
+              </a:rPr>
+              <a:t> 1}}", "</a:t>
+            </a:r>
+            <a:r>
+              <a:rPr lang="en-US" dirty="0" err="1">
+                <a:solidFill>
+                  <a:srgbClr val="FFFFFF"/>
+                </a:solidFill>
+                <a:latin typeface="Calibri"/>
+              </a:rPr>
+              <a:t>fontSize</a:t>
+            </a:r>
+            <a:r>
+              <a:rPr lang="en-US" dirty="0">
+                <a:solidFill>
+                  <a:srgbClr val="FFFFFF"/>
+                </a:solidFill>
+                <a:latin typeface="Calibri"/>
+              </a:rPr>
+              <a:t>": 16, "</a:t>
+            </a:r>
+            <a:r>
+              <a:rPr lang="en-US" dirty="0" err="1">
+                <a:solidFill>
+                  <a:srgbClr val="FFFFFF"/>
+                </a:solidFill>
+                <a:latin typeface="Calibri"/>
+              </a:rPr>
+              <a:t>textAlign</a:t>
+            </a:r>
+            <a:r>
+              <a:rPr lang="en-US" dirty="0">
+                <a:solidFill>
+                  <a:srgbClr val="FFFFFF"/>
+                </a:solidFill>
+                <a:latin typeface="Calibri"/>
+              </a:rPr>
+              <a:t>": "center", "</a:t>
+            </a:r>
+            <a:r>
+              <a:rPr lang="en-US" dirty="0" err="1">
+                <a:solidFill>
+                  <a:srgbClr val="FFFFFF"/>
+                </a:solidFill>
+                <a:latin typeface="Calibri"/>
+              </a:rPr>
+              <a:t>verticalAnchor</a:t>
+            </a:r>
+            <a:r>
+              <a:rPr lang="en-US" dirty="0">
+                <a:solidFill>
+                  <a:srgbClr val="FFFFFF"/>
+                </a:solidFill>
+                <a:latin typeface="Calibri"/>
+              </a:rPr>
+              <a:t>": 3},</a:t>
+            </a:r>
+          </a:p>
+          <a:p>
+            <a:r>
+              <a:rPr lang="en-US" dirty="0">
+                <a:solidFill>
+                  <a:srgbClr val="FFFFFF"/>
+                </a:solidFill>
+                <a:latin typeface="Calibri"/>
+              </a:rPr>
+              <a:t>  {"type": "shape", "shape": "chevron", "x": "${x+532}", "y": "${y}", "width": 450, "height": 74, "fill": "#A166FF", "text": "{{</a:t>
+            </a:r>
+            <a:r>
+              <a:rPr lang="en-US" dirty="0" err="1">
+                <a:solidFill>
+                  <a:srgbClr val="FFFFFF"/>
+                </a:solidFill>
+                <a:latin typeface="Calibri"/>
+              </a:rPr>
+              <a:t>bold:Phase</a:t>
+            </a:r>
+            <a:r>
+              <a:rPr lang="en-US" dirty="0">
+                <a:solidFill>
+                  <a:srgbClr val="FFFFFF"/>
+                </a:solidFill>
+                <a:latin typeface="Calibri"/>
+              </a:rPr>
+              <a:t> 2}}", "</a:t>
+            </a:r>
+            <a:r>
+              <a:rPr lang="en-US" dirty="0" err="1">
+                <a:solidFill>
+                  <a:srgbClr val="FFFFFF"/>
+                </a:solidFill>
+                <a:latin typeface="Calibri"/>
+              </a:rPr>
+              <a:t>fontSize</a:t>
+            </a:r>
+            <a:r>
+              <a:rPr lang="en-US" dirty="0">
+                <a:solidFill>
+                  <a:srgbClr val="FFFFFF"/>
+                </a:solidFill>
+                <a:latin typeface="Calibri"/>
+              </a:rPr>
+              <a:t>": 16, "</a:t>
+            </a:r>
+            <a:r>
+              <a:rPr lang="en-US" dirty="0" err="1">
+                <a:solidFill>
+                  <a:srgbClr val="FFFFFF"/>
+                </a:solidFill>
+                <a:latin typeface="Calibri"/>
+              </a:rPr>
+              <a:t>textAlign</a:t>
+            </a:r>
+            <a:r>
+              <a:rPr lang="en-US" dirty="0">
+                <a:solidFill>
+                  <a:srgbClr val="FFFFFF"/>
+                </a:solidFill>
+                <a:latin typeface="Calibri"/>
+              </a:rPr>
+              <a:t>": "center", "</a:t>
+            </a:r>
+            <a:r>
+              <a:rPr lang="en-US" dirty="0" err="1">
+                <a:solidFill>
+                  <a:srgbClr val="FFFFFF"/>
+                </a:solidFill>
+                <a:latin typeface="Calibri"/>
+              </a:rPr>
+              <a:t>verticalAnchor</a:t>
+            </a:r>
+            <a:r>
+              <a:rPr lang="en-US" dirty="0">
+                <a:solidFill>
+                  <a:srgbClr val="FFFFFF"/>
+                </a:solidFill>
+                <a:latin typeface="Calibri"/>
+              </a:rPr>
+              <a:t>": 3}</a:t>
+            </a:r>
+          </a:p>
+          <a:p>
+            <a:r>
+              <a:rPr lang="en-US" dirty="0">
+                <a:solidFill>
+                  <a:srgbClr val="FFFFFF"/>
+                </a:solidFill>
+                <a:latin typeface="Calibri"/>
+              </a:rPr>
+              <a:t>]</a:t>
+            </a:r>
+          </a:p>
+          <a:p>
+            <a:r>
+              <a:rPr lang="en-US" dirty="0">
+                <a:solidFill>
+                  <a:srgbClr val="FFFFFF"/>
+                </a:solidFill>
+                <a:latin typeface="Calibri"/>
+              </a:rPr>
+              <a:t>```</a:t>
+            </a:r>
+          </a:p>
+          <a:p>
+            <a:endParaRPr lang="en-US" dirty="0">
+              <a:solidFill>
+                <a:srgbClr val="FFFFFF"/>
+              </a:solidFill>
+              <a:latin typeface="Calibri"/>
+            </a:endParaRPr>
+          </a:p>
+          <a:p>
+            <a:r>
+              <a:rPr lang="en-US" dirty="0">
+                <a:solidFill>
+                  <a:srgbClr val="FFFFFF"/>
+                </a:solidFill>
+                <a:latin typeface="Calibri"/>
+              </a:rPr>
+              <a:t>Border only feels pending — the emptiness reads as "not yet."</a:t>
+            </a:r>
+          </a:p>
+          <a:p>
+            <a:endParaRPr lang="en-US" dirty="0">
+              <a:solidFill>
+                <a:srgbClr val="FFFFFF"/>
+              </a:solidFill>
+              <a:latin typeface="Calibri"/>
+            </a:endParaRPr>
+          </a:p>
+          <a:p>
+            <a:r>
+              <a:rPr lang="en-US" dirty="0">
+                <a:solidFill>
+                  <a:srgbClr val="FFFFFF"/>
+                </a:solidFill>
+                <a:latin typeface="Calibri"/>
+              </a:rPr>
+              <a:t>```</a:t>
+            </a:r>
+            <a:r>
+              <a:rPr lang="en-US" dirty="0" err="1">
+                <a:solidFill>
+                  <a:srgbClr val="FFFFFF"/>
+                </a:solidFill>
+                <a:latin typeface="Calibri"/>
+              </a:rPr>
+              <a:t>json</a:t>
+            </a:r>
+            <a:endParaRPr lang="en-US" dirty="0">
+              <a:solidFill>
+                <a:srgbClr val="FFFFFF"/>
+              </a:solidFill>
+              <a:latin typeface="Calibri"/>
+            </a:endParaRPr>
+          </a:p>
+          <a:p>
+            <a:r>
+              <a:rPr lang="en-US" dirty="0">
+                <a:solidFill>
+                  <a:srgbClr val="FFFFFF"/>
+                </a:solidFill>
+                <a:latin typeface="Calibri"/>
+              </a:rPr>
+              <a:t>[</a:t>
+            </a:r>
+          </a:p>
+          <a:p>
+            <a:r>
+              <a:rPr lang="en-US" dirty="0">
+                <a:solidFill>
+                  <a:srgbClr val="FFFFFF"/>
+                </a:solidFill>
+                <a:latin typeface="Calibri"/>
+              </a:rPr>
+              <a:t>  {"type": "shape", "shape": "chevron", "x": "${x+964}", "y": "${y}", "width": 450, "height": 74, "line": "#41B3FF", "</a:t>
+            </a:r>
+            <a:r>
+              <a:rPr lang="en-US" dirty="0" err="1">
+                <a:solidFill>
+                  <a:srgbClr val="FFFFFF"/>
+                </a:solidFill>
+                <a:latin typeface="Calibri"/>
+              </a:rPr>
+              <a:t>lineWidth</a:t>
+            </a:r>
+            <a:r>
+              <a:rPr lang="en-US" dirty="0">
+                <a:solidFill>
+                  <a:srgbClr val="FFFFFF"/>
+                </a:solidFill>
+                <a:latin typeface="Calibri"/>
+              </a:rPr>
+              <a:t>": 2.0, "text": "{{bold,#41B3FF:Phase 3}}", "</a:t>
+            </a:r>
+            <a:r>
+              <a:rPr lang="en-US" dirty="0" err="1">
+                <a:solidFill>
+                  <a:srgbClr val="FFFFFF"/>
+                </a:solidFill>
+                <a:latin typeface="Calibri"/>
+              </a:rPr>
+              <a:t>fontSize</a:t>
+            </a:r>
+            <a:r>
+              <a:rPr lang="en-US" dirty="0">
+                <a:solidFill>
+                  <a:srgbClr val="FFFFFF"/>
+                </a:solidFill>
+                <a:latin typeface="Calibri"/>
+              </a:rPr>
+              <a:t>": 16, "</a:t>
+            </a:r>
+            <a:r>
+              <a:rPr lang="en-US" dirty="0" err="1">
+                <a:solidFill>
+                  <a:srgbClr val="FFFFFF"/>
+                </a:solidFill>
+                <a:latin typeface="Calibri"/>
+              </a:rPr>
+              <a:t>textAlign</a:t>
+            </a:r>
+            <a:r>
+              <a:rPr lang="en-US" dirty="0">
+                <a:solidFill>
+                  <a:srgbClr val="FFFFFF"/>
+                </a:solidFill>
+                <a:latin typeface="Calibri"/>
+              </a:rPr>
+              <a:t>": "center", "</a:t>
+            </a:r>
+            <a:r>
+              <a:rPr lang="en-US" dirty="0" err="1">
+                <a:solidFill>
+                  <a:srgbClr val="FFFFFF"/>
+                </a:solidFill>
+                <a:latin typeface="Calibri"/>
+              </a:rPr>
+              <a:t>verticalAnchor</a:t>
+            </a:r>
+            <a:r>
+              <a:rPr lang="en-US" dirty="0">
+                <a:solidFill>
+                  <a:srgbClr val="FFFFFF"/>
+                </a:solidFill>
+                <a:latin typeface="Calibri"/>
+              </a:rPr>
+              <a:t>": 3}</a:t>
+            </a:r>
+          </a:p>
+          <a:p>
+            <a:r>
+              <a:rPr lang="en-US" dirty="0">
+                <a:solidFill>
+                  <a:srgbClr val="FFFFFF"/>
+                </a:solidFill>
+                <a:latin typeface="Calibri"/>
+              </a:rPr>
+              <a:t>]</a:t>
+            </a:r>
+          </a:p>
+          <a:p>
+            <a:r>
+              <a:rPr lang="en-US" dirty="0">
+                <a:solidFill>
+                  <a:srgbClr val="FFFFFF"/>
+                </a:solidFill>
+                <a:latin typeface="Calibri"/>
+              </a:rPr>
+              <a:t>```</a:t>
             </a:r>
             <a:endParaRPr dirty="0">
               <a:solidFill>
@@ -1458,6 +2943,14 @@
             </a:r>
           </a:p>
           <a:p>
+            <a:endParaRPr lang="en-US" dirty="0">
+              <a:solidFill>
+                <a:srgbClr val="FFFFFF"/>
+              </a:solidFill>
+              <a:latin typeface="Calibri"/>
+            </a:endParaRPr>
+          </a:p>
+          <a:p>
             <a:r>
               <a:rPr lang="en-US" dirty="0">
                 <a:solidFill>
@@ -1533,18 +3026,7 @@
                 </a:solidFill>
                 <a:latin typeface="Calibri"/>
               </a:rPr>
-              <a:t>How much the marker should stand out depends on the context. Filled shape pulls the eye to the number — the number leads. Border only</a:t>
-            </a:r>
-          </a:p>
-          <a:p>
-            <a:r>
-              <a:rPr lang="en-US" dirty="0">
-                <a:solidFill>
-                  <a:srgbClr val="FFFFFF"/>
-                </a:solidFill>
-                <a:latin typeface="Calibri"/>
-              </a:rPr>
-              <a:t>lets the marker recede so the content next to it dominates. Gradient adds weight beyond solid fill.</a:t>
+              <a:t>How much the marker should stand out depends on the context. Filled shape pulls the eye to the number — the number leads.</a:t>
             </a:r>
           </a:p>
           <a:p>
@@ -1563,14 +3045,525 @@
                 </a:solidFill>
                 <a:latin typeface="Calibri"/>
               </a:rPr>
+              <a:t>```</a:t>
+            </a:r>
+            <a:r>
+              <a:rPr lang="en-US" dirty="0" err="1">
+                <a:solidFill>
+                  <a:srgbClr val="FFFFFF"/>
+                </a:solidFill>
+                <a:latin typeface="Calibri"/>
+              </a:rPr>
+              <a:t>json</a:t>
+            </a:r>
+            <a:endParaRPr lang="en-US" dirty="0">
+              <a:solidFill>
+                <a:srgbClr val="FFFFFF"/>
+              </a:solidFill>
+              <a:latin typeface="Calibri"/>
+            </a:endParaRPr>
+          </a:p>
+          <a:p>
+            <a:r>
+              <a:rPr lang="en-US" dirty="0">
+                <a:solidFill>
+                  <a:srgbClr val="FFFFFF"/>
+                </a:solidFill>
+                <a:latin typeface="Calibri"/>
+              </a:rPr>
+              <a:t>[</a:t>
+            </a:r>
+          </a:p>
+          <a:p>
+            <a:r>
+              <a:rPr lang="en-US" dirty="0">
+                <a:solidFill>
+                  <a:srgbClr val="FFFFFF"/>
+                </a:solidFill>
+                <a:latin typeface="Calibri"/>
+              </a:rPr>
+              <a:t>  {"type": "shape", "shape": "circle", "x": "${x}", "y": "${y}", "width": 56, "height": 56, "fill": "#FF9900", "text": "{{bold:1}}", "</a:t>
+            </a:r>
+            <a:r>
+              <a:rPr lang="en-US" dirty="0" err="1">
+                <a:solidFill>
+                  <a:srgbClr val="FFFFFF"/>
+                </a:solidFill>
+                <a:latin typeface="Calibri"/>
+              </a:rPr>
+              <a:t>fontSize</a:t>
+            </a:r>
+            <a:r>
+              <a:rPr lang="en-US" dirty="0">
+                <a:solidFill>
+                  <a:srgbClr val="FFFFFF"/>
+                </a:solidFill>
+                <a:latin typeface="Calibri"/>
+              </a:rPr>
+              <a:t>": 24, "</a:t>
+            </a:r>
+            <a:r>
+              <a:rPr lang="en-US" dirty="0" err="1">
+                <a:solidFill>
+                  <a:srgbClr val="FFFFFF"/>
+                </a:solidFill>
+                <a:latin typeface="Calibri"/>
+              </a:rPr>
+              <a:t>textAlign</a:t>
+            </a:r>
+            <a:r>
+              <a:rPr lang="en-US" dirty="0">
+                <a:solidFill>
+                  <a:srgbClr val="FFFFFF"/>
+                </a:solidFill>
+                <a:latin typeface="Calibri"/>
+              </a:rPr>
+              <a:t>": "center", "</a:t>
+            </a:r>
+            <a:r>
+              <a:rPr lang="en-US" dirty="0" err="1">
+                <a:solidFill>
+                  <a:srgbClr val="FFFFFF"/>
+                </a:solidFill>
+                <a:latin typeface="Calibri"/>
+              </a:rPr>
+              <a:t>verticalAnchor</a:t>
+            </a:r>
+            <a:r>
+              <a:rPr lang="en-US" dirty="0">
+                <a:solidFill>
+                  <a:srgbClr val="FFFFFF"/>
+                </a:solidFill>
+                <a:latin typeface="Calibri"/>
+              </a:rPr>
+              <a:t>": 3},</a:t>
+            </a:r>
+          </a:p>
+          <a:p>
+            <a:r>
+              <a:rPr lang="en-US" dirty="0">
+                <a:solidFill>
+                  <a:srgbClr val="FFFFFF"/>
+                </a:solidFill>
+                <a:latin typeface="Calibri"/>
+              </a:rPr>
+              <a:t>  {"type": "textbox", "x": "${x+80}", "y": "${y+6}", "width": 400, "height": 56, "text": "{{</a:t>
+            </a:r>
+            <a:r>
+              <a:rPr lang="en-US" dirty="0" err="1">
+                <a:solidFill>
+                  <a:srgbClr val="FFFFFF"/>
+                </a:solidFill>
+                <a:latin typeface="Calibri"/>
+              </a:rPr>
+              <a:t>bold:Filled</a:t>
+            </a:r>
+            <a:r>
+              <a:rPr lang="en-US" dirty="0">
+                <a:solidFill>
+                  <a:srgbClr val="FFFFFF"/>
+                </a:solidFill>
+                <a:latin typeface="Calibri"/>
+              </a:rPr>
+              <a:t> marker}}", "</a:t>
+            </a:r>
+            <a:r>
+              <a:rPr lang="en-US" dirty="0" err="1">
+                <a:solidFill>
+                  <a:srgbClr val="FFFFFF"/>
+                </a:solidFill>
+                <a:latin typeface="Calibri"/>
+              </a:rPr>
+              <a:t>fontSize</a:t>
+            </a:r>
+            <a:r>
+              <a:rPr lang="en-US" dirty="0">
+                <a:solidFill>
+                  <a:srgbClr val="FFFFFF"/>
+                </a:solidFill>
+                <a:latin typeface="Calibri"/>
+              </a:rPr>
+              <a:t>": 18, "</a:t>
+            </a:r>
+            <a:r>
+              <a:rPr lang="en-US" dirty="0" err="1">
+                <a:solidFill>
+                  <a:srgbClr val="FFFFFF"/>
+                </a:solidFill>
+                <a:latin typeface="Calibri"/>
+              </a:rPr>
+              <a:t>marginTop</a:t>
+            </a:r>
+            <a:r>
+              <a:rPr lang="en-US" dirty="0">
+                <a:solidFill>
+                  <a:srgbClr val="FFFFFF"/>
+                </a:solidFill>
+                <a:latin typeface="Calibri"/>
+              </a:rPr>
+              <a:t>": 0}</a:t>
+            </a:r>
+          </a:p>
+          <a:p>
+            <a:r>
+              <a:rPr lang="en-US" dirty="0">
+                <a:solidFill>
+                  <a:srgbClr val="FFFFFF"/>
+                </a:solidFill>
+                <a:latin typeface="Calibri"/>
+              </a:rPr>
+              <a:t>]</a:t>
+            </a:r>
+          </a:p>
+          <a:p>
+            <a:r>
+              <a:rPr lang="en-US" dirty="0">
+                <a:solidFill>
+                  <a:srgbClr val="FFFFFF"/>
+                </a:solidFill>
+                <a:latin typeface="Calibri"/>
+              </a:rPr>
+              <a:t>```</a:t>
+            </a:r>
+          </a:p>
+          <a:p>
+            <a:endParaRPr lang="en-US" dirty="0">
+              <a:solidFill>
+                <a:srgbClr val="FFFFFF"/>
+              </a:solidFill>
+              <a:latin typeface="Calibri"/>
+            </a:endParaRPr>
+          </a:p>
+          <a:p>
+            <a:r>
+              <a:rPr lang="en-US" dirty="0">
+                <a:solidFill>
+                  <a:srgbClr val="FFFFFF"/>
+                </a:solidFill>
+                <a:latin typeface="Calibri"/>
+              </a:rPr>
+              <a:t>Border only lets the marker recede so the content next to it dominates.</a:t>
+            </a:r>
+          </a:p>
+          <a:p>
+            <a:endParaRPr lang="en-US" dirty="0">
+              <a:solidFill>
+                <a:srgbClr val="FFFFFF"/>
+              </a:solidFill>
+              <a:latin typeface="Calibri"/>
+            </a:endParaRPr>
+          </a:p>
+          <a:p>
+            <a:r>
+              <a:rPr lang="en-US" dirty="0">
+                <a:solidFill>
+                  <a:srgbClr val="FFFFFF"/>
+                </a:solidFill>
+                <a:latin typeface="Calibri"/>
+              </a:rPr>
+              <a:t>```</a:t>
+            </a:r>
+            <a:r>
+              <a:rPr lang="en-US" dirty="0" err="1">
+                <a:solidFill>
+                  <a:srgbClr val="FFFFFF"/>
+                </a:solidFill>
+                <a:latin typeface="Calibri"/>
+              </a:rPr>
+              <a:t>json</a:t>
+            </a:r>
+            <a:endParaRPr lang="en-US" dirty="0">
+              <a:solidFill>
+                <a:srgbClr val="FFFFFF"/>
+              </a:solidFill>
+              <a:latin typeface="Calibri"/>
+            </a:endParaRPr>
+          </a:p>
+          <a:p>
+            <a:r>
+              <a:rPr lang="en-US" dirty="0">
+                <a:solidFill>
+                  <a:srgbClr val="FFFFFF"/>
+                </a:solidFill>
+                <a:latin typeface="Calibri"/>
+              </a:rPr>
+              <a:t>[</a:t>
+            </a:r>
+          </a:p>
+          <a:p>
+            <a:r>
+              <a:rPr lang="en-US" dirty="0">
+                <a:solidFill>
+                  <a:srgbClr val="FFFFFF"/>
+                </a:solidFill>
+                <a:latin typeface="Calibri"/>
+              </a:rPr>
+              <a:t>  {..., "line": "#FF9900", "</a:t>
+            </a:r>
+            <a:r>
+              <a:rPr lang="en-US" dirty="0" err="1">
+                <a:solidFill>
+                  <a:srgbClr val="FFFFFF"/>
+                </a:solidFill>
+                <a:latin typeface="Calibri"/>
+              </a:rPr>
+              <a:t>lineWidth</a:t>
+            </a:r>
+            <a:r>
+              <a:rPr lang="en-US" dirty="0">
+                <a:solidFill>
+                  <a:srgbClr val="FFFFFF"/>
+                </a:solidFill>
+                <a:latin typeface="Calibri"/>
+              </a:rPr>
+              <a:t>": 2.0, "text": "{{bold,#FF9900:2}}", "</a:t>
+            </a:r>
+            <a:r>
+              <a:rPr lang="en-US" dirty="0" err="1">
+                <a:solidFill>
+                  <a:srgbClr val="FFFFFF"/>
+                </a:solidFill>
+                <a:latin typeface="Calibri"/>
+              </a:rPr>
+              <a:t>fontSize</a:t>
+            </a:r>
+            <a:r>
+              <a:rPr lang="en-US" dirty="0">
+                <a:solidFill>
+                  <a:srgbClr val="FFFFFF"/>
+                </a:solidFill>
+                <a:latin typeface="Calibri"/>
+              </a:rPr>
+              <a:t>": 24, "</a:t>
+            </a:r>
+            <a:r>
+              <a:rPr lang="en-US" dirty="0" err="1">
+                <a:solidFill>
+                  <a:srgbClr val="FFFFFF"/>
+                </a:solidFill>
+                <a:latin typeface="Calibri"/>
+              </a:rPr>
+              <a:t>textAlign</a:t>
+            </a:r>
+            <a:r>
+              <a:rPr lang="en-US" dirty="0">
+                <a:solidFill>
+                  <a:srgbClr val="FFFFFF"/>
+                </a:solidFill>
+                <a:latin typeface="Calibri"/>
+              </a:rPr>
+              <a:t>": "center", "</a:t>
+            </a:r>
+            <a:r>
+              <a:rPr lang="en-US" dirty="0" err="1">
+                <a:solidFill>
+                  <a:srgbClr val="FFFFFF"/>
+                </a:solidFill>
+                <a:latin typeface="Calibri"/>
+              </a:rPr>
+              <a:t>verticalAnchor</a:t>
+            </a:r>
+            <a:r>
+              <a:rPr lang="en-US" dirty="0">
+                <a:solidFill>
+                  <a:srgbClr val="FFFFFF"/>
+                </a:solidFill>
+                <a:latin typeface="Calibri"/>
+              </a:rPr>
+              <a:t>": 3}</a:t>
+            </a:r>
+          </a:p>
+          <a:p>
+            <a:r>
+              <a:rPr lang="en-US" dirty="0">
+                <a:solidFill>
+                  <a:srgbClr val="FFFFFF"/>
+                </a:solidFill>
+                <a:latin typeface="Calibri"/>
+              </a:rPr>
+              <a:t>]</a:t>
+            </a:r>
+          </a:p>
+          <a:p>
+            <a:r>
+              <a:rPr lang="en-US" dirty="0">
+                <a:solidFill>
+                  <a:srgbClr val="FFFFFF"/>
+                </a:solidFill>
+                <a:latin typeface="Calibri"/>
+              </a:rPr>
+              <a:t>```</a:t>
+            </a:r>
+          </a:p>
+          <a:p>
+            <a:endParaRPr lang="en-US" dirty="0">
+              <a:solidFill>
+                <a:srgbClr val="FFFFFF"/>
+              </a:solidFill>
+              <a:latin typeface="Calibri"/>
+            </a:endParaRPr>
+          </a:p>
+          <a:p>
+            <a:r>
+              <a:rPr lang="en-US" dirty="0">
+                <a:solidFill>
+                  <a:srgbClr val="FFFFFF"/>
+                </a:solidFill>
+                <a:latin typeface="Calibri"/>
+              </a:rPr>
+              <a:t>Gradient adds weight beyond solid fill.</a:t>
+            </a:r>
+          </a:p>
+          <a:p>
+            <a:endParaRPr lang="en-US" dirty="0">
+              <a:solidFill>
+                <a:srgbClr val="FFFFFF"/>
+              </a:solidFill>
+              <a:latin typeface="Calibri"/>
+            </a:endParaRPr>
+          </a:p>
+          <a:p>
+            <a:r>
+              <a:rPr lang="en-US" dirty="0">
+                <a:solidFill>
+                  <a:srgbClr val="FFFFFF"/>
+                </a:solidFill>
+                <a:latin typeface="Calibri"/>
+              </a:rPr>
+              <a:t>```</a:t>
+            </a:r>
+            <a:r>
+              <a:rPr lang="en-US" dirty="0" err="1">
+                <a:solidFill>
+                  <a:srgbClr val="FFFFFF"/>
+                </a:solidFill>
+                <a:latin typeface="Calibri"/>
+              </a:rPr>
+              <a:t>json</a:t>
+            </a:r>
+            <a:endParaRPr lang="en-US" dirty="0">
+              <a:solidFill>
+                <a:srgbClr val="FFFFFF"/>
+              </a:solidFill>
+              <a:latin typeface="Calibri"/>
+            </a:endParaRPr>
+          </a:p>
+          <a:p>
+            <a:r>
+              <a:rPr lang="en-US" dirty="0">
+                <a:solidFill>
+                  <a:srgbClr val="FFFFFF"/>
+                </a:solidFill>
+                <a:latin typeface="Calibri"/>
+              </a:rPr>
+              <a:t>[</a:t>
+            </a:r>
+          </a:p>
+          <a:p>
+            <a:r>
+              <a:rPr lang="en-US" dirty="0">
+                <a:solidFill>
+                  <a:srgbClr val="FFFFFF"/>
+                </a:solidFill>
+                <a:latin typeface="Calibri"/>
+              </a:rPr>
+              <a:t>  {..., "gradient": {"stops": [{"position": 0.0, "color": "#FF9900"}, {"position": 1.0, "color": "#FBD332"}], "angle": 135.0}, "text": "{{bold:3}}", "</a:t>
+            </a:r>
+            <a:r>
+              <a:rPr lang="en-US" dirty="0" err="1">
+                <a:solidFill>
+                  <a:srgbClr val="FFFFFF"/>
+                </a:solidFill>
+                <a:latin typeface="Calibri"/>
+              </a:rPr>
+              <a:t>fontSize</a:t>
+            </a:r>
+            <a:r>
+              <a:rPr lang="en-US" dirty="0">
+                <a:solidFill>
+                  <a:srgbClr val="FFFFFF"/>
+                </a:solidFill>
+                <a:latin typeface="Calibri"/>
+              </a:rPr>
+              <a:t>": 24, "</a:t>
+            </a:r>
+            <a:r>
+              <a:rPr lang="en-US" dirty="0" err="1">
+                <a:solidFill>
+                  <a:srgbClr val="FFFFFF"/>
+                </a:solidFill>
+                <a:latin typeface="Calibri"/>
+              </a:rPr>
+              <a:t>textAlign</a:t>
+            </a:r>
+            <a:r>
+              <a:rPr lang="en-US" dirty="0">
+                <a:solidFill>
+                  <a:srgbClr val="FFFFFF"/>
+                </a:solidFill>
+                <a:latin typeface="Calibri"/>
+              </a:rPr>
+              <a:t>": "center", "</a:t>
+            </a:r>
+            <a:r>
+              <a:rPr lang="en-US" dirty="0" err="1">
+                <a:solidFill>
+                  <a:srgbClr val="FFFFFF"/>
+                </a:solidFill>
+                <a:latin typeface="Calibri"/>
+              </a:rPr>
+              <a:t>verticalAnchor</a:t>
+            </a:r>
+            <a:r>
+              <a:rPr lang="en-US" dirty="0">
+                <a:solidFill>
+                  <a:srgbClr val="FFFFFF"/>
+                </a:solidFill>
+                <a:latin typeface="Calibri"/>
+              </a:rPr>
+              <a:t>": 3}</a:t>
+            </a:r>
+          </a:p>
+          <a:p>
+            <a:r>
+              <a:rPr lang="en-US" dirty="0">
+                <a:solidFill>
+                  <a:srgbClr val="FFFFFF"/>
+                </a:solidFill>
+                <a:latin typeface="Calibri"/>
+              </a:rPr>
+              <a:t>]</a:t>
+            </a:r>
+          </a:p>
+          <a:p>
+            <a:r>
+              <a:rPr lang="en-US" dirty="0">
+                <a:solidFill>
+                  <a:srgbClr val="FFFFFF"/>
+                </a:solidFill>
+                <a:latin typeface="Calibri"/>
+              </a:rPr>
+              <a:t>```</a:t>
+            </a:r>
+          </a:p>
+          <a:p>
+            <a:endParaRPr lang="en-US" dirty="0">
+              <a:solidFill>
+                <a:srgbClr val="FFFFFF"/>
+              </a:solidFill>
+              <a:latin typeface="Calibri"/>
+            </a:endParaRPr>
+          </a:p>
+          <a:p>
+            <a:r>
+              <a:rPr lang="en-US" dirty="0">
+                <a:solidFill>
+                  <a:srgbClr val="FFFFFF"/>
+                </a:solidFill>
+                <a:latin typeface="Calibri"/>
+              </a:rPr>
               <a:t>Size shifts the role. Small markers sit inline as list numbering. Large markers anchor a section — the number becomes a heading.</a:t>
             </a:r>
-            <a:endParaRPr dirty="0">
-              <a:solidFill>
-                <a:srgbClr val="FFFFFF"/>
-              </a:solidFill>
-              <a:latin typeface="Calibri"/>
-            </a:endParaRPr>
           </a:p>
         </p:txBody>
       </p:sp>
@@ -1649,6 +3642,14 @@
             </a:r>
           </a:p>
           <a:p>
+            <a:endParaRPr lang="en-US" dirty="0">
+              <a:solidFill>
+                <a:srgbClr val="FFFFFF"/>
+              </a:solidFill>
+              <a:latin typeface="Calibri"/>
+            </a:endParaRPr>
+          </a:p>
+          <a:p>
             <a:r>
               <a:rPr lang="en-US" dirty="0">
                 <a:solidFill>
@@ -1694,18 +3695,326 @@
                 </a:solidFill>
                 <a:latin typeface="Calibri"/>
               </a:rPr>
-              <a:t>A status label that needs to stand out without dominating. Filled badge makes a strong claim — the color speaks first. Border only is</a:t>
-            </a:r>
-          </a:p>
-          <a:p>
-            <a:r>
-              <a:rPr lang="en-US" dirty="0">
-                <a:solidFill>
-                  <a:srgbClr val="FFFFFF"/>
-                </a:solidFill>
-                <a:latin typeface="Calibri"/>
-              </a:rPr>
-              <a:t>subtler — the label is there but doesn't compete with surrounding content. Match the weight to the context.</a:t>
+              <a:t>A status label that needs to stand out without dominating. Filled badge makes a strong claim — the color speaks first.</a:t>
+            </a:r>
+          </a:p>
+          <a:p>
+            <a:endParaRPr lang="en-US" dirty="0">
+              <a:solidFill>
+                <a:srgbClr val="FFFFFF"/>
+              </a:solidFill>
+              <a:latin typeface="Calibri"/>
+            </a:endParaRPr>
+          </a:p>
+          <a:p>
+            <a:r>
+              <a:rPr lang="en-US" dirty="0">
+                <a:solidFill>
+                  <a:srgbClr val="FFFFFF"/>
+                </a:solidFill>
+                <a:latin typeface="Calibri"/>
+              </a:rPr>
+              <a:t>```</a:t>
+            </a:r>
+            <a:r>
+              <a:rPr lang="en-US" dirty="0" err="1">
+                <a:solidFill>
+                  <a:srgbClr val="FFFFFF"/>
+                </a:solidFill>
+                <a:latin typeface="Calibri"/>
+              </a:rPr>
+              <a:t>json</a:t>
+            </a:r>
+            <a:endParaRPr lang="en-US" dirty="0">
+              <a:solidFill>
+                <a:srgbClr val="FFFFFF"/>
+              </a:solidFill>
+              <a:latin typeface="Calibri"/>
+            </a:endParaRPr>
+          </a:p>
+          <a:p>
+            <a:r>
+              <a:rPr lang="en-US" dirty="0">
+                <a:solidFill>
+                  <a:srgbClr val="FFFFFF"/>
+                </a:solidFill>
+                <a:latin typeface="Calibri"/>
+              </a:rPr>
+              <a:t>[</a:t>
+            </a:r>
+          </a:p>
+          <a:p>
+            <a:r>
+              <a:rPr lang="en-US" dirty="0">
+                <a:solidFill>
+                  <a:srgbClr val="FFFFFF"/>
+                </a:solidFill>
+                <a:latin typeface="Calibri"/>
+              </a:rPr>
+              <a:t>  {"type": "shape", "shape": "</a:t>
+            </a:r>
+            <a:r>
+              <a:rPr lang="en-US" dirty="0" err="1">
+                <a:solidFill>
+                  <a:srgbClr val="FFFFFF"/>
+                </a:solidFill>
+                <a:latin typeface="Calibri"/>
+              </a:rPr>
+              <a:t>rounded_rectangle</a:t>
+            </a:r>
+            <a:r>
+              <a:rPr lang="en-US" dirty="0">
+                <a:solidFill>
+                  <a:srgbClr val="FFFFFF"/>
+                </a:solidFill>
+                <a:latin typeface="Calibri"/>
+              </a:rPr>
+              <a:t>", "width": 211, "height": 54, "adjustments": [0.5], "fill": "#AD5CFF", "text": "{{</a:t>
+            </a:r>
+            <a:r>
+              <a:rPr lang="en-US" dirty="0" err="1">
+                <a:solidFill>
+                  <a:srgbClr val="FFFFFF"/>
+                </a:solidFill>
+                <a:latin typeface="Calibri"/>
+              </a:rPr>
+              <a:t>bold:Fill</a:t>
+            </a:r>
+            <a:r>
+              <a:rPr lang="en-US" dirty="0">
+                <a:solidFill>
+                  <a:srgbClr val="FFFFFF"/>
+                </a:solidFill>
+                <a:latin typeface="Calibri"/>
+              </a:rPr>
+              <a:t>}}", "</a:t>
+            </a:r>
+            <a:r>
+              <a:rPr lang="en-US" dirty="0" err="1">
+                <a:solidFill>
+                  <a:srgbClr val="FFFFFF"/>
+                </a:solidFill>
+                <a:latin typeface="Calibri"/>
+              </a:rPr>
+              <a:t>textAlign</a:t>
+            </a:r>
+            <a:r>
+              <a:rPr lang="en-US" dirty="0">
+                <a:solidFill>
+                  <a:srgbClr val="FFFFFF"/>
+                </a:solidFill>
+                <a:latin typeface="Calibri"/>
+              </a:rPr>
+              <a:t>": "center", "</a:t>
+            </a:r>
+            <a:r>
+              <a:rPr lang="en-US" dirty="0" err="1">
+                <a:solidFill>
+                  <a:srgbClr val="FFFFFF"/>
+                </a:solidFill>
+                <a:latin typeface="Calibri"/>
+              </a:rPr>
+              <a:t>verticalAnchor</a:t>
+            </a:r>
+            <a:r>
+              <a:rPr lang="en-US" dirty="0">
+                <a:solidFill>
+                  <a:srgbClr val="FFFFFF"/>
+                </a:solidFill>
+                <a:latin typeface="Calibri"/>
+              </a:rPr>
+              <a:t>": 3}</a:t>
+            </a:r>
+          </a:p>
+          <a:p>
+            <a:r>
+              <a:rPr lang="en-US" dirty="0">
+                <a:solidFill>
+                  <a:srgbClr val="FFFFFF"/>
+                </a:solidFill>
+                <a:latin typeface="Calibri"/>
+              </a:rPr>
+              <a:t>]</a:t>
+            </a:r>
+          </a:p>
+          <a:p>
+            <a:r>
+              <a:rPr lang="en-US" dirty="0">
+                <a:solidFill>
+                  <a:srgbClr val="FFFFFF"/>
+                </a:solidFill>
+                <a:latin typeface="Calibri"/>
+              </a:rPr>
+              <a:t>```</a:t>
+            </a:r>
+          </a:p>
+          <a:p>
+            <a:endParaRPr lang="en-US" dirty="0">
+              <a:solidFill>
+                <a:srgbClr val="FFFFFF"/>
+              </a:solidFill>
+              <a:latin typeface="Calibri"/>
+            </a:endParaRPr>
+          </a:p>
+          <a:p>
+            <a:r>
+              <a:rPr lang="en-US" dirty="0">
+                <a:solidFill>
+                  <a:srgbClr val="FFFFFF"/>
+                </a:solidFill>
+                <a:latin typeface="Calibri"/>
+              </a:rPr>
+              <a:t>Border only is subtler — the label is there but doesn't compete with surrounding content.</a:t>
+            </a:r>
+          </a:p>
+          <a:p>
+            <a:endParaRPr lang="en-US" dirty="0">
+              <a:solidFill>
+                <a:srgbClr val="FFFFFF"/>
+              </a:solidFill>
+              <a:latin typeface="Calibri"/>
+            </a:endParaRPr>
+          </a:p>
+          <a:p>
+            <a:r>
+              <a:rPr lang="en-US" dirty="0">
+                <a:solidFill>
+                  <a:srgbClr val="FFFFFF"/>
+                </a:solidFill>
+                <a:latin typeface="Calibri"/>
+              </a:rPr>
+              <a:t>```</a:t>
+            </a:r>
+            <a:r>
+              <a:rPr lang="en-US" dirty="0" err="1">
+                <a:solidFill>
+                  <a:srgbClr val="FFFFFF"/>
+                </a:solidFill>
+                <a:latin typeface="Calibri"/>
+              </a:rPr>
+              <a:t>json</a:t>
+            </a:r>
+            <a:endParaRPr lang="en-US" dirty="0">
+              <a:solidFill>
+                <a:srgbClr val="FFFFFF"/>
+              </a:solidFill>
+              <a:latin typeface="Calibri"/>
+            </a:endParaRPr>
+          </a:p>
+          <a:p>
+            <a:r>
+              <a:rPr lang="en-US" dirty="0">
+                <a:solidFill>
+                  <a:srgbClr val="FFFFFF"/>
+                </a:solidFill>
+                <a:latin typeface="Calibri"/>
+              </a:rPr>
+              <a:t>[</a:t>
+            </a:r>
+          </a:p>
+          <a:p>
+            <a:r>
+              <a:rPr lang="en-US" dirty="0">
+                <a:solidFill>
+                  <a:srgbClr val="FFFFFF"/>
+                </a:solidFill>
+                <a:latin typeface="Calibri"/>
+              </a:rPr>
+              <a:t>  {..., "line": "#FFFFFF", "</a:t>
+            </a:r>
+            <a:r>
+              <a:rPr lang="en-US" dirty="0" err="1">
+                <a:solidFill>
+                  <a:srgbClr val="FFFFFF"/>
+                </a:solidFill>
+                <a:latin typeface="Calibri"/>
+              </a:rPr>
+              <a:t>lineWidth</a:t>
+            </a:r>
+            <a:r>
+              <a:rPr lang="en-US" dirty="0">
+                <a:solidFill>
+                  <a:srgbClr val="FFFFFF"/>
+                </a:solidFill>
+                <a:latin typeface="Calibri"/>
+              </a:rPr>
+              <a:t>": 1.2, "text": "{{</a:t>
+            </a:r>
+            <a:r>
+              <a:rPr lang="en-US" dirty="0" err="1">
+                <a:solidFill>
+                  <a:srgbClr val="FFFFFF"/>
+                </a:solidFill>
+                <a:latin typeface="Calibri"/>
+              </a:rPr>
+              <a:t>bold:Border</a:t>
+            </a:r>
+            <a:r>
+              <a:rPr lang="en-US" dirty="0">
+                <a:solidFill>
+                  <a:srgbClr val="FFFFFF"/>
+                </a:solidFill>
+                <a:latin typeface="Calibri"/>
+              </a:rPr>
+              <a:t>}}", "</a:t>
+            </a:r>
+            <a:r>
+              <a:rPr lang="en-US" dirty="0" err="1">
+                <a:solidFill>
+                  <a:srgbClr val="FFFFFF"/>
+                </a:solidFill>
+                <a:latin typeface="Calibri"/>
+              </a:rPr>
+              <a:t>textAlign</a:t>
+            </a:r>
+            <a:r>
+              <a:rPr lang="en-US" dirty="0">
+                <a:solidFill>
+                  <a:srgbClr val="FFFFFF"/>
+                </a:solidFill>
+                <a:latin typeface="Calibri"/>
+              </a:rPr>
+              <a:t>": "center", "</a:t>
+            </a:r>
+            <a:r>
+              <a:rPr lang="en-US" dirty="0" err="1">
+                <a:solidFill>
+                  <a:srgbClr val="FFFFFF"/>
+                </a:solidFill>
+                <a:latin typeface="Calibri"/>
+              </a:rPr>
+              <a:t>verticalAnchor</a:t>
+            </a:r>
+            <a:r>
+              <a:rPr lang="en-US" dirty="0">
+                <a:solidFill>
+                  <a:srgbClr val="FFFFFF"/>
+                </a:solidFill>
+                <a:latin typeface="Calibri"/>
+              </a:rPr>
+              <a:t>": 3}</a:t>
+            </a:r>
+          </a:p>
+          <a:p>
+            <a:r>
+              <a:rPr lang="en-US" dirty="0">
+                <a:solidFill>
+                  <a:srgbClr val="FFFFFF"/>
+                </a:solidFill>
+                <a:latin typeface="Calibri"/>
+              </a:rPr>
+              <a:t>]</a:t>
+            </a:r>
+          </a:p>
+          <a:p>
+            <a:r>
+              <a:rPr lang="en-US" dirty="0">
+                <a:solidFill>
+                  <a:srgbClr val="FFFFFF"/>
+                </a:solidFill>
+                <a:latin typeface="Calibri"/>
+              </a:rPr>
+              <a:t>```</a:t>
             </a:r>
           </a:p>
           <a:p>
@@ -1810,6 +4119,14 @@
             </a:r>
           </a:p>
           <a:p>
+            <a:endParaRPr lang="en-US" dirty="0">
+              <a:solidFill>
+                <a:srgbClr val="FFFFFF"/>
+              </a:solidFill>
+              <a:latin typeface="Calibri"/>
+            </a:endParaRPr>
+          </a:p>
+          <a:p>
             <a:r>
               <a:rPr lang="en-US" dirty="0">
                 <a:solidFill>
@@ -1878,6 +4195,139 @@
             </a:r>
           </a:p>
           <a:p>
+            <a:endParaRPr lang="en-US" dirty="0">
+              <a:solidFill>
+                <a:srgbClr val="FFFFFF"/>
+              </a:solidFill>
+              <a:latin typeface="Calibri"/>
+            </a:endParaRPr>
+          </a:p>
+          <a:p>
+            <a:r>
+              <a:rPr lang="en-US" dirty="0">
+                <a:solidFill>
+                  <a:srgbClr val="FFFFFF"/>
+                </a:solidFill>
+                <a:latin typeface="Calibri"/>
+              </a:rPr>
+              <a:t>```</a:t>
+            </a:r>
+            <a:r>
+              <a:rPr lang="en-US" dirty="0" err="1">
+                <a:solidFill>
+                  <a:srgbClr val="FFFFFF"/>
+                </a:solidFill>
+                <a:latin typeface="Calibri"/>
+              </a:rPr>
+              <a:t>json</a:t>
+            </a:r>
+            <a:endParaRPr lang="en-US" dirty="0">
+              <a:solidFill>
+                <a:srgbClr val="FFFFFF"/>
+              </a:solidFill>
+              <a:latin typeface="Calibri"/>
+            </a:endParaRPr>
+          </a:p>
+          <a:p>
+            <a:r>
+              <a:rPr lang="en-US" dirty="0">
+                <a:solidFill>
+                  <a:srgbClr val="FFFFFF"/>
+                </a:solidFill>
+                <a:latin typeface="Calibri"/>
+              </a:rPr>
+              <a:t>[</a:t>
+            </a:r>
+          </a:p>
+          <a:p>
+            <a:r>
+              <a:rPr lang="en-US" dirty="0">
+                <a:solidFill>
+                  <a:srgbClr val="FFFFFF"/>
+                </a:solidFill>
+                <a:latin typeface="Calibri"/>
+              </a:rPr>
+              <a:t>  {"type": "shape", "shape": "</a:t>
+            </a:r>
+            <a:r>
+              <a:rPr lang="en-US" dirty="0" err="1">
+                <a:solidFill>
+                  <a:srgbClr val="FFFFFF"/>
+                </a:solidFill>
+                <a:latin typeface="Calibri"/>
+              </a:rPr>
+              <a:t>rounded_rectangle</a:t>
+            </a:r>
+            <a:r>
+              <a:rPr lang="en-US" dirty="0">
+                <a:solidFill>
+                  <a:srgbClr val="FFFFFF"/>
+                </a:solidFill>
+                <a:latin typeface="Calibri"/>
+              </a:rPr>
+              <a:t>", "width": 800, "height": 16, "adjustments": [0.5], "fill": "#FFFFFF", "opacity": 0.15},</a:t>
+            </a:r>
+          </a:p>
+          <a:p>
+            <a:r>
+              <a:rPr lang="en-US" dirty="0">
+                <a:solidFill>
+                  <a:srgbClr val="FFFFFF"/>
+                </a:solidFill>
+                <a:latin typeface="Calibri"/>
+              </a:rPr>
+              <a:t>  {"type": "shape", "shape": "</a:t>
+            </a:r>
+            <a:r>
+              <a:rPr lang="en-US" dirty="0" err="1">
+                <a:solidFill>
+                  <a:srgbClr val="FFFFFF"/>
+                </a:solidFill>
+                <a:latin typeface="Calibri"/>
+              </a:rPr>
+              <a:t>rounded_rectangle</a:t>
+            </a:r>
+            <a:r>
+              <a:rPr lang="en-US" dirty="0">
+                <a:solidFill>
+                  <a:srgbClr val="FFFFFF"/>
+                </a:solidFill>
+                <a:latin typeface="Calibri"/>
+              </a:rPr>
+              <a:t>", "width": 560, "height": 16, "adjustments": [0.5], "fill": "#FF9900"}</a:t>
+            </a:r>
+          </a:p>
+          <a:p>
+            <a:r>
+              <a:rPr lang="en-US" dirty="0">
+                <a:solidFill>
+                  <a:srgbClr val="FFFFFF"/>
+                </a:solidFill>
+                <a:latin typeface="Calibri"/>
+              </a:rPr>
+              <a:t>]</a:t>
+            </a:r>
+          </a:p>
+          <a:p>
+            <a:r>
+              <a:rPr lang="en-US" dirty="0">
+                <a:solidFill>
+                  <a:srgbClr val="FFFFFF"/>
+                </a:solidFill>
+                <a:latin typeface="Calibri"/>
+              </a:rPr>
+              <a:t>```</a:t>
+            </a:r>
+          </a:p>
+          <a:p>
+            <a:endParaRPr lang="en-US" dirty="0">
+              <a:solidFill>
+                <a:srgbClr val="FFFFFF"/>
+              </a:solidFill>
+              <a:latin typeface="Calibri"/>
+            </a:endParaRPr>
+          </a:p>
+          <a:p>
             <a:r>
               <a:rPr lang="en-US" dirty="0">
                 <a:solidFill>
@@ -1886,6 +4336,84 @@
                 <a:latin typeface="Calibri"/>
               </a:rPr>
               <a:t>Gradient on the foreground adds movement along the direction of progress.</a:t>
+            </a:r>
+          </a:p>
+          <a:p>
+            <a:endParaRPr lang="en-US" dirty="0">
+              <a:solidFill>
+                <a:srgbClr val="FFFFFF"/>
+              </a:solidFill>
+              <a:latin typeface="Calibri"/>
+            </a:endParaRPr>
+          </a:p>
+          <a:p>
+            <a:r>
+              <a:rPr lang="en-US" dirty="0">
+                <a:solidFill>
+                  <a:srgbClr val="FFFFFF"/>
+                </a:solidFill>
+                <a:latin typeface="Calibri"/>
+              </a:rPr>
+              <a:t>```</a:t>
+            </a:r>
+            <a:r>
+              <a:rPr lang="en-US" dirty="0" err="1">
+                <a:solidFill>
+                  <a:srgbClr val="FFFFFF"/>
+                </a:solidFill>
+                <a:latin typeface="Calibri"/>
+              </a:rPr>
+              <a:t>json</a:t>
+            </a:r>
+            <a:endParaRPr lang="en-US" dirty="0">
+              <a:solidFill>
+                <a:srgbClr val="FFFFFF"/>
+              </a:solidFill>
+              <a:latin typeface="Calibri"/>
+            </a:endParaRPr>
+          </a:p>
+          <a:p>
+            <a:r>
+              <a:rPr lang="en-US" dirty="0">
+                <a:solidFill>
+                  <a:srgbClr val="FFFFFF"/>
+                </a:solidFill>
+                <a:latin typeface="Calibri"/>
+              </a:rPr>
+              <a:t>[</a:t>
+            </a:r>
+          </a:p>
+          <a:p>
+            <a:r>
+              <a:rPr lang="en-US" dirty="0">
+                <a:solidFill>
+                  <a:srgbClr val="FFFFFF"/>
+                </a:solidFill>
+                <a:latin typeface="Calibri"/>
+              </a:rPr>
+              <a:t>  {..., "gradient": {"stops": [{"position": 0.0, "color": "#FF9900"}, {"position": 1.0, "color": "#FBD332"}], "angle": 0.0}}</a:t>
+            </a:r>
+          </a:p>
+          <a:p>
+            <a:r>
+              <a:rPr lang="en-US" dirty="0">
+                <a:solidFill>
+                  <a:srgbClr val="FFFFFF"/>
+                </a:solidFill>
+                <a:latin typeface="Calibri"/>
+              </a:rPr>
+              <a:t>]</a:t>
+            </a:r>
+          </a:p>
+          <a:p>
+            <a:r>
+              <a:rPr lang="en-US" dirty="0">
+                <a:solidFill>
+                  <a:srgbClr val="FFFFFF"/>
+                </a:solidFill>
+                <a:latin typeface="Calibri"/>
+              </a:rPr>
+              <a:t>```</a:t>
             </a:r>
             <a:endParaRPr dirty="0">
               <a:solidFill>
@@ -1971,6 +4499,14 @@
             </a:r>
           </a:p>
           <a:p>
+            <a:endParaRPr lang="en-US" dirty="0">
+              <a:solidFill>
+                <a:srgbClr val="FFFFFF"/>
+              </a:solidFill>
+              <a:latin typeface="Calibri"/>
+            </a:endParaRPr>
+          </a:p>
+          <a:p>
             <a:r>
               <a:rPr lang="en-US" dirty="0">
                 <a:solidFill>
@@ -2088,6 +4624,232 @@
                 <a:latin typeface="Calibri"/>
               </a:rPr>
               <a:t>background color over the line, then place text on top. The rectangle fill must match the background exactly or the seam shows.</a:t>
+            </a:r>
+          </a:p>
+          <a:p>
+            <a:endParaRPr lang="en-US" dirty="0">
+              <a:solidFill>
+                <a:srgbClr val="FFFFFF"/>
+              </a:solidFill>
+              <a:latin typeface="Calibri"/>
+            </a:endParaRPr>
+          </a:p>
+          <a:p>
+            <a:r>
+              <a:rPr lang="en-US" dirty="0">
+                <a:solidFill>
+                  <a:srgbClr val="FFFFFF"/>
+                </a:solidFill>
+                <a:latin typeface="Calibri"/>
+              </a:rPr>
+              <a:t>```</a:t>
+            </a:r>
+            <a:r>
+              <a:rPr lang="en-US" dirty="0" err="1">
+                <a:solidFill>
+                  <a:srgbClr val="FFFFFF"/>
+                </a:solidFill>
+                <a:latin typeface="Calibri"/>
+              </a:rPr>
+              <a:t>json</a:t>
+            </a:r>
+            <a:endParaRPr lang="en-US" dirty="0">
+              <a:solidFill>
+                <a:srgbClr val="FFFFFF"/>
+              </a:solidFill>
+              <a:latin typeface="Calibri"/>
+            </a:endParaRPr>
+          </a:p>
+          <a:p>
+            <a:r>
+              <a:rPr lang="en-US" dirty="0">
+                <a:solidFill>
+                  <a:srgbClr val="FFFFFF"/>
+                </a:solidFill>
+                <a:latin typeface="Calibri"/>
+              </a:rPr>
+              <a:t>[</a:t>
+            </a:r>
+          </a:p>
+          <a:p>
+            <a:r>
+              <a:rPr lang="en-US" dirty="0">
+                <a:solidFill>
+                  <a:srgbClr val="FFFFFF"/>
+                </a:solidFill>
+                <a:latin typeface="Calibri"/>
+              </a:rPr>
+              <a:t>  {"type": "textbox", "x": "${x}", "y": "${y}", "width": 269, "height": 53, "text": "{{bold,#0072E5:EASIER}}", "</a:t>
+            </a:r>
+            <a:r>
+              <a:rPr lang="en-US" dirty="0" err="1">
+                <a:solidFill>
+                  <a:srgbClr val="FFFFFF"/>
+                </a:solidFill>
+                <a:latin typeface="Calibri"/>
+              </a:rPr>
+              <a:t>fontSize</a:t>
+            </a:r>
+            <a:r>
+              <a:rPr lang="en-US" dirty="0">
+                <a:solidFill>
+                  <a:srgbClr val="FFFFFF"/>
+                </a:solidFill>
+                <a:latin typeface="Calibri"/>
+              </a:rPr>
+              <a:t>": 16, "align": "center"},</a:t>
+            </a:r>
+          </a:p>
+          <a:p>
+            <a:r>
+              <a:rPr lang="en-US" dirty="0">
+                <a:solidFill>
+                  <a:srgbClr val="FFFFFF"/>
+                </a:solidFill>
+                <a:latin typeface="Calibri"/>
+              </a:rPr>
+              <a:t>  {"type": "line", "x": "${x+269}", "y": "${y+26}", "width": 1306, "height": 0, "</a:t>
+            </a:r>
+            <a:r>
+              <a:rPr lang="en-US" dirty="0" err="1">
+                <a:solidFill>
+                  <a:srgbClr val="FFFFFF"/>
+                </a:solidFill>
+                <a:latin typeface="Calibri"/>
+              </a:rPr>
+              <a:t>lineWidth</a:t>
+            </a:r>
+            <a:r>
+              <a:rPr lang="en-US" dirty="0">
+                <a:solidFill>
+                  <a:srgbClr val="FFFFFF"/>
+                </a:solidFill>
+                <a:latin typeface="Calibri"/>
+              </a:rPr>
+              <a:t>": 1.5, "</a:t>
+            </a:r>
+            <a:r>
+              <a:rPr lang="en-US" dirty="0" err="1">
+                <a:solidFill>
+                  <a:srgbClr val="FFFFFF"/>
+                </a:solidFill>
+                <a:latin typeface="Calibri"/>
+              </a:rPr>
+              <a:t>dashStyle</a:t>
+            </a:r>
+            <a:r>
+              <a:rPr lang="en-US" dirty="0">
+                <a:solidFill>
+                  <a:srgbClr val="FFFFFF"/>
+                </a:solidFill>
+                <a:latin typeface="Calibri"/>
+              </a:rPr>
+              <a:t>": "dash", "</a:t>
+            </a:r>
+            <a:r>
+              <a:rPr lang="en-US" dirty="0" err="1">
+                <a:solidFill>
+                  <a:srgbClr val="FFFFFF"/>
+                </a:solidFill>
+                <a:latin typeface="Calibri"/>
+              </a:rPr>
+              <a:t>headEnd</a:t>
+            </a:r>
+            <a:r>
+              <a:rPr lang="en-US" dirty="0">
+                <a:solidFill>
+                  <a:srgbClr val="FFFFFF"/>
+                </a:solidFill>
+                <a:latin typeface="Calibri"/>
+              </a:rPr>
+              <a:t>": "arrow", "</a:t>
+            </a:r>
+            <a:r>
+              <a:rPr lang="en-US" dirty="0" err="1">
+                <a:solidFill>
+                  <a:srgbClr val="FFFFFF"/>
+                </a:solidFill>
+                <a:latin typeface="Calibri"/>
+              </a:rPr>
+              <a:t>tailEnd</a:t>
+            </a:r>
+            <a:r>
+              <a:rPr lang="en-US" dirty="0">
+                <a:solidFill>
+                  <a:srgbClr val="FFFFFF"/>
+                </a:solidFill>
+                <a:latin typeface="Calibri"/>
+              </a:rPr>
+              <a:t>": "arrow", "</a:t>
+            </a:r>
+            <a:r>
+              <a:rPr lang="en-US" dirty="0" err="1">
+                <a:solidFill>
+                  <a:srgbClr val="FFFFFF"/>
+                </a:solidFill>
+                <a:latin typeface="Calibri"/>
+              </a:rPr>
+              <a:t>lineGradient</a:t>
+            </a:r>
+            <a:r>
+              <a:rPr lang="en-US" dirty="0">
+                <a:solidFill>
+                  <a:srgbClr val="FFFFFF"/>
+                </a:solidFill>
+                <a:latin typeface="Calibri"/>
+              </a:rPr>
+              <a:t>": {"stops": [{"position": 0.0, "color": "#0072E5"}, {"position": 0.5, "color": "#C300E0"}, {"position": 1.0, "color": "#00E500"}], "angle": 0.0}},</a:t>
+            </a:r>
+          </a:p>
+          <a:p>
+            <a:r>
+              <a:rPr lang="en-US" dirty="0">
+                <a:solidFill>
+                  <a:srgbClr val="FFFFFF"/>
+                </a:solidFill>
+                <a:latin typeface="Calibri"/>
+              </a:rPr>
+              <a:t>  {"type": "textbox", "x": "${x+1575}", "y": "${y}", "width": 269, "height": 53, "text": "{{bold,#00E500:COMPLEX}}", "</a:t>
+            </a:r>
+            <a:r>
+              <a:rPr lang="en-US" dirty="0" err="1">
+                <a:solidFill>
+                  <a:srgbClr val="FFFFFF"/>
+                </a:solidFill>
+                <a:latin typeface="Calibri"/>
+              </a:rPr>
+              <a:t>fontSize</a:t>
+            </a:r>
+            <a:r>
+              <a:rPr lang="en-US" dirty="0">
+                <a:solidFill>
+                  <a:srgbClr val="FFFFFF"/>
+                </a:solidFill>
+                <a:latin typeface="Calibri"/>
+              </a:rPr>
+              <a:t>": 16, "align": "center"}</a:t>
+            </a:r>
+          </a:p>
+          <a:p>
+            <a:r>
+              <a:rPr lang="en-US" dirty="0">
+                <a:solidFill>
+                  <a:srgbClr val="FFFFFF"/>
+                </a:solidFill>
+                <a:latin typeface="Calibri"/>
+              </a:rPr>
+              <a:t>]</a:t>
+            </a:r>
+          </a:p>
+          <a:p>
+            <a:r>
+              <a:rPr lang="en-US" dirty="0">
+                <a:solidFill>
+                  <a:srgbClr val="FFFFFF"/>
+                </a:solidFill>
+                <a:latin typeface="Calibri"/>
+              </a:rPr>
+              <a:t>```</a:t>
             </a:r>
             <a:endParaRPr dirty="0">
               <a:solidFill>
@@ -2173,6 +4935,14 @@
             </a:r>
           </a:p>
           <a:p>
+            <a:endParaRPr lang="en-US" dirty="0">
+              <a:solidFill>
+                <a:srgbClr val="FFFFFF"/>
+              </a:solidFill>
+              <a:latin typeface="Calibri"/>
+            </a:endParaRPr>
+          </a:p>
+          <a:p>
             <a:r>
               <a:rPr lang="en-US" dirty="0">
                 <a:solidFill>
@@ -2249,6 +5019,142 @@
                 <a:latin typeface="Calibri"/>
               </a:rPr>
               <a:t>light. Thicker arcs feel bolder and fill more visual space.</a:t>
+            </a:r>
+          </a:p>
+          <a:p>
+            <a:endParaRPr lang="en-US" dirty="0">
+              <a:solidFill>
+                <a:srgbClr val="FFFFFF"/>
+              </a:solidFill>
+              <a:latin typeface="Calibri"/>
+            </a:endParaRPr>
+          </a:p>
+          <a:p>
+            <a:r>
+              <a:rPr lang="en-US" dirty="0">
+                <a:solidFill>
+                  <a:srgbClr val="FFFFFF"/>
+                </a:solidFill>
+                <a:latin typeface="Calibri"/>
+              </a:rPr>
+              <a:t>```</a:t>
+            </a:r>
+            <a:r>
+              <a:rPr lang="en-US" dirty="0" err="1">
+                <a:solidFill>
+                  <a:srgbClr val="FFFFFF"/>
+                </a:solidFill>
+                <a:latin typeface="Calibri"/>
+              </a:rPr>
+              <a:t>json</a:t>
+            </a:r>
+            <a:endParaRPr lang="en-US" dirty="0">
+              <a:solidFill>
+                <a:srgbClr val="FFFFFF"/>
+              </a:solidFill>
+              <a:latin typeface="Calibri"/>
+            </a:endParaRPr>
+          </a:p>
+          <a:p>
+            <a:r>
+              <a:rPr lang="en-US" dirty="0">
+                <a:solidFill>
+                  <a:srgbClr val="FFFFFF"/>
+                </a:solidFill>
+                <a:latin typeface="Calibri"/>
+              </a:rPr>
+              <a:t>[</a:t>
+            </a:r>
+          </a:p>
+          <a:p>
+            <a:r>
+              <a:rPr lang="en-US" dirty="0">
+                <a:solidFill>
+                  <a:srgbClr val="FFFFFF"/>
+                </a:solidFill>
+                <a:latin typeface="Calibri"/>
+              </a:rPr>
+              <a:t>  {"type": "shape", "shape": "donut", "x": "${x}", "y": "${y}", "width": 250, "height": 250, "adjustments": [0.15], "fill": "#FFFFFF", "opacity": 0.1},</a:t>
+            </a:r>
+          </a:p>
+          <a:p>
+            <a:r>
+              <a:rPr lang="en-US" dirty="0">
+                <a:solidFill>
+                  <a:srgbClr val="FFFFFF"/>
+                </a:solidFill>
+                <a:latin typeface="Calibri"/>
+              </a:rPr>
+              <a:t>  {"type": "shape", "shape": "</a:t>
+            </a:r>
+            <a:r>
+              <a:rPr lang="en-US" dirty="0" err="1">
+                <a:solidFill>
+                  <a:srgbClr val="FFFFFF"/>
+                </a:solidFill>
+                <a:latin typeface="Calibri"/>
+              </a:rPr>
+              <a:t>block_arc</a:t>
+            </a:r>
+            <a:r>
+              <a:rPr lang="en-US" dirty="0">
+                <a:solidFill>
+                  <a:srgbClr val="FFFFFF"/>
+                </a:solidFill>
+                <a:latin typeface="Calibri"/>
+              </a:rPr>
+              <a:t>", "x": "${x}", "y": "${y}", "width": 250, "height": 250, "adjustments": [162.0, 103.68, 0.15], "fill": "#FF9900"},</a:t>
+            </a:r>
+          </a:p>
+          <a:p>
+            <a:r>
+              <a:rPr lang="en-US" dirty="0">
+                <a:solidFill>
+                  <a:srgbClr val="FFFFFF"/>
+                </a:solidFill>
+                <a:latin typeface="Calibri"/>
+              </a:rPr>
+              <a:t>  {"type": "textbox", "x": "${x+25}", "y": "${y+90}", "width": 200, "height": 70, "text": "{{bold:73%}}", "</a:t>
+            </a:r>
+            <a:r>
+              <a:rPr lang="en-US" dirty="0" err="1">
+                <a:solidFill>
+                  <a:srgbClr val="FFFFFF"/>
+                </a:solidFill>
+                <a:latin typeface="Calibri"/>
+              </a:rPr>
+              <a:t>fontSize</a:t>
+            </a:r>
+            <a:r>
+              <a:rPr lang="en-US" dirty="0">
+                <a:solidFill>
+                  <a:srgbClr val="FFFFFF"/>
+                </a:solidFill>
+                <a:latin typeface="Calibri"/>
+              </a:rPr>
+              <a:t>": 36, "align": "center"}</a:t>
+            </a:r>
+          </a:p>
+          <a:p>
+            <a:r>
+              <a:rPr lang="en-US" dirty="0">
+                <a:solidFill>
+                  <a:srgbClr val="FFFFFF"/>
+                </a:solidFill>
+                <a:latin typeface="Calibri"/>
+              </a:rPr>
+              <a:t>]</a:t>
+            </a:r>
+          </a:p>
+          <a:p>
+            <a:r>
+              <a:rPr lang="en-US" dirty="0">
+                <a:solidFill>
+                  <a:srgbClr val="FFFFFF"/>
+                </a:solidFill>
+                <a:latin typeface="Calibri"/>
+              </a:rPr>
+              <a:t>```</a:t>
             </a:r>
             <a:endParaRPr dirty="0">
               <a:solidFill>
@@ -2339,6 +5245,14 @@
             </a:r>
           </a:p>
           <a:p>
+            <a:endParaRPr lang="en-US" dirty="0">
+              <a:solidFill>
+                <a:srgbClr val="FFFFFF"/>
+              </a:solidFill>
+              <a:latin typeface="Calibri"/>
+            </a:endParaRPr>
+          </a:p>
+          <a:p>
             <a:r>
               <a:rPr lang="en-US" dirty="0">
                 <a:solidFill>
@@ -2395,7 +5309,7 @@
                 </a:solidFill>
                 <a:latin typeface="Calibri"/>
               </a:rPr>
-              <a:t>These are independent axes — combine them freely. </a:t>
+              <a:t>These are independent axes — combine them freely.</a:t>
             </a:r>
           </a:p>
           <a:p>
@@ -2576,6 +5490,14 @@
             </a:r>
           </a:p>
           <a:p>
+            <a:endParaRPr lang="en-US" dirty="0">
+              <a:solidFill>
+                <a:srgbClr val="FFFFFF"/>
+              </a:solidFill>
+              <a:latin typeface="Calibri"/>
+            </a:endParaRPr>
+          </a:p>
+          <a:p>
             <a:r>
               <a:rPr lang="en-US" dirty="0">
                 <a:solidFill>
@@ -2621,7 +5543,7 @@
                 </a:solidFill>
                 <a:latin typeface="Calibri"/>
               </a:rPr>
-              <a:t>Sections that need separation. A solid line draws a clear cut. Dash softens it — the separation is there but lighter. Fade both ends to zero opacity and the line dissolves into the space — useful inside cards where a hard line would feel too heavy.</a:t>
+              <a:t>Sections that need separation. A solid line draws a clear cut.</a:t>
             </a:r>
           </a:p>
           <a:p>
@@ -2640,7 +5562,483 @@
                 </a:solidFill>
                 <a:latin typeface="Calibri"/>
               </a:rPr>
+              <a:t>```</a:t>
+            </a:r>
+            <a:r>
+              <a:rPr lang="en-US" dirty="0" err="1">
+                <a:solidFill>
+                  <a:srgbClr val="FFFFFF"/>
+                </a:solidFill>
+                <a:latin typeface="Calibri"/>
+              </a:rPr>
+              <a:t>json</a:t>
+            </a:r>
+            <a:endParaRPr lang="en-US" dirty="0">
+              <a:solidFill>
+                <a:srgbClr val="FFFFFF"/>
+              </a:solidFill>
+              <a:latin typeface="Calibri"/>
+            </a:endParaRPr>
+          </a:p>
+          <a:p>
+            <a:r>
+              <a:rPr lang="en-US" dirty="0">
+                <a:solidFill>
+                  <a:srgbClr val="FFFFFF"/>
+                </a:solidFill>
+                <a:latin typeface="Calibri"/>
+              </a:rPr>
+              <a:t>[</a:t>
+            </a:r>
+          </a:p>
+          <a:p>
+            <a:r>
+              <a:rPr lang="en-US" dirty="0">
+                <a:solidFill>
+                  <a:srgbClr val="FFFFFF"/>
+                </a:solidFill>
+                <a:latin typeface="Calibri"/>
+              </a:rPr>
+              <a:t>  {"type": "line", "width": 1728, "height": 0, "</a:t>
+            </a:r>
+            <a:r>
+              <a:rPr lang="en-US" dirty="0" err="1">
+                <a:solidFill>
+                  <a:srgbClr val="FFFFFF"/>
+                </a:solidFill>
+                <a:latin typeface="Calibri"/>
+              </a:rPr>
+              <a:t>lineWidth</a:t>
+            </a:r>
+            <a:r>
+              <a:rPr lang="en-US" dirty="0">
+                <a:solidFill>
+                  <a:srgbClr val="FFFFFF"/>
+                </a:solidFill>
+                <a:latin typeface="Calibri"/>
+              </a:rPr>
+              <a:t>": 1.0, "color": "#8FA7C4"}</a:t>
+            </a:r>
+          </a:p>
+          <a:p>
+            <a:r>
+              <a:rPr lang="en-US" dirty="0">
+                <a:solidFill>
+                  <a:srgbClr val="FFFFFF"/>
+                </a:solidFill>
+                <a:latin typeface="Calibri"/>
+              </a:rPr>
+              <a:t>]</a:t>
+            </a:r>
+          </a:p>
+          <a:p>
+            <a:r>
+              <a:rPr lang="en-US" dirty="0">
+                <a:solidFill>
+                  <a:srgbClr val="FFFFFF"/>
+                </a:solidFill>
+                <a:latin typeface="Calibri"/>
+              </a:rPr>
+              <a:t>```</a:t>
+            </a:r>
+          </a:p>
+          <a:p>
+            <a:endParaRPr lang="en-US" dirty="0">
+              <a:solidFill>
+                <a:srgbClr val="FFFFFF"/>
+              </a:solidFill>
+              <a:latin typeface="Calibri"/>
+            </a:endParaRPr>
+          </a:p>
+          <a:p>
+            <a:r>
+              <a:rPr lang="en-US" dirty="0">
+                <a:solidFill>
+                  <a:srgbClr val="FFFFFF"/>
+                </a:solidFill>
+                <a:latin typeface="Calibri"/>
+              </a:rPr>
+              <a:t>Fade both ends to zero opacity and the line dissolves into the space — useful inside cards where a hard line would feel too heavy.</a:t>
+            </a:r>
+          </a:p>
+          <a:p>
+            <a:endParaRPr lang="en-US" dirty="0">
+              <a:solidFill>
+                <a:srgbClr val="FFFFFF"/>
+              </a:solidFill>
+              <a:latin typeface="Calibri"/>
+            </a:endParaRPr>
+          </a:p>
+          <a:p>
+            <a:r>
+              <a:rPr lang="en-US" dirty="0">
+                <a:solidFill>
+                  <a:srgbClr val="FFFFFF"/>
+                </a:solidFill>
+                <a:latin typeface="Calibri"/>
+              </a:rPr>
+              <a:t>```</a:t>
+            </a:r>
+            <a:r>
+              <a:rPr lang="en-US" dirty="0" err="1">
+                <a:solidFill>
+                  <a:srgbClr val="FFFFFF"/>
+                </a:solidFill>
+                <a:latin typeface="Calibri"/>
+              </a:rPr>
+              <a:t>json</a:t>
+            </a:r>
+            <a:endParaRPr lang="en-US" dirty="0">
+              <a:solidFill>
+                <a:srgbClr val="FFFFFF"/>
+              </a:solidFill>
+              <a:latin typeface="Calibri"/>
+            </a:endParaRPr>
+          </a:p>
+          <a:p>
+            <a:r>
+              <a:rPr lang="en-US" dirty="0">
+                <a:solidFill>
+                  <a:srgbClr val="FFFFFF"/>
+                </a:solidFill>
+                <a:latin typeface="Calibri"/>
+              </a:rPr>
+              <a:t>[</a:t>
+            </a:r>
+          </a:p>
+          <a:p>
+            <a:r>
+              <a:rPr lang="en-US" dirty="0">
+                <a:solidFill>
+                  <a:srgbClr val="FFFFFF"/>
+                </a:solidFill>
+                <a:latin typeface="Calibri"/>
+              </a:rPr>
+              <a:t>  {"type": "line", "width": 1728, "height": 0, "</a:t>
+            </a:r>
+            <a:r>
+              <a:rPr lang="en-US" dirty="0" err="1">
+                <a:solidFill>
+                  <a:srgbClr val="FFFFFF"/>
+                </a:solidFill>
+                <a:latin typeface="Calibri"/>
+              </a:rPr>
+              <a:t>lineWidth</a:t>
+            </a:r>
+            <a:r>
+              <a:rPr lang="en-US" dirty="0">
+                <a:solidFill>
+                  <a:srgbClr val="FFFFFF"/>
+                </a:solidFill>
+                <a:latin typeface="Calibri"/>
+              </a:rPr>
+              <a:t>": 1.0, "</a:t>
+            </a:r>
+            <a:r>
+              <a:rPr lang="en-US" dirty="0" err="1">
+                <a:solidFill>
+                  <a:srgbClr val="FFFFFF"/>
+                </a:solidFill>
+                <a:latin typeface="Calibri"/>
+              </a:rPr>
+              <a:t>lineGradient</a:t>
+            </a:r>
+            <a:r>
+              <a:rPr lang="en-US" dirty="0">
+                <a:solidFill>
+                  <a:srgbClr val="FFFFFF"/>
+                </a:solidFill>
+                <a:latin typeface="Calibri"/>
+              </a:rPr>
+              <a:t>": {"stops": [{"position": 0.0, "color": "#FFFFFF", "opacity": 0.0}, {"position": 0.3, "color": "#FFFFFF"}, {"position": 0.7, "color": "#FFFFFF"}, {"position": 1.0, "color": "#FFFFFF", "opacity": 0.0}], "angle": 0.0}}</a:t>
+            </a:r>
+          </a:p>
+          <a:p>
+            <a:r>
+              <a:rPr lang="en-US" dirty="0">
+                <a:solidFill>
+                  <a:srgbClr val="FFFFFF"/>
+                </a:solidFill>
+                <a:latin typeface="Calibri"/>
+              </a:rPr>
+              <a:t>]</a:t>
+            </a:r>
+          </a:p>
+          <a:p>
+            <a:r>
+              <a:rPr lang="en-US" dirty="0">
+                <a:solidFill>
+                  <a:srgbClr val="FFFFFF"/>
+                </a:solidFill>
+                <a:latin typeface="Calibri"/>
+              </a:rPr>
+              <a:t>```</a:t>
+            </a:r>
+          </a:p>
+          <a:p>
+            <a:endParaRPr lang="en-US" dirty="0">
+              <a:solidFill>
+                <a:srgbClr val="FFFFFF"/>
+              </a:solidFill>
+              <a:latin typeface="Calibri"/>
+            </a:endParaRPr>
+          </a:p>
+          <a:p>
+            <a:r>
+              <a:rPr lang="en-US" dirty="0">
+                <a:solidFill>
+                  <a:srgbClr val="FFFFFF"/>
+                </a:solidFill>
+                <a:latin typeface="Calibri"/>
+              </a:rPr>
+              <a:t>Dash softens it — the separation is there but lighter.</a:t>
+            </a:r>
+          </a:p>
+          <a:p>
+            <a:endParaRPr lang="en-US" dirty="0">
+              <a:solidFill>
+                <a:srgbClr val="FFFFFF"/>
+              </a:solidFill>
+              <a:latin typeface="Calibri"/>
+            </a:endParaRPr>
+          </a:p>
+          <a:p>
+            <a:r>
+              <a:rPr lang="en-US" dirty="0">
+                <a:solidFill>
+                  <a:srgbClr val="FFFFFF"/>
+                </a:solidFill>
+                <a:latin typeface="Calibri"/>
+              </a:rPr>
+              <a:t>```</a:t>
+            </a:r>
+            <a:r>
+              <a:rPr lang="en-US" dirty="0" err="1">
+                <a:solidFill>
+                  <a:srgbClr val="FFFFFF"/>
+                </a:solidFill>
+                <a:latin typeface="Calibri"/>
+              </a:rPr>
+              <a:t>json</a:t>
+            </a:r>
+            <a:endParaRPr lang="en-US" dirty="0">
+              <a:solidFill>
+                <a:srgbClr val="FFFFFF"/>
+              </a:solidFill>
+              <a:latin typeface="Calibri"/>
+            </a:endParaRPr>
+          </a:p>
+          <a:p>
+            <a:r>
+              <a:rPr lang="en-US" dirty="0">
+                <a:solidFill>
+                  <a:srgbClr val="FFFFFF"/>
+                </a:solidFill>
+                <a:latin typeface="Calibri"/>
+              </a:rPr>
+              <a:t>[</a:t>
+            </a:r>
+          </a:p>
+          <a:p>
+            <a:r>
+              <a:rPr lang="en-US" dirty="0">
+                <a:solidFill>
+                  <a:srgbClr val="FFFFFF"/>
+                </a:solidFill>
+                <a:latin typeface="Calibri"/>
+              </a:rPr>
+              <a:t>  {"type": "line", "width": 1728, "height": 0, "</a:t>
+            </a:r>
+            <a:r>
+              <a:rPr lang="en-US" dirty="0" err="1">
+                <a:solidFill>
+                  <a:srgbClr val="FFFFFF"/>
+                </a:solidFill>
+                <a:latin typeface="Calibri"/>
+              </a:rPr>
+              <a:t>lineWidth</a:t>
+            </a:r>
+            <a:r>
+              <a:rPr lang="en-US" dirty="0">
+                <a:solidFill>
+                  <a:srgbClr val="FFFFFF"/>
+                </a:solidFill>
+                <a:latin typeface="Calibri"/>
+              </a:rPr>
+              <a:t>": 1.0, "</a:t>
+            </a:r>
+            <a:r>
+              <a:rPr lang="en-US" dirty="0" err="1">
+                <a:solidFill>
+                  <a:srgbClr val="FFFFFF"/>
+                </a:solidFill>
+                <a:latin typeface="Calibri"/>
+              </a:rPr>
+              <a:t>dashStyle</a:t>
+            </a:r>
+            <a:r>
+              <a:rPr lang="en-US" dirty="0">
+                <a:solidFill>
+                  <a:srgbClr val="FFFFFF"/>
+                </a:solidFill>
+                <a:latin typeface="Calibri"/>
+              </a:rPr>
+              <a:t>": "dash", "color": "#8FA7C4"}</a:t>
+            </a:r>
+          </a:p>
+          <a:p>
+            <a:r>
+              <a:rPr lang="en-US" dirty="0">
+                <a:solidFill>
+                  <a:srgbClr val="FFFFFF"/>
+                </a:solidFill>
+                <a:latin typeface="Calibri"/>
+              </a:rPr>
+              <a:t>]</a:t>
+            </a:r>
+          </a:p>
+          <a:p>
+            <a:r>
+              <a:rPr lang="en-US" dirty="0">
+                <a:solidFill>
+                  <a:srgbClr val="FFFFFF"/>
+                </a:solidFill>
+                <a:latin typeface="Calibri"/>
+              </a:rPr>
+              <a:t>```</a:t>
+            </a:r>
+          </a:p>
+          <a:p>
+            <a:endParaRPr lang="en-US" dirty="0">
+              <a:solidFill>
+                <a:srgbClr val="FFFFFF"/>
+              </a:solidFill>
+              <a:latin typeface="Calibri"/>
+            </a:endParaRPr>
+          </a:p>
+          <a:p>
+            <a:r>
+              <a:rPr lang="en-US" dirty="0">
+                <a:solidFill>
+                  <a:srgbClr val="FFFFFF"/>
+                </a:solidFill>
+                <a:latin typeface="Calibri"/>
+              </a:rPr>
               <a:t>Works vertically too — a vertical divider between columns separates without enclosing either side.</a:t>
+            </a:r>
+          </a:p>
+          <a:p>
+            <a:endParaRPr lang="en-US" dirty="0">
+              <a:solidFill>
+                <a:srgbClr val="FFFFFF"/>
+              </a:solidFill>
+              <a:latin typeface="Calibri"/>
+            </a:endParaRPr>
+          </a:p>
+          <a:p>
+            <a:r>
+              <a:rPr lang="en-US" dirty="0">
+                <a:solidFill>
+                  <a:srgbClr val="FFFFFF"/>
+                </a:solidFill>
+                <a:latin typeface="Calibri"/>
+              </a:rPr>
+              <a:t>```</a:t>
+            </a:r>
+            <a:r>
+              <a:rPr lang="en-US" dirty="0" err="1">
+                <a:solidFill>
+                  <a:srgbClr val="FFFFFF"/>
+                </a:solidFill>
+                <a:latin typeface="Calibri"/>
+              </a:rPr>
+              <a:t>json</a:t>
+            </a:r>
+            <a:endParaRPr lang="en-US" dirty="0">
+              <a:solidFill>
+                <a:srgbClr val="FFFFFF"/>
+              </a:solidFill>
+              <a:latin typeface="Calibri"/>
+            </a:endParaRPr>
+          </a:p>
+          <a:p>
+            <a:r>
+              <a:rPr lang="en-US" dirty="0">
+                <a:solidFill>
+                  <a:srgbClr val="FFFFFF"/>
+                </a:solidFill>
+                <a:latin typeface="Calibri"/>
+              </a:rPr>
+              <a:t>[</a:t>
+            </a:r>
+          </a:p>
+          <a:p>
+            <a:r>
+              <a:rPr lang="en-US" dirty="0">
+                <a:solidFill>
+                  <a:srgbClr val="FFFFFF"/>
+                </a:solidFill>
+                <a:latin typeface="Calibri"/>
+              </a:rPr>
+              <a:t>  {"type": "line", "width": 0, "height": 300, "</a:t>
+            </a:r>
+            <a:r>
+              <a:rPr lang="en-US" dirty="0" err="1">
+                <a:solidFill>
+                  <a:srgbClr val="FFFFFF"/>
+                </a:solidFill>
+                <a:latin typeface="Calibri"/>
+              </a:rPr>
+              <a:t>lineWidth</a:t>
+            </a:r>
+            <a:r>
+              <a:rPr lang="en-US" dirty="0">
+                <a:solidFill>
+                  <a:srgbClr val="FFFFFF"/>
+                </a:solidFill>
+                <a:latin typeface="Calibri"/>
+              </a:rPr>
+              <a:t>": 1.0, "</a:t>
+            </a:r>
+            <a:r>
+              <a:rPr lang="en-US" dirty="0" err="1">
+                <a:solidFill>
+                  <a:srgbClr val="FFFFFF"/>
+                </a:solidFill>
+                <a:latin typeface="Calibri"/>
+              </a:rPr>
+              <a:t>lineGradient</a:t>
+            </a:r>
+            <a:r>
+              <a:rPr lang="en-US" dirty="0">
+                <a:solidFill>
+                  <a:srgbClr val="FFFFFF"/>
+                </a:solidFill>
+                <a:latin typeface="Calibri"/>
+              </a:rPr>
+              <a:t>": {"stops": [{"position": 0.0, "color": "#F2FF85"}, {"position": 0.63, "color": "#FF316E"}, {"position": 1.0, "color": "#2C0152"}], "angle": 270.0}}</a:t>
+            </a:r>
+          </a:p>
+          <a:p>
+            <a:r>
+              <a:rPr lang="en-US" dirty="0">
+                <a:solidFill>
+                  <a:srgbClr val="FFFFFF"/>
+                </a:solidFill>
+                <a:latin typeface="Calibri"/>
+              </a:rPr>
+              <a:t>]</a:t>
+            </a:r>
+          </a:p>
+          <a:p>
+            <a:r>
+              <a:rPr lang="en-US" dirty="0">
+                <a:solidFill>
+                  <a:srgbClr val="FFFFFF"/>
+                </a:solidFill>
+                <a:latin typeface="Calibri"/>
+              </a:rPr>
+              <a:t>```</a:t>
             </a:r>
             <a:endParaRPr dirty="0">
               <a:solidFill>
@@ -2726,6 +6124,14 @@
             </a:r>
           </a:p>
           <a:p>
+            <a:endParaRPr lang="en-US" dirty="0">
+              <a:solidFill>
+                <a:srgbClr val="FFFFFF"/>
+              </a:solidFill>
+              <a:latin typeface="Calibri"/>
+            </a:endParaRPr>
+          </a:p>
+          <a:p>
             <a:r>
               <a:rPr lang="en-US" dirty="0">
                 <a:solidFill>
@@ -2791,6 +6197,196 @@
                 <a:latin typeface="Calibri"/>
               </a:rPr>
               <a:t>The band spans the full width — the ends need to go somewhere. These categories sit on a continuum, so the band should feel continuous too. Pill shape dissolves the edges, gradient flows across the columns — both reinforce the connection. If the categories were independent buckets, sharp edges and solid fill would keep them more contained.</a:t>
+            </a:r>
+          </a:p>
+          <a:p>
+            <a:endParaRPr lang="en-US" dirty="0">
+              <a:solidFill>
+                <a:srgbClr val="FFFFFF"/>
+              </a:solidFill>
+              <a:latin typeface="Calibri"/>
+            </a:endParaRPr>
+          </a:p>
+          <a:p>
+            <a:r>
+              <a:rPr lang="en-US" dirty="0">
+                <a:solidFill>
+                  <a:srgbClr val="FFFFFF"/>
+                </a:solidFill>
+                <a:latin typeface="Calibri"/>
+              </a:rPr>
+              <a:t>```</a:t>
+            </a:r>
+            <a:r>
+              <a:rPr lang="en-US" dirty="0" err="1">
+                <a:solidFill>
+                  <a:srgbClr val="FFFFFF"/>
+                </a:solidFill>
+                <a:latin typeface="Calibri"/>
+              </a:rPr>
+              <a:t>json</a:t>
+            </a:r>
+            <a:endParaRPr lang="en-US" dirty="0">
+              <a:solidFill>
+                <a:srgbClr val="FFFFFF"/>
+              </a:solidFill>
+              <a:latin typeface="Calibri"/>
+            </a:endParaRPr>
+          </a:p>
+          <a:p>
+            <a:r>
+              <a:rPr lang="en-US" dirty="0">
+                <a:solidFill>
+                  <a:srgbClr val="FFFFFF"/>
+                </a:solidFill>
+                <a:latin typeface="Calibri"/>
+              </a:rPr>
+              <a:t>[</a:t>
+            </a:r>
+          </a:p>
+          <a:p>
+            <a:r>
+              <a:rPr lang="en-US" dirty="0">
+                <a:solidFill>
+                  <a:srgbClr val="FFFFFF"/>
+                </a:solidFill>
+                <a:latin typeface="Calibri"/>
+              </a:rPr>
+              <a:t>  {"type": "shape", "shape": "</a:t>
+            </a:r>
+            <a:r>
+              <a:rPr lang="en-US" dirty="0" err="1">
+                <a:solidFill>
+                  <a:srgbClr val="FFFFFF"/>
+                </a:solidFill>
+                <a:latin typeface="Calibri"/>
+              </a:rPr>
+              <a:t>rounded_rectangle</a:t>
+            </a:r>
+            <a:r>
+              <a:rPr lang="en-US" dirty="0">
+                <a:solidFill>
+                  <a:srgbClr val="FFFFFF"/>
+                </a:solidFill>
+                <a:latin typeface="Calibri"/>
+              </a:rPr>
+              <a:t>", "x": "${x}", "y": "${y}", "width": 1756, "height": 214, "adjustments": [0.5], "gradient": {"stops": [{"position": 0.0, "color": "#002060"}, {"position": 0.46, "color": "#8105FF"}, {"position": 0.99, "color": "#FF0544"}], "angle": 0.0}},</a:t>
+            </a:r>
+          </a:p>
+          <a:p>
+            <a:r>
+              <a:rPr lang="en-US" dirty="0">
+                <a:solidFill>
+                  <a:srgbClr val="FFFFFF"/>
+                </a:solidFill>
+                <a:latin typeface="Calibri"/>
+              </a:rPr>
+              <a:t>  {"type": "shape", "shape": "rectangle", "x": "${x+99}", "y": "${y+40}", "width": 431, "height": 41, "text": "Label", "</a:t>
+            </a:r>
+            <a:r>
+              <a:rPr lang="en-US" dirty="0" err="1">
+                <a:solidFill>
+                  <a:srgbClr val="FFFFFF"/>
+                </a:solidFill>
+                <a:latin typeface="Calibri"/>
+              </a:rPr>
+              <a:t>fontSize</a:t>
+            </a:r>
+            <a:r>
+              <a:rPr lang="en-US" dirty="0">
+                <a:solidFill>
+                  <a:srgbClr val="FFFFFF"/>
+                </a:solidFill>
+                <a:latin typeface="Calibri"/>
+              </a:rPr>
+              <a:t>": 11, "</a:t>
+            </a:r>
+            <a:r>
+              <a:rPr lang="en-US" dirty="0" err="1">
+                <a:solidFill>
+                  <a:srgbClr val="FFFFFF"/>
+                </a:solidFill>
+                <a:latin typeface="Calibri"/>
+              </a:rPr>
+              <a:t>textAlign</a:t>
+            </a:r>
+            <a:r>
+              <a:rPr lang="en-US" dirty="0">
+                <a:solidFill>
+                  <a:srgbClr val="FFFFFF"/>
+                </a:solidFill>
+                <a:latin typeface="Calibri"/>
+              </a:rPr>
+              <a:t>": "left"},</a:t>
+            </a:r>
+          </a:p>
+          <a:p>
+            <a:r>
+              <a:rPr lang="en-US" dirty="0">
+                <a:solidFill>
+                  <a:srgbClr val="FFFFFF"/>
+                </a:solidFill>
+                <a:latin typeface="Calibri"/>
+              </a:rPr>
+              <a:t>  {"type": "shape", "shape": "rectangle", "x": "${x+99}", "y": "${y+75}", "width": 431, "height": 73, "text": "Category A", "</a:t>
+            </a:r>
+            <a:r>
+              <a:rPr lang="en-US" dirty="0" err="1">
+                <a:solidFill>
+                  <a:srgbClr val="FFFFFF"/>
+                </a:solidFill>
+                <a:latin typeface="Calibri"/>
+              </a:rPr>
+              <a:t>fontSize</a:t>
+            </a:r>
+            <a:r>
+              <a:rPr lang="en-US" dirty="0">
+                <a:solidFill>
+                  <a:srgbClr val="FFFFFF"/>
+                </a:solidFill>
+                <a:latin typeface="Calibri"/>
+              </a:rPr>
+              <a:t>": 24, "</a:t>
+            </a:r>
+            <a:r>
+              <a:rPr lang="en-US" dirty="0" err="1">
+                <a:solidFill>
+                  <a:srgbClr val="FFFFFF"/>
+                </a:solidFill>
+                <a:latin typeface="Calibri"/>
+              </a:rPr>
+              <a:t>textAlign</a:t>
+            </a:r>
+            <a:r>
+              <a:rPr lang="en-US" dirty="0">
+                <a:solidFill>
+                  <a:srgbClr val="FFFFFF"/>
+                </a:solidFill>
+                <a:latin typeface="Calibri"/>
+              </a:rPr>
+              <a:t>": "left"}</a:t>
+            </a:r>
+          </a:p>
+          <a:p>
+            <a:r>
+              <a:rPr lang="en-US" dirty="0">
+                <a:solidFill>
+                  <a:srgbClr val="FFFFFF"/>
+                </a:solidFill>
+                <a:latin typeface="Calibri"/>
+              </a:rPr>
+              <a:t>]</a:t>
+            </a:r>
+          </a:p>
+          <a:p>
+            <a:r>
+              <a:rPr lang="en-US" dirty="0">
+                <a:solidFill>
+                  <a:srgbClr val="FFFFFF"/>
+                </a:solidFill>
+                <a:latin typeface="Calibri"/>
+              </a:rPr>
+              <a:t>```</a:t>
             </a:r>
           </a:p>
         </p:txBody>
@@ -2951,6 +6547,14 @@
             </a:r>
           </a:p>
           <a:p>
+            <a:endParaRPr lang="en-US" dirty="0">
+              <a:solidFill>
+                <a:srgbClr val="FFFFFF"/>
+              </a:solidFill>
+              <a:latin typeface="Calibri"/>
+            </a:endParaRPr>
+          </a:p>
+          <a:p>
             <a:r>
               <a:rPr lang="en-US" dirty="0">
                 <a:solidFill>
@@ -3016,6 +6620,149 @@
                 <a:latin typeface="Calibri"/>
               </a:rPr>
               <a:t>Need a frame shape — circle keeps it neutral and compact. A more angular slide might call for a rounded square or hexagon instead. In a row of icons, varying the frame color gives each one its own identity.</a:t>
+            </a:r>
+          </a:p>
+          <a:p>
+            <a:endParaRPr lang="en-US" dirty="0">
+              <a:solidFill>
+                <a:srgbClr val="FFFFFF"/>
+              </a:solidFill>
+              <a:latin typeface="Calibri"/>
+            </a:endParaRPr>
+          </a:p>
+          <a:p>
+            <a:r>
+              <a:rPr lang="en-US" dirty="0">
+                <a:solidFill>
+                  <a:srgbClr val="FFFFFF"/>
+                </a:solidFill>
+                <a:latin typeface="Calibri"/>
+              </a:rPr>
+              <a:t>```</a:t>
+            </a:r>
+            <a:r>
+              <a:rPr lang="en-US" dirty="0" err="1">
+                <a:solidFill>
+                  <a:srgbClr val="FFFFFF"/>
+                </a:solidFill>
+                <a:latin typeface="Calibri"/>
+              </a:rPr>
+              <a:t>json</a:t>
+            </a:r>
+            <a:endParaRPr lang="en-US" dirty="0">
+              <a:solidFill>
+                <a:srgbClr val="FFFFFF"/>
+              </a:solidFill>
+              <a:latin typeface="Calibri"/>
+            </a:endParaRPr>
+          </a:p>
+          <a:p>
+            <a:r>
+              <a:rPr lang="en-US" dirty="0">
+                <a:solidFill>
+                  <a:srgbClr val="FFFFFF"/>
+                </a:solidFill>
+                <a:latin typeface="Calibri"/>
+              </a:rPr>
+              <a:t>[</a:t>
+            </a:r>
+          </a:p>
+          <a:p>
+            <a:r>
+              <a:rPr lang="en-US" dirty="0">
+                <a:solidFill>
+                  <a:srgbClr val="FFFFFF"/>
+                </a:solidFill>
+                <a:latin typeface="Calibri"/>
+              </a:rPr>
+              <a:t>  {"type": "shape", "shape": "circle", "x": "${x}", "y": "${y}", "width": 200, "height": 200, "fill": "#161E2C", "</a:t>
+            </a:r>
+            <a:r>
+              <a:rPr lang="en-US" dirty="0" err="1">
+                <a:solidFill>
+                  <a:srgbClr val="FFFFFF"/>
+                </a:solidFill>
+                <a:latin typeface="Calibri"/>
+              </a:rPr>
+              <a:t>lineWidth</a:t>
+            </a:r>
+            <a:r>
+              <a:rPr lang="en-US" dirty="0">
+                <a:solidFill>
+                  <a:srgbClr val="FFFFFF"/>
+                </a:solidFill>
+                <a:latin typeface="Calibri"/>
+              </a:rPr>
+              <a:t>": 2.5, "</a:t>
+            </a:r>
+            <a:r>
+              <a:rPr lang="en-US" dirty="0" err="1">
+                <a:solidFill>
+                  <a:srgbClr val="FFFFFF"/>
+                </a:solidFill>
+                <a:latin typeface="Calibri"/>
+              </a:rPr>
+              <a:t>lineGradient</a:t>
+            </a:r>
+            <a:r>
+              <a:rPr lang="en-US" dirty="0">
+                <a:solidFill>
+                  <a:srgbClr val="FFFFFF"/>
+                </a:solidFill>
+                <a:latin typeface="Calibri"/>
+              </a:rPr>
+              <a:t>": {"stops": [{"position": 0.0, "color": "#0073E5"}, {"position": 0.5, "color": "#5900B2"}, {"position": 1.0, "color": "#C300E0"}], "angle": 45.0}},</a:t>
+            </a:r>
+          </a:p>
+          <a:p>
+            <a:r>
+              <a:rPr lang="en-US" dirty="0">
+                <a:solidFill>
+                  <a:srgbClr val="FFFFFF"/>
+                </a:solidFill>
+                <a:latin typeface="Calibri"/>
+              </a:rPr>
+              <a:t>  {"type": "image", "x": "${x+28}", "y": "${y+28}", "width": 143, "height": 143, "</a:t>
+            </a:r>
+            <a:r>
+              <a:rPr lang="en-US" dirty="0" err="1">
+                <a:solidFill>
+                  <a:srgbClr val="FFFFFF"/>
+                </a:solidFill>
+                <a:latin typeface="Calibri"/>
+              </a:rPr>
+              <a:t>src</a:t>
+            </a:r>
+            <a:r>
+              <a:rPr lang="en-US" dirty="0">
+                <a:solidFill>
+                  <a:srgbClr val="FFFFFF"/>
+                </a:solidFill>
+                <a:latin typeface="Calibri"/>
+              </a:rPr>
+              <a:t>": "&lt;asset&gt;"}</a:t>
+            </a:r>
+          </a:p>
+          <a:p>
+            <a:r>
+              <a:rPr lang="en-US" dirty="0">
+                <a:solidFill>
+                  <a:srgbClr val="FFFFFF"/>
+                </a:solidFill>
+                <a:latin typeface="Calibri"/>
+              </a:rPr>
+              <a:t>]</a:t>
+            </a:r>
+          </a:p>
+          <a:p>
+            <a:r>
+              <a:rPr lang="en-US" dirty="0">
+                <a:solidFill>
+                  <a:srgbClr val="FFFFFF"/>
+                </a:solidFill>
+                <a:latin typeface="Calibri"/>
+              </a:rPr>
+              <a:t>```</a:t>
             </a:r>
             <a:endParaRPr dirty="0">
               <a:solidFill>
@@ -3101,6 +6848,14 @@
             </a:r>
           </a:p>
           <a:p>
+            <a:endParaRPr lang="en-US" dirty="0">
+              <a:solidFill>
+                <a:srgbClr val="FFFFFF"/>
+              </a:solidFill>
+              <a:latin typeface="Calibri"/>
+            </a:endParaRPr>
+          </a:p>
+          <a:p>
             <a:r>
               <a:rPr lang="en-US" dirty="0">
                 <a:solidFill>
@@ -3204,6 +6959,272 @@
                 <a:latin typeface="Calibri"/>
               </a:rPr>
               <a:t>Content can sit on one side or alternate left and right. Alternating creates visual rhythm but forces the eye to zigzag. One side is easier to scan but more monotonous.</a:t>
+            </a:r>
+          </a:p>
+          <a:p>
+            <a:endParaRPr lang="en-US" dirty="0">
+              <a:solidFill>
+                <a:srgbClr val="FFFFFF"/>
+              </a:solidFill>
+              <a:latin typeface="Calibri"/>
+            </a:endParaRPr>
+          </a:p>
+          <a:p>
+            <a:r>
+              <a:rPr lang="en-US" dirty="0">
+                <a:solidFill>
+                  <a:srgbClr val="FFFFFF"/>
+                </a:solidFill>
+                <a:latin typeface="Calibri"/>
+              </a:rPr>
+              <a:t>```</a:t>
+            </a:r>
+            <a:r>
+              <a:rPr lang="en-US" dirty="0" err="1">
+                <a:solidFill>
+                  <a:srgbClr val="FFFFFF"/>
+                </a:solidFill>
+                <a:latin typeface="Calibri"/>
+              </a:rPr>
+              <a:t>json</a:t>
+            </a:r>
+            <a:endParaRPr lang="en-US" dirty="0">
+              <a:solidFill>
+                <a:srgbClr val="FFFFFF"/>
+              </a:solidFill>
+              <a:latin typeface="Calibri"/>
+            </a:endParaRPr>
+          </a:p>
+          <a:p>
+            <a:r>
+              <a:rPr lang="en-US" dirty="0">
+                <a:solidFill>
+                  <a:srgbClr val="FFFFFF"/>
+                </a:solidFill>
+                <a:latin typeface="Calibri"/>
+              </a:rPr>
+              <a:t>[</a:t>
+            </a:r>
+          </a:p>
+          <a:p>
+            <a:r>
+              <a:rPr lang="en-US" dirty="0">
+                <a:solidFill>
+                  <a:srgbClr val="FFFFFF"/>
+                </a:solidFill>
+                <a:latin typeface="Calibri"/>
+              </a:rPr>
+              <a:t>  {"type": "line", "x": "${x}", "y": "${y}", "width": 0, "height": 600, "</a:t>
+            </a:r>
+            <a:r>
+              <a:rPr lang="en-US" dirty="0" err="1">
+                <a:solidFill>
+                  <a:srgbClr val="FFFFFF"/>
+                </a:solidFill>
+                <a:latin typeface="Calibri"/>
+              </a:rPr>
+              <a:t>lineWidth</a:t>
+            </a:r>
+            <a:r>
+              <a:rPr lang="en-US" dirty="0">
+                <a:solidFill>
+                  <a:srgbClr val="FFFFFF"/>
+                </a:solidFill>
+                <a:latin typeface="Calibri"/>
+              </a:rPr>
+              <a:t>": 2.0, "</a:t>
+            </a:r>
+            <a:r>
+              <a:rPr lang="en-US" dirty="0" err="1">
+                <a:solidFill>
+                  <a:srgbClr val="FFFFFF"/>
+                </a:solidFill>
+                <a:latin typeface="Calibri"/>
+              </a:rPr>
+              <a:t>lineGradient</a:t>
+            </a:r>
+            <a:r>
+              <a:rPr lang="en-US" dirty="0">
+                <a:solidFill>
+                  <a:srgbClr val="FFFFFF"/>
+                </a:solidFill>
+                <a:latin typeface="Calibri"/>
+              </a:rPr>
+              <a:t>": {"stops": [{"position": 0.0, "color": "#41B3FF"}, {"position": 0.5, "color": "#AD5CFF"}, {"position": 1.0, "color": "#FF5C85"}], "angle": 90.0}},</a:t>
+            </a:r>
+          </a:p>
+          <a:p>
+            <a:r>
+              <a:rPr lang="en-US" dirty="0">
+                <a:solidFill>
+                  <a:srgbClr val="FFFFFF"/>
+                </a:solidFill>
+                <a:latin typeface="Calibri"/>
+              </a:rPr>
+              <a:t>  {"type": "shape", "shape": "circle", "x": "${x-10}", "y": "${y+60}", "width": 21, "height": 21, "fill": "#FFFFFF", "line": "#000000", "</a:t>
+            </a:r>
+            <a:r>
+              <a:rPr lang="en-US" dirty="0" err="1">
+                <a:solidFill>
+                  <a:srgbClr val="FFFFFF"/>
+                </a:solidFill>
+                <a:latin typeface="Calibri"/>
+              </a:rPr>
+              <a:t>lineWidth</a:t>
+            </a:r>
+            <a:r>
+              <a:rPr lang="en-US" dirty="0">
+                <a:solidFill>
+                  <a:srgbClr val="FFFFFF"/>
+                </a:solidFill>
+                <a:latin typeface="Calibri"/>
+              </a:rPr>
+              <a:t>": 2.0},</a:t>
+            </a:r>
+          </a:p>
+          <a:p>
+            <a:r>
+              <a:rPr lang="en-US" dirty="0">
+                <a:solidFill>
+                  <a:srgbClr val="FFFFFF"/>
+                </a:solidFill>
+                <a:latin typeface="Calibri"/>
+              </a:rPr>
+              <a:t>  {"type": "textbox", "x": "${x+30}", "y": "${y+36}", "width": 306, "height": 70, "text": "{{</a:t>
+            </a:r>
+            <a:r>
+              <a:rPr lang="en-US" dirty="0" err="1">
+                <a:solidFill>
+                  <a:srgbClr val="FFFFFF"/>
+                </a:solidFill>
+                <a:latin typeface="Calibri"/>
+              </a:rPr>
+              <a:t>bold:item</a:t>
+            </a:r>
+            <a:r>
+              <a:rPr lang="en-US" dirty="0">
+                <a:solidFill>
+                  <a:srgbClr val="FFFFFF"/>
+                </a:solidFill>
+                <a:latin typeface="Calibri"/>
+              </a:rPr>
+              <a:t>}}", "</a:t>
+            </a:r>
+            <a:r>
+              <a:rPr lang="en-US" dirty="0" err="1">
+                <a:solidFill>
+                  <a:srgbClr val="FFFFFF"/>
+                </a:solidFill>
+                <a:latin typeface="Calibri"/>
+              </a:rPr>
+              <a:t>fontSize</a:t>
+            </a:r>
+            <a:r>
+              <a:rPr lang="en-US" dirty="0">
+                <a:solidFill>
+                  <a:srgbClr val="FFFFFF"/>
+                </a:solidFill>
+                <a:latin typeface="Calibri"/>
+              </a:rPr>
+              <a:t>": 16},</a:t>
+            </a:r>
+          </a:p>
+          <a:p>
+            <a:r>
+              <a:rPr lang="en-US" dirty="0">
+                <a:solidFill>
+                  <a:srgbClr val="FFFFFF"/>
+                </a:solidFill>
+                <a:latin typeface="Calibri"/>
+              </a:rPr>
+              <a:t>  {"type": "shape", "shape": "circle", "x": "${x-10}", "y": "${y+156}", "width": 21, "height": 21, "fill": "#F79646", "line": "#000000", "</a:t>
+            </a:r>
+            <a:r>
+              <a:rPr lang="en-US" dirty="0" err="1">
+                <a:solidFill>
+                  <a:srgbClr val="FFFFFF"/>
+                </a:solidFill>
+                <a:latin typeface="Calibri"/>
+              </a:rPr>
+              <a:t>lineWidth</a:t>
+            </a:r>
+            <a:r>
+              <a:rPr lang="en-US" dirty="0">
+                <a:solidFill>
+                  <a:srgbClr val="FFFFFF"/>
+                </a:solidFill>
+                <a:latin typeface="Calibri"/>
+              </a:rPr>
+              <a:t>": 2.0},</a:t>
+            </a:r>
+          </a:p>
+          <a:p>
+            <a:r>
+              <a:rPr lang="en-US" dirty="0">
+                <a:solidFill>
+                  <a:srgbClr val="FFFFFF"/>
+                </a:solidFill>
+                <a:latin typeface="Calibri"/>
+              </a:rPr>
+              <a:t>  {"type": "textbox", "x": "${x-336}", "y": "${y+132}", "width": 306, "height": 70, "text": "{{</a:t>
+            </a:r>
+            <a:r>
+              <a:rPr lang="en-US" dirty="0" err="1">
+                <a:solidFill>
+                  <a:srgbClr val="FFFFFF"/>
+                </a:solidFill>
+                <a:latin typeface="Calibri"/>
+              </a:rPr>
+              <a:t>bold:item</a:t>
+            </a:r>
+            <a:r>
+              <a:rPr lang="en-US" dirty="0">
+                <a:solidFill>
+                  <a:srgbClr val="FFFFFF"/>
+                </a:solidFill>
+                <a:latin typeface="Calibri"/>
+              </a:rPr>
+              <a:t>}}", "</a:t>
+            </a:r>
+            <a:r>
+              <a:rPr lang="en-US" dirty="0" err="1">
+                <a:solidFill>
+                  <a:srgbClr val="FFFFFF"/>
+                </a:solidFill>
+                <a:latin typeface="Calibri"/>
+              </a:rPr>
+              <a:t>fontSize</a:t>
+            </a:r>
+            <a:r>
+              <a:rPr lang="en-US" dirty="0">
+                <a:solidFill>
+                  <a:srgbClr val="FFFFFF"/>
+                </a:solidFill>
+                <a:latin typeface="Calibri"/>
+              </a:rPr>
+              <a:t>": 16, "align": "right"}</a:t>
+            </a:r>
+          </a:p>
+          <a:p>
+            <a:r>
+              <a:rPr lang="en-US" dirty="0">
+                <a:solidFill>
+                  <a:srgbClr val="FFFFFF"/>
+                </a:solidFill>
+                <a:latin typeface="Calibri"/>
+              </a:rPr>
+              <a:t>]</a:t>
+            </a:r>
+          </a:p>
+          <a:p>
+            <a:r>
+              <a:rPr lang="en-US" dirty="0">
+                <a:solidFill>
+                  <a:srgbClr val="FFFFFF"/>
+                </a:solidFill>
+                <a:latin typeface="Calibri"/>
+              </a:rPr>
+              <a:t>```</a:t>
             </a:r>
             <a:endParaRPr dirty="0">
               <a:solidFill>
@@ -3289,6 +7310,14 @@
             </a:r>
           </a:p>
           <a:p>
+            <a:endParaRPr lang="en-US" dirty="0">
+              <a:solidFill>
+                <a:srgbClr val="FFFFFF"/>
+              </a:solidFill>
+              <a:latin typeface="Calibri"/>
+            </a:endParaRPr>
+          </a:p>
+          <a:p>
             <a:r>
               <a:rPr lang="en-US" dirty="0">
                 <a:solidFill>
@@ -3373,6 +7402,207 @@
                 <a:latin typeface="Calibri"/>
               </a:rPr>
               <a:t>Want the line to emerge from nothing — start the gradient at zero opacity for a fade-in.</a:t>
+            </a:r>
+          </a:p>
+          <a:p>
+            <a:endParaRPr lang="en-US" dirty="0">
+              <a:solidFill>
+                <a:srgbClr val="FFFFFF"/>
+              </a:solidFill>
+              <a:latin typeface="Calibri"/>
+            </a:endParaRPr>
+          </a:p>
+          <a:p>
+            <a:r>
+              <a:rPr lang="en-US" dirty="0">
+                <a:solidFill>
+                  <a:srgbClr val="FFFFFF"/>
+                </a:solidFill>
+                <a:latin typeface="Calibri"/>
+              </a:rPr>
+              <a:t>```</a:t>
+            </a:r>
+            <a:r>
+              <a:rPr lang="en-US" dirty="0" err="1">
+                <a:solidFill>
+                  <a:srgbClr val="FFFFFF"/>
+                </a:solidFill>
+                <a:latin typeface="Calibri"/>
+              </a:rPr>
+              <a:t>json</a:t>
+            </a:r>
+            <a:endParaRPr lang="en-US" dirty="0">
+              <a:solidFill>
+                <a:srgbClr val="FFFFFF"/>
+              </a:solidFill>
+              <a:latin typeface="Calibri"/>
+            </a:endParaRPr>
+          </a:p>
+          <a:p>
+            <a:r>
+              <a:rPr lang="en-US" dirty="0">
+                <a:solidFill>
+                  <a:srgbClr val="FFFFFF"/>
+                </a:solidFill>
+                <a:latin typeface="Calibri"/>
+              </a:rPr>
+              <a:t>[</a:t>
+            </a:r>
+          </a:p>
+          <a:p>
+            <a:r>
+              <a:rPr lang="en-US" dirty="0">
+                <a:solidFill>
+                  <a:srgbClr val="FFFFFF"/>
+                </a:solidFill>
+                <a:latin typeface="Calibri"/>
+              </a:rPr>
+              <a:t>  {"type": "line", "width": 1920, "height": 0, "</a:t>
+            </a:r>
+            <a:r>
+              <a:rPr lang="en-US" dirty="0" err="1">
+                <a:solidFill>
+                  <a:srgbClr val="FFFFFF"/>
+                </a:solidFill>
+                <a:latin typeface="Calibri"/>
+              </a:rPr>
+              <a:t>lineWidth</a:t>
+            </a:r>
+            <a:r>
+              <a:rPr lang="en-US" dirty="0">
+                <a:solidFill>
+                  <a:srgbClr val="FFFFFF"/>
+                </a:solidFill>
+                <a:latin typeface="Calibri"/>
+              </a:rPr>
+              <a:t>": 2.0, "</a:t>
+            </a:r>
+            <a:r>
+              <a:rPr lang="en-US" dirty="0" err="1">
+                <a:solidFill>
+                  <a:srgbClr val="FFFFFF"/>
+                </a:solidFill>
+                <a:latin typeface="Calibri"/>
+              </a:rPr>
+              <a:t>lineGradient</a:t>
+            </a:r>
+            <a:r>
+              <a:rPr lang="en-US" dirty="0">
+                <a:solidFill>
+                  <a:srgbClr val="FFFFFF"/>
+                </a:solidFill>
+                <a:latin typeface="Calibri"/>
+              </a:rPr>
+              <a:t>": {"stops": [{"position": 0.0, "color": "#AD5CFF"}, {"position": 0.5, "color": "#41B3FF"}, {"position": 1.0, "color": "#00E500"}], "angle": 0.0}},</a:t>
+            </a:r>
+          </a:p>
+          <a:p>
+            <a:r>
+              <a:rPr lang="en-US" dirty="0">
+                <a:solidFill>
+                  <a:srgbClr val="FFFFFF"/>
+                </a:solidFill>
+                <a:latin typeface="Calibri"/>
+              </a:rPr>
+              <a:t>  {"type": "shape", "shape": "circle", "x": "${x}", "y": "${y}", "width": 86, "height": 86, "line": "#AD5CFF", "</a:t>
+            </a:r>
+            <a:r>
+              <a:rPr lang="en-US" dirty="0" err="1">
+                <a:solidFill>
+                  <a:srgbClr val="FFFFFF"/>
+                </a:solidFill>
+                <a:latin typeface="Calibri"/>
+              </a:rPr>
+              <a:t>lineWidth</a:t>
+            </a:r>
+            <a:r>
+              <a:rPr lang="en-US" dirty="0">
+                <a:solidFill>
+                  <a:srgbClr val="FFFFFF"/>
+                </a:solidFill>
+                <a:latin typeface="Calibri"/>
+              </a:rPr>
+              <a:t>": 2.2},</a:t>
+            </a:r>
+          </a:p>
+          <a:p>
+            <a:r>
+              <a:rPr lang="en-US" dirty="0">
+                <a:solidFill>
+                  <a:srgbClr val="FFFFFF"/>
+                </a:solidFill>
+                <a:latin typeface="Calibri"/>
+              </a:rPr>
+              <a:t>  {"type": "shape", "shape": "circle", "x": "${x+21}", "y": "${y+21}", "width": 43, "height": 43, "fill": "#AD5CFF"},</a:t>
+            </a:r>
+          </a:p>
+          <a:p>
+            <a:r>
+              <a:rPr lang="en-US" dirty="0">
+                <a:solidFill>
+                  <a:srgbClr val="FFFFFF"/>
+                </a:solidFill>
+                <a:latin typeface="Calibri"/>
+              </a:rPr>
+              <a:t>  {"type": "textbox", "x": "${x-50}", "y": "${y+98}", "width": 186, "height": 56, "text": "{{</a:t>
+            </a:r>
+            <a:r>
+              <a:rPr lang="en-US" dirty="0" err="1">
+                <a:solidFill>
+                  <a:srgbClr val="FFFFFF"/>
+                </a:solidFill>
+                <a:latin typeface="Calibri"/>
+              </a:rPr>
+              <a:t>bold:text</a:t>
+            </a:r>
+            <a:r>
+              <a:rPr lang="en-US" dirty="0">
+                <a:solidFill>
+                  <a:srgbClr val="FFFFFF"/>
+                </a:solidFill>
+                <a:latin typeface="Calibri"/>
+              </a:rPr>
+              <a:t>}}", "</a:t>
+            </a:r>
+            <a:r>
+              <a:rPr lang="en-US" dirty="0" err="1">
+                <a:solidFill>
+                  <a:srgbClr val="FFFFFF"/>
+                </a:solidFill>
+                <a:latin typeface="Calibri"/>
+              </a:rPr>
+              <a:t>fontSize</a:t>
+            </a:r>
+            <a:r>
+              <a:rPr lang="en-US" dirty="0">
+                <a:solidFill>
+                  <a:srgbClr val="FFFFFF"/>
+                </a:solidFill>
+                <a:latin typeface="Calibri"/>
+              </a:rPr>
+              <a:t>": 14, "align": "center"}</a:t>
+            </a:r>
+          </a:p>
+          <a:p>
+            <a:r>
+              <a:rPr lang="en-US" dirty="0">
+                <a:solidFill>
+                  <a:srgbClr val="FFFFFF"/>
+                </a:solidFill>
+                <a:latin typeface="Calibri"/>
+              </a:rPr>
+              <a:t>]</a:t>
+            </a:r>
+          </a:p>
+          <a:p>
+            <a:r>
+              <a:rPr lang="en-US" dirty="0">
+                <a:solidFill>
+                  <a:srgbClr val="FFFFFF"/>
+                </a:solidFill>
+                <a:latin typeface="Calibri"/>
+              </a:rPr>
+              <a:t>```</a:t>
             </a:r>
             <a:endParaRPr dirty="0">
               <a:solidFill>
@@ -3534,6 +7764,14 @@
             </a:r>
           </a:p>
           <a:p>
+            <a:endParaRPr lang="en-US" dirty="0">
+              <a:solidFill>
+                <a:srgbClr val="FFFFFF"/>
+              </a:solidFill>
+              <a:latin typeface="Calibri"/>
+            </a:endParaRPr>
+          </a:p>
+          <a:p>
             <a:r>
               <a:rPr lang="en-US" dirty="0">
                 <a:solidFill>
@@ -3598,6 +7836,164 @@
                 </a:solidFill>
                 <a:latin typeface="Calibri"/>
               </a:rPr>
+              <a:t>```</a:t>
+            </a:r>
+            <a:r>
+              <a:rPr lang="en-US" dirty="0" err="1">
+                <a:solidFill>
+                  <a:srgbClr val="FFFFFF"/>
+                </a:solidFill>
+                <a:latin typeface="Calibri"/>
+              </a:rPr>
+              <a:t>json</a:t>
+            </a:r>
+            <a:endParaRPr lang="en-US" dirty="0">
+              <a:solidFill>
+                <a:srgbClr val="FFFFFF"/>
+              </a:solidFill>
+              <a:latin typeface="Calibri"/>
+            </a:endParaRPr>
+          </a:p>
+          <a:p>
+            <a:r>
+              <a:rPr lang="en-US" dirty="0">
+                <a:solidFill>
+                  <a:srgbClr val="FFFFFF"/>
+                </a:solidFill>
+                <a:latin typeface="Calibri"/>
+              </a:rPr>
+              <a:t>{</a:t>
+            </a:r>
+          </a:p>
+          <a:p>
+            <a:r>
+              <a:rPr lang="en-US" dirty="0">
+                <a:solidFill>
+                  <a:srgbClr val="FFFFFF"/>
+                </a:solidFill>
+                <a:latin typeface="Calibri"/>
+              </a:rPr>
+              <a:t>  "id": "base-slide",</a:t>
+            </a:r>
+          </a:p>
+          <a:p>
+            <a:r>
+              <a:rPr lang="en-US" dirty="0">
+                <a:solidFill>
+                  <a:srgbClr val="FFFFFF"/>
+                </a:solidFill>
+                <a:latin typeface="Calibri"/>
+              </a:rPr>
+              <a:t>  "elements": [</a:t>
+            </a:r>
+          </a:p>
+          <a:p>
+            <a:r>
+              <a:rPr lang="en-US" dirty="0">
+                <a:solidFill>
+                  <a:srgbClr val="FFFFFF"/>
+                </a:solidFill>
+                <a:latin typeface="Calibri"/>
+              </a:rPr>
+              <a:t>    {"type": "shape", "shape": "</a:t>
+            </a:r>
+            <a:r>
+              <a:rPr lang="en-US" dirty="0" err="1">
+                <a:solidFill>
+                  <a:srgbClr val="FFFFFF"/>
+                </a:solidFill>
+                <a:latin typeface="Calibri"/>
+              </a:rPr>
+              <a:t>rounded_rectangle</a:t>
+            </a:r>
+            <a:r>
+              <a:rPr lang="en-US" dirty="0">
+                <a:solidFill>
+                  <a:srgbClr val="FFFFFF"/>
+                </a:solidFill>
+                <a:latin typeface="Calibri"/>
+              </a:rPr>
+              <a:t>", "x": "${x}", "y": "${y}", "width": 400, "height": 200, "adjustments": [0.06], "fill": "#FFFFFF", "opacity": 0.08, "line": "#8FA7C4"},</a:t>
+            </a:r>
+          </a:p>
+          <a:p>
+            <a:r>
+              <a:rPr lang="en-US" dirty="0">
+                <a:solidFill>
+                  <a:srgbClr val="FFFFFF"/>
+                </a:solidFill>
+                <a:latin typeface="Calibri"/>
+              </a:rPr>
+              <a:t>    {"type": "shape", "shape": "</a:t>
+            </a:r>
+            <a:r>
+              <a:rPr lang="en-US" dirty="0" err="1">
+                <a:solidFill>
+                  <a:srgbClr val="FFFFFF"/>
+                </a:solidFill>
+                <a:latin typeface="Calibri"/>
+              </a:rPr>
+              <a:t>rounded_rectangle</a:t>
+            </a:r>
+            <a:r>
+              <a:rPr lang="en-US" dirty="0">
+                <a:solidFill>
+                  <a:srgbClr val="FFFFFF"/>
+                </a:solidFill>
+                <a:latin typeface="Calibri"/>
+              </a:rPr>
+              <a:t>", "x": "${x+560}", "y": "${y}", "width": 400, "height": 200, "adjustments": [0.06], "fill": "#FFFFFF", "opacity": 0.08, "line": "#8FA7C4"}</a:t>
+            </a:r>
+          </a:p>
+          <a:p>
+            <a:r>
+              <a:rPr lang="en-US" dirty="0">
+                <a:solidFill>
+                  <a:srgbClr val="FFFFFF"/>
+                </a:solidFill>
+                <a:latin typeface="Calibri"/>
+              </a:rPr>
+              <a:t>  ]</a:t>
+            </a:r>
+          </a:p>
+          <a:p>
+            <a:r>
+              <a:rPr lang="en-US" dirty="0">
+                <a:solidFill>
+                  <a:srgbClr val="FFFFFF"/>
+                </a:solidFill>
+                <a:latin typeface="Calibri"/>
+              </a:rPr>
+              <a:t>}</a:t>
+            </a:r>
+          </a:p>
+          <a:p>
+            <a:r>
+              <a:rPr lang="en-US" dirty="0">
+                <a:solidFill>
+                  <a:srgbClr val="FFFFFF"/>
+                </a:solidFill>
+                <a:latin typeface="Calibri"/>
+              </a:rPr>
+              <a:t>```</a:t>
+            </a:r>
+          </a:p>
+          <a:p>
+            <a:endParaRPr lang="en-US" dirty="0">
+              <a:solidFill>
+                <a:srgbClr val="FFFFFF"/>
+              </a:solidFill>
+              <a:latin typeface="Calibri"/>
+            </a:endParaRPr>
+          </a:p>
+          <a:p>
+            <a:r>
+              <a:rPr lang="en-US" dirty="0">
+                <a:solidFill>
+                  <a:srgbClr val="FFFFFF"/>
+                </a:solidFill>
+                <a:latin typeface="Calibri"/>
+              </a:rPr>
               <a:t>On each derived slide, lay a semi-transparent overlay to dim the base content, then redraw the element you want to highlight on top. The highlighted element pops back into full clarity while everything else recedes.</a:t>
             </a:r>
           </a:p>
@@ -3637,6 +8033,164 @@
                 <a:latin typeface="Calibri"/>
               </a:rPr>
               <a:t>An accent border on the refocused element makes the highlight unmistakable. Higher overlay opacity dims harder — push too far and the context disappears entirely.</a:t>
+            </a:r>
+          </a:p>
+          <a:p>
+            <a:endParaRPr lang="en-US" dirty="0">
+              <a:solidFill>
+                <a:srgbClr val="FFFFFF"/>
+              </a:solidFill>
+              <a:latin typeface="Calibri"/>
+            </a:endParaRPr>
+          </a:p>
+          <a:p>
+            <a:r>
+              <a:rPr lang="en-US" dirty="0">
+                <a:solidFill>
+                  <a:srgbClr val="FFFFFF"/>
+                </a:solidFill>
+                <a:latin typeface="Calibri"/>
+              </a:rPr>
+              <a:t>```</a:t>
+            </a:r>
+            <a:r>
+              <a:rPr lang="en-US" dirty="0" err="1">
+                <a:solidFill>
+                  <a:srgbClr val="FFFFFF"/>
+                </a:solidFill>
+                <a:latin typeface="Calibri"/>
+              </a:rPr>
+              <a:t>json</a:t>
+            </a:r>
+            <a:endParaRPr lang="en-US" dirty="0">
+              <a:solidFill>
+                <a:srgbClr val="FFFFFF"/>
+              </a:solidFill>
+              <a:latin typeface="Calibri"/>
+            </a:endParaRPr>
+          </a:p>
+          <a:p>
+            <a:r>
+              <a:rPr lang="en-US" dirty="0">
+                <a:solidFill>
+                  <a:srgbClr val="FFFFFF"/>
+                </a:solidFill>
+                <a:latin typeface="Calibri"/>
+              </a:rPr>
+              <a:t>{</a:t>
+            </a:r>
+          </a:p>
+          <a:p>
+            <a:r>
+              <a:rPr lang="en-US" dirty="0">
+                <a:solidFill>
+                  <a:srgbClr val="FFFFFF"/>
+                </a:solidFill>
+                <a:latin typeface="Calibri"/>
+              </a:rPr>
+              <a:t>  "override": "base-slide",</a:t>
+            </a:r>
+          </a:p>
+          <a:p>
+            <a:r>
+              <a:rPr lang="en-US" dirty="0">
+                <a:solidFill>
+                  <a:srgbClr val="FFFFFF"/>
+                </a:solidFill>
+                <a:latin typeface="Calibri"/>
+              </a:rPr>
+              <a:t>  "elements": [</a:t>
+            </a:r>
+          </a:p>
+          <a:p>
+            <a:r>
+              <a:rPr lang="en-US" dirty="0">
+                <a:solidFill>
+                  <a:srgbClr val="FFFFFF"/>
+                </a:solidFill>
+                <a:latin typeface="Calibri"/>
+              </a:rPr>
+              <a:t>    {"type": "shape", "shape": "rectangle", "x": "${x-43}", "y": "${y-10}", "width": 1175, "height": 238, "fill": "#000000", "opacity": 0.85},</a:t>
+            </a:r>
+          </a:p>
+          <a:p>
+            <a:r>
+              <a:rPr lang="en-US" dirty="0">
+                <a:solidFill>
+                  <a:srgbClr val="FFFFFF"/>
+                </a:solidFill>
+                <a:latin typeface="Calibri"/>
+              </a:rPr>
+              <a:t>    {"type": "shape", "shape": "</a:t>
+            </a:r>
+            <a:r>
+              <a:rPr lang="en-US" dirty="0" err="1">
+                <a:solidFill>
+                  <a:srgbClr val="FFFFFF"/>
+                </a:solidFill>
+                <a:latin typeface="Calibri"/>
+              </a:rPr>
+              <a:t>rounded_rectangle</a:t>
+            </a:r>
+            <a:r>
+              <a:rPr lang="en-US" dirty="0">
+                <a:solidFill>
+                  <a:srgbClr val="FFFFFF"/>
+                </a:solidFill>
+                <a:latin typeface="Calibri"/>
+              </a:rPr>
+              <a:t>", "x": "${x+560}", "y": "${y}", "width": 400, "height": 200, "adjustments": [0.06], "fill": "#FFFFFF", "opacity": 0.08, "line": "#FF9900", "</a:t>
+            </a:r>
+            <a:r>
+              <a:rPr lang="en-US" dirty="0" err="1">
+                <a:solidFill>
+                  <a:srgbClr val="FFFFFF"/>
+                </a:solidFill>
+                <a:latin typeface="Calibri"/>
+              </a:rPr>
+              <a:t>lineWidth</a:t>
+            </a:r>
+            <a:r>
+              <a:rPr lang="en-US" dirty="0">
+                <a:solidFill>
+                  <a:srgbClr val="FFFFFF"/>
+                </a:solidFill>
+                <a:latin typeface="Calibri"/>
+              </a:rPr>
+              <a:t>": 2.0}</a:t>
+            </a:r>
+          </a:p>
+          <a:p>
+            <a:r>
+              <a:rPr lang="en-US" dirty="0">
+                <a:solidFill>
+                  <a:srgbClr val="FFFFFF"/>
+                </a:solidFill>
+                <a:latin typeface="Calibri"/>
+              </a:rPr>
+              <a:t>  ]</a:t>
+            </a:r>
+          </a:p>
+          <a:p>
+            <a:r>
+              <a:rPr lang="en-US" dirty="0">
+                <a:solidFill>
+                  <a:srgbClr val="FFFFFF"/>
+                </a:solidFill>
+                <a:latin typeface="Calibri"/>
+              </a:rPr>
+              <a:t>}</a:t>
+            </a:r>
+          </a:p>
+          <a:p>
+            <a:r>
+              <a:rPr lang="en-US" dirty="0">
+                <a:solidFill>
+                  <a:srgbClr val="FFFFFF"/>
+                </a:solidFill>
+                <a:latin typeface="Calibri"/>
+              </a:rPr>
+              <a:t>```</a:t>
             </a:r>
             <a:endParaRPr dirty="0">
               <a:solidFill>
@@ -3672,7 +8226,13 @@
   <p:cSld>
     <p:spTree>
       <p:nvGrpSpPr>
-        <p:cNvPr id="1" name=""/>
+        <p:cNvPr id="1" name="">
+          <a:extLst>
+            <a:ext uri="{FF2B5EF4-FFF2-40B4-BE49-F238E27FC236}">
+              <a16:creationId xmlns:a16="http://schemas.microsoft.com/office/drawing/2014/main" id="{5941C89F-F231-203E-4812-1FAD74599384}"/>
+            </a:ext>
+          </a:extLst>
+        </p:cNvPr>
         <p:cNvGrpSpPr/>
         <p:nvPr/>
       </p:nvGrpSpPr>
@@ -3686,7 +8246,13 @@
       </p:grpSpPr>
       <p:sp>
         <p:nvSpPr>
-          <p:cNvPr id="2" name="Slide Image Placeholder 1"/>
+          <p:cNvPr id="2" name="Slide Image Placeholder 1">
+            <a:extLst>
+              <a:ext uri="{FF2B5EF4-FFF2-40B4-BE49-F238E27FC236}">
+                <a16:creationId xmlns:a16="http://schemas.microsoft.com/office/drawing/2014/main" id="{A7FD19C8-A0FB-075D-9B30-4E7B417F14F2}"/>
+              </a:ext>
+            </a:extLst>
+          </p:cNvPr>
           <p:cNvSpPr>
             <a:spLocks noGrp="1" noRot="1" noChangeAspect="1"/>
           </p:cNvSpPr>
@@ -3698,7 +8264,13 @@
       </p:sp>
       <p:sp>
         <p:nvSpPr>
-          <p:cNvPr id="3" name="Notes Placeholder 2"/>
+          <p:cNvPr id="3" name="Notes Placeholder 2">
+            <a:extLst>
+              <a:ext uri="{FF2B5EF4-FFF2-40B4-BE49-F238E27FC236}">
+                <a16:creationId xmlns:a16="http://schemas.microsoft.com/office/drawing/2014/main" id="{DF250918-3553-6D2B-4D2B-66A6503CE0D6}"/>
+              </a:ext>
+            </a:extLst>
+          </p:cNvPr>
           <p:cNvSpPr>
             <a:spLocks noGrp="1"/>
           </p:cNvSpPr>
@@ -3712,8 +8284,16 @@
           <a:lstStyle/>
           <a:p>
             <a:r>
-              <a:t>[Component] table — Native PPTX table for structured data display.</a:t>
-            </a:r>
+              <a:rPr lang="en-US" dirty="0">
+                <a:solidFill>
+                  <a:srgbClr val="FFFFFF"/>
+                </a:solidFill>
+                <a:latin typeface="Calibri"/>
+              </a:rPr>
+              <a:t>[Component] sharp-stop — Cluster gradient stops to create hard color boundaries. Works on fills and lines.</a:t>
+            </a:r>
+          </a:p>
+          <a:p>
             <a:endParaRPr lang="en-US" dirty="0">
               <a:solidFill>
                 <a:srgbClr val="FFFFFF"/>
@@ -3722,6 +8302,17 @@
             </a:endParaRPr>
           </a:p>
           <a:p>
+            <a:r>
+              <a:rPr lang="en-US" dirty="0">
+                <a:solidFill>
+                  <a:srgbClr val="FFFFFF"/>
+                </a:solidFill>
+                <a:latin typeface="Calibri"/>
+              </a:rPr>
+              <a:t>Gradient stops close together create a hard edge — 0.2% gap between two stops reads as a solid boundary.</a:t>
+            </a:r>
+          </a:p>
+          <a:p>
             <a:endParaRPr lang="en-US" dirty="0">
               <a:solidFill>
                 <a:srgbClr val="FFFFFF"/>
@@ -3731,38 +8322,173 @@
           </a:p>
           <a:p>
             <a:r>
-              <a:t>A grid of cells with shared structure — headers, rows, column widths. The table element handles alignment, banding, and merging as a unit.</a:t>
-            </a:r>
-          </a:p>
-          <a:p>
-            <a:endParaRPr/>
-          </a:p>
-          <a:p>
-            <a:r>
-              <a:t>Let's build this.</a:t>
-            </a:r>
-          </a:p>
-          <a:p>
-            <a:endParaRPr/>
-          </a:p>
-          <a:p>
-            <a:r>
-              <a:t>tableStyle sets the visual tone — header color, banding, borders — without touching individual cells. Use style names from analyze-template, or omit to use the template default. Setting explicit cell fill overrides the style for that cell — useful for highlighting specific rows or cells.</a:t>
-            </a:r>
-          </a:p>
-          <a:p>
-            <a:endParaRPr/>
-          </a:p>
-          <a:p>
-            <a:r>
-              <a:t>Cell merging: rowSpan/gridSpan on the anchor cell. Every absorbed cell must have "merged": true as a placeholder — omit it and the table structure corrupts. The anchor cell spans visually, but the grid still expects every position filled.</a:t>
-            </a:r>
+              <a:rPr lang="en-US" dirty="0">
+                <a:solidFill>
+                  <a:srgbClr val="FFFFFF"/>
+                </a:solidFill>
+                <a:latin typeface="Calibri"/>
+              </a:rPr>
+              <a:t>Even split — stops at 0.499/0.501. Two clean zones. Move the split to change the ratio.</a:t>
+            </a:r>
+          </a:p>
+          <a:p>
+            <a:endParaRPr lang="en-US" dirty="0">
+              <a:solidFill>
+                <a:srgbClr val="FFFFFF"/>
+              </a:solidFill>
+              <a:latin typeface="Calibri"/>
+            </a:endParaRPr>
+          </a:p>
+          <a:p>
+            <a:r>
+              <a:rPr lang="en-US" dirty="0">
+                <a:solidFill>
+                  <a:srgbClr val="FFFFFF"/>
+                </a:solidFill>
+                <a:latin typeface="Calibri"/>
+              </a:rPr>
+              <a:t>Label band — one region colored, the rest transparent (opacity 0).</a:t>
+            </a:r>
+          </a:p>
+          <a:p>
+            <a:r>
+              <a:rPr lang="en-US" dirty="0">
+                <a:solidFill>
+                  <a:srgbClr val="FFFFFF"/>
+                </a:solidFill>
+                <a:latin typeface="Calibri"/>
+              </a:rPr>
+              <a:t>A header region inside a single shape, no extra elements.</a:t>
+            </a:r>
+          </a:p>
+          <a:p>
+            <a:endParaRPr lang="en-US" dirty="0">
+              <a:solidFill>
+                <a:srgbClr val="FFFFFF"/>
+              </a:solidFill>
+              <a:latin typeface="Calibri"/>
+            </a:endParaRPr>
+          </a:p>
+          <a:p>
+            <a:r>
+              <a:rPr lang="en-US" dirty="0">
+                <a:solidFill>
+                  <a:srgbClr val="FFFFFF"/>
+                </a:solidFill>
+                <a:latin typeface="Calibri"/>
+              </a:rPr>
+              <a:t>Line color shift — </a:t>
+            </a:r>
+            <a:r>
+              <a:rPr lang="en-US" dirty="0" err="1">
+                <a:solidFill>
+                  <a:srgbClr val="FFFFFF"/>
+                </a:solidFill>
+                <a:latin typeface="Calibri"/>
+              </a:rPr>
+              <a:t>lineGradient</a:t>
+            </a:r>
+            <a:r>
+              <a:rPr lang="en-US" dirty="0">
+                <a:solidFill>
+                  <a:srgbClr val="FFFFFF"/>
+                </a:solidFill>
+                <a:latin typeface="Calibri"/>
+              </a:rPr>
+              <a:t> on a connector changes color mid-way.</a:t>
+            </a:r>
+          </a:p>
+          <a:p>
+            <a:endParaRPr lang="en-US" dirty="0">
+              <a:solidFill>
+                <a:srgbClr val="FFFFFF"/>
+              </a:solidFill>
+              <a:latin typeface="Calibri"/>
+            </a:endParaRPr>
+          </a:p>
+          <a:p>
+            <a:r>
+              <a:rPr lang="en-US" dirty="0">
+                <a:solidFill>
+                  <a:srgbClr val="FFFFFF"/>
+                </a:solidFill>
+                <a:latin typeface="Calibri"/>
+              </a:rPr>
+              <a:t>Multi-stripe — more stop pairs, more bands. Same principle, repeated.</a:t>
+            </a:r>
+          </a:p>
+          <a:p>
+            <a:endParaRPr lang="en-US" dirty="0">
+              <a:solidFill>
+                <a:srgbClr val="FFFFFF"/>
+              </a:solidFill>
+              <a:latin typeface="Calibri"/>
+            </a:endParaRPr>
+          </a:p>
+          <a:p>
+            <a:r>
+              <a:rPr lang="en-US" dirty="0">
+                <a:solidFill>
+                  <a:srgbClr val="FFFFFF"/>
+                </a:solidFill>
+                <a:latin typeface="Calibri"/>
+              </a:rPr>
+              <a:t>Grid divides the shape interior — row or column ratios give both stop positions and element coordinates from the same source. </a:t>
+            </a:r>
+            <a:r>
+              <a:rPr lang="en-US" dirty="0" err="1">
+                <a:solidFill>
+                  <a:srgbClr val="FFFFFF"/>
+                </a:solidFill>
+                <a:latin typeface="Calibri"/>
+              </a:rPr>
+              <a:t>cell.h</a:t>
+            </a:r>
+            <a:r>
+              <a:rPr lang="en-US" dirty="0">
+                <a:solidFill>
+                  <a:srgbClr val="FFFFFF"/>
+                </a:solidFill>
+                <a:latin typeface="Calibri"/>
+              </a:rPr>
+              <a:t> / </a:t>
+            </a:r>
+            <a:r>
+              <a:rPr lang="en-US" dirty="0" err="1">
+                <a:solidFill>
+                  <a:srgbClr val="FFFFFF"/>
+                </a:solidFill>
+                <a:latin typeface="Calibri"/>
+              </a:rPr>
+              <a:t>area.h</a:t>
+            </a:r>
+            <a:r>
+              <a:rPr lang="en-US" dirty="0">
+                <a:solidFill>
+                  <a:srgbClr val="FFFFFF"/>
+                </a:solidFill>
+                <a:latin typeface="Calibri"/>
+              </a:rPr>
+              <a:t> = stop boundary. No manual calculation, no drift.</a:t>
+            </a:r>
+            <a:endParaRPr dirty="0">
+              <a:solidFill>
+                <a:srgbClr val="FFFFFF"/>
+              </a:solidFill>
+              <a:latin typeface="Calibri"/>
+            </a:endParaRPr>
           </a:p>
         </p:txBody>
       </p:sp>
       <p:sp>
         <p:nvSpPr>
-          <p:cNvPr id="4" name="Slide Number Placeholder 3"/>
+          <p:cNvPr id="4" name="Slide Number Placeholder 3">
+            <a:extLst>
+              <a:ext uri="{FF2B5EF4-FFF2-40B4-BE49-F238E27FC236}">
+                <a16:creationId xmlns:a16="http://schemas.microsoft.com/office/drawing/2014/main" id="{AD424344-AAC8-FD64-26A4-3F09837CCB72}"/>
+              </a:ext>
+            </a:extLst>
+          </p:cNvPr>
           <p:cNvSpPr>
             <a:spLocks noGrp="1"/>
           </p:cNvSpPr>
@@ -3773,6 +8499,11 @@
         <p:spPr/>
       </p:sp>
     </p:spTree>
+    <p:extLst>
+      <p:ext uri="{BB962C8B-B14F-4D97-AF65-F5344CB8AC3E}">
+        <p14:creationId xmlns:p14="http://schemas.microsoft.com/office/powerpoint/2010/main" val="3387739745"/>
+      </p:ext>
+    </p:extLst>
   </p:cSld>
   <p:clrMapOvr>
     <a:masterClrMapping/>
@@ -3840,6 +8571,14 @@
             </a:r>
           </a:p>
           <a:p>
+            <a:endParaRPr lang="en-US" dirty="0">
+              <a:solidFill>
+                <a:srgbClr val="FFFFFF"/>
+              </a:solidFill>
+              <a:latin typeface="Calibri"/>
+            </a:endParaRPr>
+          </a:p>
+          <a:p>
             <a:r>
               <a:rPr lang="en-US" dirty="0">
                 <a:solidFill>
@@ -3934,6 +8673,243 @@
                 </a:solidFill>
                 <a:latin typeface="Calibri"/>
               </a:rPr>
+              <a:t>```</a:t>
+            </a:r>
+            <a:r>
+              <a:rPr lang="en-US" dirty="0" err="1">
+                <a:solidFill>
+                  <a:srgbClr val="FFFFFF"/>
+                </a:solidFill>
+                <a:latin typeface="Calibri"/>
+              </a:rPr>
+              <a:t>json</a:t>
+            </a:r>
+            <a:endParaRPr lang="en-US" dirty="0">
+              <a:solidFill>
+                <a:srgbClr val="FFFFFF"/>
+              </a:solidFill>
+              <a:latin typeface="Calibri"/>
+            </a:endParaRPr>
+          </a:p>
+          <a:p>
+            <a:r>
+              <a:rPr lang="en-US" dirty="0">
+                <a:solidFill>
+                  <a:srgbClr val="FFFFFF"/>
+                </a:solidFill>
+                <a:latin typeface="Calibri"/>
+              </a:rPr>
+              <a:t>[</a:t>
+            </a:r>
+          </a:p>
+          <a:p>
+            <a:r>
+              <a:rPr lang="en-US" dirty="0">
+                <a:solidFill>
+                  <a:srgbClr val="FFFFFF"/>
+                </a:solidFill>
+                <a:latin typeface="Calibri"/>
+              </a:rPr>
+              <a:t>  {"type": "shape", "shape": "</a:t>
+            </a:r>
+            <a:r>
+              <a:rPr lang="en-US" dirty="0" err="1">
+                <a:solidFill>
+                  <a:srgbClr val="FFFFFF"/>
+                </a:solidFill>
+                <a:latin typeface="Calibri"/>
+              </a:rPr>
+              <a:t>rounded_rectangle</a:t>
+            </a:r>
+            <a:r>
+              <a:rPr lang="en-US" dirty="0">
+                <a:solidFill>
+                  <a:srgbClr val="FFFFFF"/>
+                </a:solidFill>
+                <a:latin typeface="Calibri"/>
+              </a:rPr>
+              <a:t>", "x": "${x}", "y": "${y}", "width": 500, "height": 620, "adjustments": [0.05], "fill": "#FFFFFF", "opacity": 0.08, "shadow": {"type": "outer", "blur": 8, "distance": 4, "direction": 135, "color": "#000000", "opacity": 0.35}},</a:t>
+            </a:r>
+          </a:p>
+          <a:p>
+            <a:r>
+              <a:rPr lang="en-US" dirty="0">
+                <a:solidFill>
+                  <a:srgbClr val="FFFFFF"/>
+                </a:solidFill>
+                <a:latin typeface="Calibri"/>
+              </a:rPr>
+              <a:t>  {"type": "image", "x": "${x+178}", "y": "${y+93}", "width": 145, "height": 145, "</a:t>
+            </a:r>
+            <a:r>
+              <a:rPr lang="en-US" dirty="0" err="1">
+                <a:solidFill>
+                  <a:srgbClr val="FFFFFF"/>
+                </a:solidFill>
+                <a:latin typeface="Calibri"/>
+              </a:rPr>
+              <a:t>src</a:t>
+            </a:r>
+            <a:r>
+              <a:rPr lang="en-US" dirty="0">
+                <a:solidFill>
+                  <a:srgbClr val="FFFFFF"/>
+                </a:solidFill>
+                <a:latin typeface="Calibri"/>
+              </a:rPr>
+              <a:t>": "&lt;asset&gt;"},</a:t>
+            </a:r>
+          </a:p>
+          <a:p>
+            <a:r>
+              <a:rPr lang="en-US" dirty="0">
+                <a:solidFill>
+                  <a:srgbClr val="FFFFFF"/>
+                </a:solidFill>
+                <a:latin typeface="Calibri"/>
+              </a:rPr>
+              <a:t>  {"type": "textbox", "x": "${x+60}", "y": "${y+265}", "width": 380, "height": 70, "text": "{{</a:t>
+            </a:r>
+            <a:r>
+              <a:rPr lang="en-US" dirty="0" err="1">
+                <a:solidFill>
+                  <a:srgbClr val="FFFFFF"/>
+                </a:solidFill>
+                <a:latin typeface="Calibri"/>
+              </a:rPr>
+              <a:t>bold:Title</a:t>
+            </a:r>
+            <a:r>
+              <a:rPr lang="en-US" dirty="0">
+                <a:solidFill>
+                  <a:srgbClr val="FFFFFF"/>
+                </a:solidFill>
+                <a:latin typeface="Calibri"/>
+              </a:rPr>
+              <a:t>}}", "</a:t>
+            </a:r>
+            <a:r>
+              <a:rPr lang="en-US" dirty="0" err="1">
+                <a:solidFill>
+                  <a:srgbClr val="FFFFFF"/>
+                </a:solidFill>
+                <a:latin typeface="Calibri"/>
+              </a:rPr>
+              <a:t>fontSize</a:t>
+            </a:r>
+            <a:r>
+              <a:rPr lang="en-US" dirty="0">
+                <a:solidFill>
+                  <a:srgbClr val="FFFFFF"/>
+                </a:solidFill>
+                <a:latin typeface="Calibri"/>
+              </a:rPr>
+              <a:t>": 22, "align": "center", "</a:t>
+            </a:r>
+            <a:r>
+              <a:rPr lang="en-US" dirty="0" err="1">
+                <a:solidFill>
+                  <a:srgbClr val="FFFFFF"/>
+                </a:solidFill>
+                <a:latin typeface="Calibri"/>
+              </a:rPr>
+              <a:t>marginTop</a:t>
+            </a:r>
+            <a:r>
+              <a:rPr lang="en-US" dirty="0">
+                <a:solidFill>
+                  <a:srgbClr val="FFFFFF"/>
+                </a:solidFill>
+                <a:latin typeface="Calibri"/>
+              </a:rPr>
+              <a:t>": 0},</a:t>
+            </a:r>
+          </a:p>
+          <a:p>
+            <a:r>
+              <a:rPr lang="en-US" dirty="0">
+                <a:solidFill>
+                  <a:srgbClr val="FFFFFF"/>
+                </a:solidFill>
+                <a:latin typeface="Calibri"/>
+              </a:rPr>
+              <a:t>  {"type": "textbox", "x": "${x+60}", "y": "${y+345}", "width": 380, "height": 100, "text": "{{#8FA7C4:Description}}", "</a:t>
+            </a:r>
+            <a:r>
+              <a:rPr lang="en-US" dirty="0" err="1">
+                <a:solidFill>
+                  <a:srgbClr val="FFFFFF"/>
+                </a:solidFill>
+                <a:latin typeface="Calibri"/>
+              </a:rPr>
+              <a:t>fontSize</a:t>
+            </a:r>
+            <a:r>
+              <a:rPr lang="en-US" dirty="0">
+                <a:solidFill>
+                  <a:srgbClr val="FFFFFF"/>
+                </a:solidFill>
+                <a:latin typeface="Calibri"/>
+              </a:rPr>
+              <a:t>": 14, "align": "center", "</a:t>
+            </a:r>
+            <a:r>
+              <a:rPr lang="en-US" dirty="0" err="1">
+                <a:solidFill>
+                  <a:srgbClr val="FFFFFF"/>
+                </a:solidFill>
+                <a:latin typeface="Calibri"/>
+              </a:rPr>
+              <a:t>marginTop</a:t>
+            </a:r>
+            <a:r>
+              <a:rPr lang="en-US" dirty="0">
+                <a:solidFill>
+                  <a:srgbClr val="FFFFFF"/>
+                </a:solidFill>
+                <a:latin typeface="Calibri"/>
+              </a:rPr>
+              <a:t>": 0}</a:t>
+            </a:r>
+          </a:p>
+          <a:p>
+            <a:r>
+              <a:rPr lang="en-US" dirty="0">
+                <a:solidFill>
+                  <a:srgbClr val="FFFFFF"/>
+                </a:solidFill>
+                <a:latin typeface="Calibri"/>
+              </a:rPr>
+              <a:t>]</a:t>
+            </a:r>
+          </a:p>
+          <a:p>
+            <a:r>
+              <a:rPr lang="en-US" dirty="0">
+                <a:solidFill>
+                  <a:srgbClr val="FFFFFF"/>
+                </a:solidFill>
+                <a:latin typeface="Calibri"/>
+              </a:rPr>
+              <a:t>```</a:t>
+            </a:r>
+          </a:p>
+          <a:p>
+            <a:endParaRPr lang="en-US" dirty="0">
+              <a:solidFill>
+                <a:srgbClr val="FFFFFF"/>
+              </a:solidFill>
+              <a:latin typeface="Calibri"/>
+            </a:endParaRPr>
+          </a:p>
+          <a:p>
+            <a:r>
+              <a:rPr lang="en-US" dirty="0">
+                <a:solidFill>
+                  <a:srgbClr val="FFFFFF"/>
+                </a:solidFill>
+                <a:latin typeface="Calibri"/>
+              </a:rPr>
               <a:t>Color on fill is the fastest category signal. These cards are the same category, so no color. Colors multiply fast — too many and the eye</a:t>
             </a:r>
           </a:p>
@@ -3994,6 +8970,84 @@
                 </a:solidFill>
                 <a:latin typeface="Calibri"/>
               </a:rPr>
+              <a:t>```</a:t>
+            </a:r>
+            <a:r>
+              <a:rPr lang="en-US" dirty="0" err="1">
+                <a:solidFill>
+                  <a:srgbClr val="FFFFFF"/>
+                </a:solidFill>
+                <a:latin typeface="Calibri"/>
+              </a:rPr>
+              <a:t>json</a:t>
+            </a:r>
+            <a:endParaRPr lang="en-US" dirty="0">
+              <a:solidFill>
+                <a:srgbClr val="FFFFFF"/>
+              </a:solidFill>
+              <a:latin typeface="Calibri"/>
+            </a:endParaRPr>
+          </a:p>
+          <a:p>
+            <a:r>
+              <a:rPr lang="en-US" dirty="0">
+                <a:solidFill>
+                  <a:srgbClr val="FFFFFF"/>
+                </a:solidFill>
+                <a:latin typeface="Calibri"/>
+              </a:rPr>
+              <a:t>[</a:t>
+            </a:r>
+          </a:p>
+          <a:p>
+            <a:r>
+              <a:rPr lang="en-US" dirty="0">
+                <a:solidFill>
+                  <a:srgbClr val="FFFFFF"/>
+                </a:solidFill>
+                <a:latin typeface="Calibri"/>
+              </a:rPr>
+              <a:t>  {..., "gradient": {"stops": [{"position": 0.0, "color": "#FF9900"}, {"position": 1.0, "color": "#FBD332"}], "angle": 0.0}}</a:t>
+            </a:r>
+          </a:p>
+          <a:p>
+            <a:r>
+              <a:rPr lang="en-US" dirty="0">
+                <a:solidFill>
+                  <a:srgbClr val="FFFFFF"/>
+                </a:solidFill>
+                <a:latin typeface="Calibri"/>
+              </a:rPr>
+              <a:t>]</a:t>
+            </a:r>
+          </a:p>
+          <a:p>
+            <a:r>
+              <a:rPr lang="en-US" dirty="0">
+                <a:solidFill>
+                  <a:srgbClr val="FFFFFF"/>
+                </a:solidFill>
+                <a:latin typeface="Calibri"/>
+              </a:rPr>
+              <a:t>```</a:t>
+            </a:r>
+          </a:p>
+          <a:p>
+            <a:endParaRPr lang="en-US" dirty="0">
+              <a:solidFill>
+                <a:srgbClr val="FFFFFF"/>
+              </a:solidFill>
+              <a:latin typeface="Calibri"/>
+            </a:endParaRPr>
+          </a:p>
+          <a:p>
+            <a:r>
+              <a:rPr lang="en-US" dirty="0">
+                <a:solidFill>
+                  <a:srgbClr val="FFFFFF"/>
+                </a:solidFill>
+                <a:latin typeface="Calibri"/>
+              </a:rPr>
               <a:t>Raising opacity makes the card more prominent. Too high and the card competes with its own content. Extending fill to full slide width</a:t>
             </a:r>
           </a:p>
@@ -4007,12 +9061,6 @@
               </a:rPr>
               <a:t>turns a card into a background band — page-level zone separation.</a:t>
             </a:r>
-            <a:endParaRPr dirty="0">
-              <a:solidFill>
-                <a:srgbClr val="FFFFFF"/>
-              </a:solidFill>
-              <a:latin typeface="Calibri"/>
-            </a:endParaRPr>
           </a:p>
         </p:txBody>
       </p:sp>
@@ -4193,6 +9241,14 @@
             </a:r>
           </a:p>
           <a:p>
+            <a:endParaRPr lang="en-US" dirty="0">
+              <a:solidFill>
+                <a:srgbClr val="FFFFFF"/>
+              </a:solidFill>
+              <a:latin typeface="Calibri"/>
+            </a:endParaRPr>
+          </a:p>
+          <a:p>
             <a:r>
               <a:rPr lang="en-US" dirty="0">
                 <a:solidFill>
@@ -4257,7 +9313,235 @@
                 </a:solidFill>
                 <a:latin typeface="Calibri"/>
               </a:rPr>
+              <a:t>```</a:t>
+            </a:r>
+            <a:r>
+              <a:rPr lang="en-US" dirty="0" err="1">
+                <a:solidFill>
+                  <a:srgbClr val="FFFFFF"/>
+                </a:solidFill>
+                <a:latin typeface="Calibri"/>
+              </a:rPr>
+              <a:t>json</a:t>
+            </a:r>
+            <a:endParaRPr lang="en-US" dirty="0">
+              <a:solidFill>
+                <a:srgbClr val="FFFFFF"/>
+              </a:solidFill>
+              <a:latin typeface="Calibri"/>
+            </a:endParaRPr>
+          </a:p>
+          <a:p>
+            <a:r>
+              <a:rPr lang="en-US" dirty="0">
+                <a:solidFill>
+                  <a:srgbClr val="FFFFFF"/>
+                </a:solidFill>
+                <a:latin typeface="Calibri"/>
+              </a:rPr>
+              <a:t>[</a:t>
+            </a:r>
+          </a:p>
+          <a:p>
+            <a:r>
+              <a:rPr lang="en-US" dirty="0">
+                <a:solidFill>
+                  <a:srgbClr val="FFFFFF"/>
+                </a:solidFill>
+                <a:latin typeface="Calibri"/>
+              </a:rPr>
+              <a:t>  {"type": "image", "width": 800, "height": 500, "</a:t>
+            </a:r>
+            <a:r>
+              <a:rPr lang="en-US" dirty="0" err="1">
+                <a:solidFill>
+                  <a:srgbClr val="FFFFFF"/>
+                </a:solidFill>
+                <a:latin typeface="Calibri"/>
+              </a:rPr>
+              <a:t>src</a:t>
+            </a:r>
+            <a:r>
+              <a:rPr lang="en-US" dirty="0">
+                <a:solidFill>
+                  <a:srgbClr val="FFFFFF"/>
+                </a:solidFill>
+                <a:latin typeface="Calibri"/>
+              </a:rPr>
+              <a:t>": "&lt;asset&gt;", "mask": "</a:t>
+            </a:r>
+            <a:r>
+              <a:rPr lang="en-US" dirty="0" err="1">
+                <a:solidFill>
+                  <a:srgbClr val="FFFFFF"/>
+                </a:solidFill>
+                <a:latin typeface="Calibri"/>
+              </a:rPr>
+              <a:t>rounded_rectangle</a:t>
+            </a:r>
+            <a:r>
+              <a:rPr lang="en-US" dirty="0">
+                <a:solidFill>
+                  <a:srgbClr val="FFFFFF"/>
+                </a:solidFill>
+                <a:latin typeface="Calibri"/>
+              </a:rPr>
+              <a:t>", "shadow": {"type": "outer", "blur": 16, "distance": 8, "direction": 135, "color": "#000000", "opacity": 0.45}}</a:t>
+            </a:r>
+          </a:p>
+          <a:p>
+            <a:r>
+              <a:rPr lang="en-US" dirty="0">
+                <a:solidFill>
+                  <a:srgbClr val="FFFFFF"/>
+                </a:solidFill>
+                <a:latin typeface="Calibri"/>
+              </a:rPr>
+              <a:t>]</a:t>
+            </a:r>
+          </a:p>
+          <a:p>
+            <a:r>
+              <a:rPr lang="en-US" dirty="0">
+                <a:solidFill>
+                  <a:srgbClr val="FFFFFF"/>
+                </a:solidFill>
+                <a:latin typeface="Calibri"/>
+              </a:rPr>
+              <a:t>```</a:t>
+            </a:r>
+          </a:p>
+          <a:p>
+            <a:endParaRPr lang="en-US" dirty="0">
+              <a:solidFill>
+                <a:srgbClr val="FFFFFF"/>
+              </a:solidFill>
+              <a:latin typeface="Calibri"/>
+            </a:endParaRPr>
+          </a:p>
+          <a:p>
+            <a:r>
+              <a:rPr lang="en-US" dirty="0">
+                <a:solidFill>
+                  <a:srgbClr val="FFFFFF"/>
+                </a:solidFill>
+                <a:latin typeface="Calibri"/>
+              </a:rPr>
               <a:t>An image that should set mood without competing with text — soften the edges to dissolve it into the background. Need text to stay readable over the image — lower brightness and desaturate so the image recedes. Want brand consistency — duotone maps the image to two brand colors.</a:t>
+            </a:r>
+          </a:p>
+          <a:p>
+            <a:endParaRPr lang="en-US" dirty="0">
+              <a:solidFill>
+                <a:srgbClr val="FFFFFF"/>
+              </a:solidFill>
+              <a:latin typeface="Calibri"/>
+            </a:endParaRPr>
+          </a:p>
+          <a:p>
+            <a:r>
+              <a:rPr lang="en-US" dirty="0">
+                <a:solidFill>
+                  <a:srgbClr val="FFFFFF"/>
+                </a:solidFill>
+                <a:latin typeface="Calibri"/>
+              </a:rPr>
+              <a:t>```</a:t>
+            </a:r>
+            <a:r>
+              <a:rPr lang="en-US" dirty="0" err="1">
+                <a:solidFill>
+                  <a:srgbClr val="FFFFFF"/>
+                </a:solidFill>
+                <a:latin typeface="Calibri"/>
+              </a:rPr>
+              <a:t>json</a:t>
+            </a:r>
+            <a:endParaRPr lang="en-US" dirty="0">
+              <a:solidFill>
+                <a:srgbClr val="FFFFFF"/>
+              </a:solidFill>
+              <a:latin typeface="Calibri"/>
+            </a:endParaRPr>
+          </a:p>
+          <a:p>
+            <a:r>
+              <a:rPr lang="en-US" dirty="0">
+                <a:solidFill>
+                  <a:srgbClr val="FFFFFF"/>
+                </a:solidFill>
+                <a:latin typeface="Calibri"/>
+              </a:rPr>
+              <a:t>[</a:t>
+            </a:r>
+          </a:p>
+          <a:p>
+            <a:r>
+              <a:rPr lang="en-US" dirty="0">
+                <a:solidFill>
+                  <a:srgbClr val="FFFFFF"/>
+                </a:solidFill>
+                <a:latin typeface="Calibri"/>
+              </a:rPr>
+              <a:t>  {"type": "image", "width": 800, "height": 500, "</a:t>
+            </a:r>
+            <a:r>
+              <a:rPr lang="en-US" dirty="0" err="1">
+                <a:solidFill>
+                  <a:srgbClr val="FFFFFF"/>
+                </a:solidFill>
+                <a:latin typeface="Calibri"/>
+              </a:rPr>
+              <a:t>src</a:t>
+            </a:r>
+            <a:r>
+              <a:rPr lang="en-US" dirty="0">
+                <a:solidFill>
+                  <a:srgbClr val="FFFFFF"/>
+                </a:solidFill>
+                <a:latin typeface="Calibri"/>
+              </a:rPr>
+              <a:t>": "&lt;asset&gt;", "</a:t>
+            </a:r>
+            <a:r>
+              <a:rPr lang="en-US" dirty="0" err="1">
+                <a:solidFill>
+                  <a:srgbClr val="FFFFFF"/>
+                </a:solidFill>
+                <a:latin typeface="Calibri"/>
+              </a:rPr>
+              <a:t>softEdge</a:t>
+            </a:r>
+            <a:r>
+              <a:rPr lang="en-US" dirty="0">
+                <a:solidFill>
+                  <a:srgbClr val="FFFFFF"/>
+                </a:solidFill>
+                <a:latin typeface="Calibri"/>
+              </a:rPr>
+              <a:t>": 30, "brightness": -10, "saturation": -50}</a:t>
+            </a:r>
+          </a:p>
+          <a:p>
+            <a:r>
+              <a:rPr lang="en-US" dirty="0">
+                <a:solidFill>
+                  <a:srgbClr val="FFFFFF"/>
+                </a:solidFill>
+                <a:latin typeface="Calibri"/>
+              </a:rPr>
+              <a:t>]</a:t>
+            </a:r>
+          </a:p>
+          <a:p>
+            <a:r>
+              <a:rPr lang="en-US" dirty="0">
+                <a:solidFill>
+                  <a:srgbClr val="FFFFFF"/>
+                </a:solidFill>
+                <a:latin typeface="Calibri"/>
+              </a:rPr>
+              <a:t>```</a:t>
             </a:r>
             <a:endParaRPr dirty="0">
               <a:solidFill>
@@ -4348,6 +9632,14 @@
             </a:r>
           </a:p>
           <a:p>
+            <a:endParaRPr lang="en-US" dirty="0">
+              <a:solidFill>
+                <a:srgbClr val="FFFFFF"/>
+              </a:solidFill>
+              <a:latin typeface="Calibri"/>
+            </a:endParaRPr>
+          </a:p>
+          <a:p>
             <a:r>
               <a:rPr lang="en-US" dirty="0">
                 <a:solidFill>
@@ -4423,6 +9715,232 @@
                 </a:solidFill>
                 <a:latin typeface="Calibri"/>
               </a:rPr>
+              <a:t>```</a:t>
+            </a:r>
+            <a:r>
+              <a:rPr lang="en-US" dirty="0" err="1">
+                <a:solidFill>
+                  <a:srgbClr val="FFFFFF"/>
+                </a:solidFill>
+                <a:latin typeface="Calibri"/>
+              </a:rPr>
+              <a:t>json</a:t>
+            </a:r>
+            <a:endParaRPr lang="en-US" dirty="0">
+              <a:solidFill>
+                <a:srgbClr val="FFFFFF"/>
+              </a:solidFill>
+              <a:latin typeface="Calibri"/>
+            </a:endParaRPr>
+          </a:p>
+          <a:p>
+            <a:r>
+              <a:rPr lang="en-US" dirty="0">
+                <a:solidFill>
+                  <a:srgbClr val="FFFFFF"/>
+                </a:solidFill>
+                <a:latin typeface="Calibri"/>
+              </a:rPr>
+              <a:t>[</a:t>
+            </a:r>
+          </a:p>
+          <a:p>
+            <a:r>
+              <a:rPr lang="en-US" dirty="0">
+                <a:solidFill>
+                  <a:srgbClr val="FFFFFF"/>
+                </a:solidFill>
+                <a:latin typeface="Calibri"/>
+              </a:rPr>
+              <a:t>  {"type": "shape", "shape": "</a:t>
+            </a:r>
+            <a:r>
+              <a:rPr lang="en-US" dirty="0" err="1">
+                <a:solidFill>
+                  <a:srgbClr val="FFFFFF"/>
+                </a:solidFill>
+                <a:latin typeface="Calibri"/>
+              </a:rPr>
+              <a:t>rounded_rectangle</a:t>
+            </a:r>
+            <a:r>
+              <a:rPr lang="en-US" dirty="0">
+                <a:solidFill>
+                  <a:srgbClr val="FFFFFF"/>
+                </a:solidFill>
+                <a:latin typeface="Calibri"/>
+              </a:rPr>
+              <a:t>", "x": "${x}", "y": "${y}", "width": 500, "height": 620, "adjustments": [0.05], "line": "#8FA7C4", "</a:t>
+            </a:r>
+            <a:r>
+              <a:rPr lang="en-US" dirty="0" err="1">
+                <a:solidFill>
+                  <a:srgbClr val="FFFFFF"/>
+                </a:solidFill>
+                <a:latin typeface="Calibri"/>
+              </a:rPr>
+              <a:t>lineWidth</a:t>
+            </a:r>
+            <a:r>
+              <a:rPr lang="en-US" dirty="0">
+                <a:solidFill>
+                  <a:srgbClr val="FFFFFF"/>
+                </a:solidFill>
+                <a:latin typeface="Calibri"/>
+              </a:rPr>
+              <a:t>": 1.5},</a:t>
+            </a:r>
+          </a:p>
+          <a:p>
+            <a:r>
+              <a:rPr lang="en-US" dirty="0">
+                <a:solidFill>
+                  <a:srgbClr val="FFFFFF"/>
+                </a:solidFill>
+                <a:latin typeface="Calibri"/>
+              </a:rPr>
+              <a:t>  {"type": "textbox", "x": "${x+44}", "y": "${y+80}", "width": 410, "height": 70, "text": "{{</a:t>
+            </a:r>
+            <a:r>
+              <a:rPr lang="en-US" dirty="0" err="1">
+                <a:solidFill>
+                  <a:srgbClr val="FFFFFF"/>
+                </a:solidFill>
+                <a:latin typeface="Calibri"/>
+              </a:rPr>
+              <a:t>bold:Title</a:t>
+            </a:r>
+            <a:r>
+              <a:rPr lang="en-US" dirty="0">
+                <a:solidFill>
+                  <a:srgbClr val="FFFFFF"/>
+                </a:solidFill>
+                <a:latin typeface="Calibri"/>
+              </a:rPr>
+              <a:t>}}", "</a:t>
+            </a:r>
+            <a:r>
+              <a:rPr lang="en-US" dirty="0" err="1">
+                <a:solidFill>
+                  <a:srgbClr val="FFFFFF"/>
+                </a:solidFill>
+                <a:latin typeface="Calibri"/>
+              </a:rPr>
+              <a:t>fontSize</a:t>
+            </a:r>
+            <a:r>
+              <a:rPr lang="en-US" dirty="0">
+                <a:solidFill>
+                  <a:srgbClr val="FFFFFF"/>
+                </a:solidFill>
+                <a:latin typeface="Calibri"/>
+              </a:rPr>
+              <a:t>": 28, "</a:t>
+            </a:r>
+            <a:r>
+              <a:rPr lang="en-US" dirty="0" err="1">
+                <a:solidFill>
+                  <a:srgbClr val="FFFFFF"/>
+                </a:solidFill>
+                <a:latin typeface="Calibri"/>
+              </a:rPr>
+              <a:t>marginTop</a:t>
+            </a:r>
+            <a:r>
+              <a:rPr lang="en-US" dirty="0">
+                <a:solidFill>
+                  <a:srgbClr val="FFFFFF"/>
+                </a:solidFill>
+                <a:latin typeface="Calibri"/>
+              </a:rPr>
+              <a:t>": 0},</a:t>
+            </a:r>
+          </a:p>
+          <a:p>
+            <a:r>
+              <a:rPr lang="en-US" dirty="0">
+                <a:solidFill>
+                  <a:srgbClr val="FFFFFF"/>
+                </a:solidFill>
+                <a:latin typeface="Calibri"/>
+              </a:rPr>
+              <a:t>  {"type": "textbox", "x": "${x+44}", "y": "${y+170}", "width": 410, "height": 200, "text": "{{#8FA7C4:• point}}", "</a:t>
+            </a:r>
+            <a:r>
+              <a:rPr lang="en-US" dirty="0" err="1">
+                <a:solidFill>
+                  <a:srgbClr val="FFFFFF"/>
+                </a:solidFill>
+                <a:latin typeface="Calibri"/>
+              </a:rPr>
+              <a:t>fontSize</a:t>
+            </a:r>
+            <a:r>
+              <a:rPr lang="en-US" dirty="0">
+                <a:solidFill>
+                  <a:srgbClr val="FFFFFF"/>
+                </a:solidFill>
+                <a:latin typeface="Calibri"/>
+              </a:rPr>
+              <a:t>": 16, "</a:t>
+            </a:r>
+            <a:r>
+              <a:rPr lang="en-US" dirty="0" err="1">
+                <a:solidFill>
+                  <a:srgbClr val="FFFFFF"/>
+                </a:solidFill>
+                <a:latin typeface="Calibri"/>
+              </a:rPr>
+              <a:t>marginTop</a:t>
+            </a:r>
+            <a:r>
+              <a:rPr lang="en-US" dirty="0">
+                <a:solidFill>
+                  <a:srgbClr val="FFFFFF"/>
+                </a:solidFill>
+                <a:latin typeface="Calibri"/>
+              </a:rPr>
+              <a:t>": 0}</a:t>
+            </a:r>
+          </a:p>
+          <a:p>
+            <a:r>
+              <a:rPr lang="en-US" dirty="0">
+                <a:solidFill>
+                  <a:srgbClr val="FFFFFF"/>
+                </a:solidFill>
+                <a:latin typeface="Calibri"/>
+              </a:rPr>
+              <a:t>]</a:t>
+            </a:r>
+          </a:p>
+          <a:p>
+            <a:r>
+              <a:rPr lang="en-US" dirty="0">
+                <a:solidFill>
+                  <a:srgbClr val="FFFFFF"/>
+                </a:solidFill>
+                <a:latin typeface="Calibri"/>
+              </a:rPr>
+              <a:t>```</a:t>
+            </a:r>
+          </a:p>
+          <a:p>
+            <a:endParaRPr lang="en-US" dirty="0">
+              <a:solidFill>
+                <a:srgbClr val="FFFFFF"/>
+              </a:solidFill>
+              <a:latin typeface="Calibri"/>
+            </a:endParaRPr>
+          </a:p>
+          <a:p>
+            <a:r>
+              <a:rPr lang="en-US" dirty="0">
+                <a:solidFill>
+                  <a:srgbClr val="FFFFFF"/>
+                </a:solidFill>
+                <a:latin typeface="Calibri"/>
+              </a:rPr>
               <a:t>Dash breaks the line and breaks the certainty — the eye reads gaps as "not final." Useful for drafts, placeholders, optional paths. On</a:t>
             </a:r>
           </a:p>
@@ -4453,6 +9971,120 @@
                 </a:solidFill>
                 <a:latin typeface="Calibri"/>
               </a:rPr>
+              <a:t>```</a:t>
+            </a:r>
+            <a:r>
+              <a:rPr lang="en-US" dirty="0" err="1">
+                <a:solidFill>
+                  <a:srgbClr val="FFFFFF"/>
+                </a:solidFill>
+                <a:latin typeface="Calibri"/>
+              </a:rPr>
+              <a:t>json</a:t>
+            </a:r>
+            <a:endParaRPr lang="en-US" dirty="0">
+              <a:solidFill>
+                <a:srgbClr val="FFFFFF"/>
+              </a:solidFill>
+              <a:latin typeface="Calibri"/>
+            </a:endParaRPr>
+          </a:p>
+          <a:p>
+            <a:r>
+              <a:rPr lang="en-US" dirty="0">
+                <a:solidFill>
+                  <a:srgbClr val="FFFFFF"/>
+                </a:solidFill>
+                <a:latin typeface="Calibri"/>
+              </a:rPr>
+              <a:t>[</a:t>
+            </a:r>
+          </a:p>
+          <a:p>
+            <a:r>
+              <a:rPr lang="en-US" dirty="0">
+                <a:solidFill>
+                  <a:srgbClr val="FFFFFF"/>
+                </a:solidFill>
+                <a:latin typeface="Calibri"/>
+              </a:rPr>
+              <a:t>  {"type": "shape", "shape": "rectangle", "line": "#8FA7C4", "</a:t>
+            </a:r>
+            <a:r>
+              <a:rPr lang="en-US" dirty="0" err="1">
+                <a:solidFill>
+                  <a:srgbClr val="FFFFFF"/>
+                </a:solidFill>
+                <a:latin typeface="Calibri"/>
+              </a:rPr>
+              <a:t>lineWidth</a:t>
+            </a:r>
+            <a:r>
+              <a:rPr lang="en-US" dirty="0">
+                <a:solidFill>
+                  <a:srgbClr val="FFFFFF"/>
+                </a:solidFill>
+                <a:latin typeface="Calibri"/>
+              </a:rPr>
+              <a:t>": 1.5, "</a:t>
+            </a:r>
+            <a:r>
+              <a:rPr lang="en-US" dirty="0" err="1">
+                <a:solidFill>
+                  <a:srgbClr val="FFFFFF"/>
+                </a:solidFill>
+                <a:latin typeface="Calibri"/>
+              </a:rPr>
+              <a:t>dashStyle</a:t>
+            </a:r>
+            <a:r>
+              <a:rPr lang="en-US" dirty="0">
+                <a:solidFill>
+                  <a:srgbClr val="FFFFFF"/>
+                </a:solidFill>
+                <a:latin typeface="Calibri"/>
+              </a:rPr>
+              <a:t>": "dash", ...}</a:t>
+            </a:r>
+          </a:p>
+          <a:p>
+            <a:r>
+              <a:rPr lang="en-US" dirty="0">
+                <a:solidFill>
+                  <a:srgbClr val="FFFFFF"/>
+                </a:solidFill>
+                <a:latin typeface="Calibri"/>
+              </a:rPr>
+              <a:t>]</a:t>
+            </a:r>
+          </a:p>
+          <a:p>
+            <a:r>
+              <a:rPr lang="en-US" dirty="0">
+                <a:solidFill>
+                  <a:srgbClr val="FFFFFF"/>
+                </a:solidFill>
+                <a:latin typeface="Calibri"/>
+              </a:rPr>
+              <a:t>```</a:t>
+            </a:r>
+          </a:p>
+          <a:p>
+            <a:endParaRPr lang="en-US" dirty="0">
+              <a:solidFill>
+                <a:srgbClr val="FFFFFF"/>
+              </a:solidFill>
+              <a:latin typeface="Calibri"/>
+            </a:endParaRPr>
+          </a:p>
+          <a:p>
+            <a:r>
+              <a:rPr lang="en-US" dirty="0">
+                <a:solidFill>
+                  <a:srgbClr val="FFFFFF"/>
+                </a:solidFill>
+                <a:latin typeface="Calibri"/>
+              </a:rPr>
               <a:t>Gradient border — color shift adds movement along the edge without changing the structural role.</a:t>
             </a:r>
           </a:p>
@@ -4472,6 +10104,120 @@
                 </a:solidFill>
                 <a:latin typeface="Calibri"/>
               </a:rPr>
+              <a:t>```</a:t>
+            </a:r>
+            <a:r>
+              <a:rPr lang="en-US" dirty="0" err="1">
+                <a:solidFill>
+                  <a:srgbClr val="FFFFFF"/>
+                </a:solidFill>
+                <a:latin typeface="Calibri"/>
+              </a:rPr>
+              <a:t>json</a:t>
+            </a:r>
+            <a:endParaRPr lang="en-US" dirty="0">
+              <a:solidFill>
+                <a:srgbClr val="FFFFFF"/>
+              </a:solidFill>
+              <a:latin typeface="Calibri"/>
+            </a:endParaRPr>
+          </a:p>
+          <a:p>
+            <a:r>
+              <a:rPr lang="en-US" dirty="0">
+                <a:solidFill>
+                  <a:srgbClr val="FFFFFF"/>
+                </a:solidFill>
+                <a:latin typeface="Calibri"/>
+              </a:rPr>
+              <a:t>[</a:t>
+            </a:r>
+          </a:p>
+          <a:p>
+            <a:r>
+              <a:rPr lang="en-US" dirty="0">
+                <a:solidFill>
+                  <a:srgbClr val="FFFFFF"/>
+                </a:solidFill>
+                <a:latin typeface="Calibri"/>
+              </a:rPr>
+              <a:t>  {..., "adjustments": [0.05], "</a:t>
+            </a:r>
+            <a:r>
+              <a:rPr lang="en-US" dirty="0" err="1">
+                <a:solidFill>
+                  <a:srgbClr val="FFFFFF"/>
+                </a:solidFill>
+                <a:latin typeface="Calibri"/>
+              </a:rPr>
+              <a:t>lineWidth</a:t>
+            </a:r>
+            <a:r>
+              <a:rPr lang="en-US" dirty="0">
+                <a:solidFill>
+                  <a:srgbClr val="FFFFFF"/>
+                </a:solidFill>
+                <a:latin typeface="Calibri"/>
+              </a:rPr>
+              <a:t>": 1.5, "</a:t>
+            </a:r>
+            <a:r>
+              <a:rPr lang="en-US" dirty="0" err="1">
+                <a:solidFill>
+                  <a:srgbClr val="FFFFFF"/>
+                </a:solidFill>
+                <a:latin typeface="Calibri"/>
+              </a:rPr>
+              <a:t>lineGradient</a:t>
+            </a:r>
+            <a:r>
+              <a:rPr lang="en-US" dirty="0">
+                <a:solidFill>
+                  <a:srgbClr val="FFFFFF"/>
+                </a:solidFill>
+                <a:latin typeface="Calibri"/>
+              </a:rPr>
+              <a:t>": {"stops": [{"position": 0.0, "color": "#FF9900"}, {"position": 1.0, "color": "#FBD332"}], "angle": 0.0}}</a:t>
+            </a:r>
+          </a:p>
+          <a:p>
+            <a:r>
+              <a:rPr lang="en-US" dirty="0">
+                <a:solidFill>
+                  <a:srgbClr val="FFFFFF"/>
+                </a:solidFill>
+                <a:latin typeface="Calibri"/>
+              </a:rPr>
+              <a:t>]</a:t>
+            </a:r>
+          </a:p>
+          <a:p>
+            <a:r>
+              <a:rPr lang="en-US" dirty="0">
+                <a:solidFill>
+                  <a:srgbClr val="FFFFFF"/>
+                </a:solidFill>
+                <a:latin typeface="Calibri"/>
+              </a:rPr>
+              <a:t>```</a:t>
+            </a:r>
+          </a:p>
+          <a:p>
+            <a:endParaRPr lang="en-US" dirty="0">
+              <a:solidFill>
+                <a:srgbClr val="FFFFFF"/>
+              </a:solidFill>
+              <a:latin typeface="Calibri"/>
+            </a:endParaRPr>
+          </a:p>
+          <a:p>
+            <a:r>
+              <a:rPr lang="en-US" dirty="0">
+                <a:solidFill>
+                  <a:srgbClr val="FFFFFF"/>
+                </a:solidFill>
+                <a:latin typeface="Calibri"/>
+              </a:rPr>
               <a:t>Border has a strength spectrum. Alone it's light. Add fill inside and it strengthens. Add shadow on top and it becomes the strongest</a:t>
             </a:r>
           </a:p>
@@ -4496,6 +10242,14 @@
               </a:rPr>
               <a:t>border, title, and keywords unifies a category.</a:t>
             </a:r>
+          </a:p>
+          <a:p>
+            <a:endParaRPr lang="en-US" dirty="0">
+              <a:solidFill>
+                <a:srgbClr val="FFFFFF"/>
+              </a:solidFill>
+              <a:latin typeface="Calibri"/>
+            </a:endParaRPr>
           </a:p>
         </p:txBody>
       </p:sp>
@@ -4579,6 +10333,14 @@
             </a:r>
           </a:p>
           <a:p>
+            <a:endParaRPr lang="en-US" dirty="0">
+              <a:solidFill>
+                <a:srgbClr val="FFFFFF"/>
+              </a:solidFill>
+              <a:latin typeface="Calibri"/>
+            </a:endParaRPr>
+          </a:p>
+          <a:p>
             <a:r>
               <a:rPr lang="en-US" dirty="0">
                 <a:solidFill>
@@ -4654,7 +10416,471 @@
                 </a:solidFill>
                 <a:latin typeface="Calibri"/>
               </a:rPr>
-              <a:t>Where the line sits changes the signal. Left accent says "start reading here." Top accent says "section header" or "category marker."</a:t>
+              <a:t>Where the line sits changes the signal. Left accent says "start reading here."</a:t>
+            </a:r>
+          </a:p>
+          <a:p>
+            <a:endParaRPr lang="en-US" dirty="0">
+              <a:solidFill>
+                <a:srgbClr val="FFFFFF"/>
+              </a:solidFill>
+              <a:latin typeface="Calibri"/>
+            </a:endParaRPr>
+          </a:p>
+          <a:p>
+            <a:r>
+              <a:rPr lang="en-US" dirty="0">
+                <a:solidFill>
+                  <a:srgbClr val="FFFFFF"/>
+                </a:solidFill>
+                <a:latin typeface="Calibri"/>
+              </a:rPr>
+              <a:t>```</a:t>
+            </a:r>
+            <a:r>
+              <a:rPr lang="en-US" dirty="0" err="1">
+                <a:solidFill>
+                  <a:srgbClr val="FFFFFF"/>
+                </a:solidFill>
+                <a:latin typeface="Calibri"/>
+              </a:rPr>
+              <a:t>json</a:t>
+            </a:r>
+            <a:endParaRPr lang="en-US" dirty="0">
+              <a:solidFill>
+                <a:srgbClr val="FFFFFF"/>
+              </a:solidFill>
+              <a:latin typeface="Calibri"/>
+            </a:endParaRPr>
+          </a:p>
+          <a:p>
+            <a:r>
+              <a:rPr lang="en-US" dirty="0">
+                <a:solidFill>
+                  <a:srgbClr val="FFFFFF"/>
+                </a:solidFill>
+                <a:latin typeface="Calibri"/>
+              </a:rPr>
+              <a:t>[</a:t>
+            </a:r>
+          </a:p>
+          <a:p>
+            <a:r>
+              <a:rPr lang="en-US" dirty="0">
+                <a:solidFill>
+                  <a:srgbClr val="FFFFFF"/>
+                </a:solidFill>
+                <a:latin typeface="Calibri"/>
+              </a:rPr>
+              <a:t>  {"type": "line", "x": "${x}", "y": "${y}", "width": 0, "height": 400, "</a:t>
+            </a:r>
+            <a:r>
+              <a:rPr lang="en-US" dirty="0" err="1">
+                <a:solidFill>
+                  <a:srgbClr val="FFFFFF"/>
+                </a:solidFill>
+                <a:latin typeface="Calibri"/>
+              </a:rPr>
+              <a:t>lineWidth</a:t>
+            </a:r>
+            <a:r>
+              <a:rPr lang="en-US" dirty="0">
+                <a:solidFill>
+                  <a:srgbClr val="FFFFFF"/>
+                </a:solidFill>
+                <a:latin typeface="Calibri"/>
+              </a:rPr>
+              <a:t>": 3.0, "color": "#FF9900"},</a:t>
+            </a:r>
+          </a:p>
+          <a:p>
+            <a:r>
+              <a:rPr lang="en-US" dirty="0">
+                <a:solidFill>
+                  <a:srgbClr val="FFFFFF"/>
+                </a:solidFill>
+                <a:latin typeface="Calibri"/>
+              </a:rPr>
+              <a:t>  {"type": "textbox", "x": "${x+30}", "y": "${y+90}", "width": 500, "height": 70, "text": "{{</a:t>
+            </a:r>
+            <a:r>
+              <a:rPr lang="en-US" dirty="0" err="1">
+                <a:solidFill>
+                  <a:srgbClr val="FFFFFF"/>
+                </a:solidFill>
+                <a:latin typeface="Calibri"/>
+              </a:rPr>
+              <a:t>bold:Title</a:t>
+            </a:r>
+            <a:r>
+              <a:rPr lang="en-US" dirty="0">
+                <a:solidFill>
+                  <a:srgbClr val="FFFFFF"/>
+                </a:solidFill>
+                <a:latin typeface="Calibri"/>
+              </a:rPr>
+              <a:t>}}", "</a:t>
+            </a:r>
+            <a:r>
+              <a:rPr lang="en-US" dirty="0" err="1">
+                <a:solidFill>
+                  <a:srgbClr val="FFFFFF"/>
+                </a:solidFill>
+                <a:latin typeface="Calibri"/>
+              </a:rPr>
+              <a:t>fontSize</a:t>
+            </a:r>
+            <a:r>
+              <a:rPr lang="en-US" dirty="0">
+                <a:solidFill>
+                  <a:srgbClr val="FFFFFF"/>
+                </a:solidFill>
+                <a:latin typeface="Calibri"/>
+              </a:rPr>
+              <a:t>": 22, "</a:t>
+            </a:r>
+            <a:r>
+              <a:rPr lang="en-US" dirty="0" err="1">
+                <a:solidFill>
+                  <a:srgbClr val="FFFFFF"/>
+                </a:solidFill>
+                <a:latin typeface="Calibri"/>
+              </a:rPr>
+              <a:t>marginTop</a:t>
+            </a:r>
+            <a:r>
+              <a:rPr lang="en-US" dirty="0">
+                <a:solidFill>
+                  <a:srgbClr val="FFFFFF"/>
+                </a:solidFill>
+                <a:latin typeface="Calibri"/>
+              </a:rPr>
+              <a:t>": 0},</a:t>
+            </a:r>
+          </a:p>
+          <a:p>
+            <a:r>
+              <a:rPr lang="en-US" dirty="0">
+                <a:solidFill>
+                  <a:srgbClr val="FFFFFF"/>
+                </a:solidFill>
+                <a:latin typeface="Calibri"/>
+              </a:rPr>
+              <a:t>  {"type": "textbox", "x": "${x+30}", "y": "${y+170}", "width": 500, "height": 120, "text": "{{#8FA7C4:Description}}", "</a:t>
+            </a:r>
+            <a:r>
+              <a:rPr lang="en-US" dirty="0" err="1">
+                <a:solidFill>
+                  <a:srgbClr val="FFFFFF"/>
+                </a:solidFill>
+                <a:latin typeface="Calibri"/>
+              </a:rPr>
+              <a:t>fontSize</a:t>
+            </a:r>
+            <a:r>
+              <a:rPr lang="en-US" dirty="0">
+                <a:solidFill>
+                  <a:srgbClr val="FFFFFF"/>
+                </a:solidFill>
+                <a:latin typeface="Calibri"/>
+              </a:rPr>
+              <a:t>": 14, "</a:t>
+            </a:r>
+            <a:r>
+              <a:rPr lang="en-US" dirty="0" err="1">
+                <a:solidFill>
+                  <a:srgbClr val="FFFFFF"/>
+                </a:solidFill>
+                <a:latin typeface="Calibri"/>
+              </a:rPr>
+              <a:t>marginTop</a:t>
+            </a:r>
+            <a:r>
+              <a:rPr lang="en-US" dirty="0">
+                <a:solidFill>
+                  <a:srgbClr val="FFFFFF"/>
+                </a:solidFill>
+                <a:latin typeface="Calibri"/>
+              </a:rPr>
+              <a:t>": 0}</a:t>
+            </a:r>
+          </a:p>
+          <a:p>
+            <a:r>
+              <a:rPr lang="en-US" dirty="0">
+                <a:solidFill>
+                  <a:srgbClr val="FFFFFF"/>
+                </a:solidFill>
+                <a:latin typeface="Calibri"/>
+              </a:rPr>
+              <a:t>]</a:t>
+            </a:r>
+          </a:p>
+          <a:p>
+            <a:r>
+              <a:rPr lang="en-US" dirty="0">
+                <a:solidFill>
+                  <a:srgbClr val="FFFFFF"/>
+                </a:solidFill>
+                <a:latin typeface="Calibri"/>
+              </a:rPr>
+              <a:t>```</a:t>
+            </a:r>
+          </a:p>
+          <a:p>
+            <a:endParaRPr lang="en-US" dirty="0">
+              <a:solidFill>
+                <a:srgbClr val="FFFFFF"/>
+              </a:solidFill>
+              <a:latin typeface="Calibri"/>
+            </a:endParaRPr>
+          </a:p>
+          <a:p>
+            <a:r>
+              <a:rPr lang="en-US" dirty="0">
+                <a:solidFill>
+                  <a:srgbClr val="FFFFFF"/>
+                </a:solidFill>
+                <a:latin typeface="Calibri"/>
+              </a:rPr>
+              <a:t>Top accent says "section header" or "category marker."</a:t>
+            </a:r>
+          </a:p>
+          <a:p>
+            <a:endParaRPr lang="en-US" dirty="0">
+              <a:solidFill>
+                <a:srgbClr val="FFFFFF"/>
+              </a:solidFill>
+              <a:latin typeface="Calibri"/>
+            </a:endParaRPr>
+          </a:p>
+          <a:p>
+            <a:r>
+              <a:rPr lang="en-US" dirty="0">
+                <a:solidFill>
+                  <a:srgbClr val="FFFFFF"/>
+                </a:solidFill>
+                <a:latin typeface="Calibri"/>
+              </a:rPr>
+              <a:t>```</a:t>
+            </a:r>
+            <a:r>
+              <a:rPr lang="en-US" dirty="0" err="1">
+                <a:solidFill>
+                  <a:srgbClr val="FFFFFF"/>
+                </a:solidFill>
+                <a:latin typeface="Calibri"/>
+              </a:rPr>
+              <a:t>json</a:t>
+            </a:r>
+            <a:endParaRPr lang="en-US" dirty="0">
+              <a:solidFill>
+                <a:srgbClr val="FFFFFF"/>
+              </a:solidFill>
+              <a:latin typeface="Calibri"/>
+            </a:endParaRPr>
+          </a:p>
+          <a:p>
+            <a:r>
+              <a:rPr lang="en-US" dirty="0">
+                <a:solidFill>
+                  <a:srgbClr val="FFFFFF"/>
+                </a:solidFill>
+                <a:latin typeface="Calibri"/>
+              </a:rPr>
+              <a:t>[</a:t>
+            </a:r>
+          </a:p>
+          <a:p>
+            <a:r>
+              <a:rPr lang="en-US" dirty="0">
+                <a:solidFill>
+                  <a:srgbClr val="FFFFFF"/>
+                </a:solidFill>
+                <a:latin typeface="Calibri"/>
+              </a:rPr>
+              <a:t>  {"type": "line", "x": "${x}", "y": "${y}", "width": 800, "height": 0, "</a:t>
+            </a:r>
+            <a:r>
+              <a:rPr lang="en-US" dirty="0" err="1">
+                <a:solidFill>
+                  <a:srgbClr val="FFFFFF"/>
+                </a:solidFill>
+                <a:latin typeface="Calibri"/>
+              </a:rPr>
+              <a:t>lineWidth</a:t>
+            </a:r>
+            <a:r>
+              <a:rPr lang="en-US" dirty="0">
+                <a:solidFill>
+                  <a:srgbClr val="FFFFFF"/>
+                </a:solidFill>
+                <a:latin typeface="Calibri"/>
+              </a:rPr>
+              <a:t>": 3.0, "color": "#FF9900"},</a:t>
+            </a:r>
+          </a:p>
+          <a:p>
+            <a:r>
+              <a:rPr lang="en-US" dirty="0">
+                <a:solidFill>
+                  <a:srgbClr val="FFFFFF"/>
+                </a:solidFill>
+                <a:latin typeface="Calibri"/>
+              </a:rPr>
+              <a:t>  {"type": "image", "x": "${x+38}", "y": "${y+40}", "width": 60, "height": 60, "</a:t>
+            </a:r>
+            <a:r>
+              <a:rPr lang="en-US" dirty="0" err="1">
+                <a:solidFill>
+                  <a:srgbClr val="FFFFFF"/>
+                </a:solidFill>
+                <a:latin typeface="Calibri"/>
+              </a:rPr>
+              <a:t>src</a:t>
+            </a:r>
+            <a:r>
+              <a:rPr lang="en-US" dirty="0">
+                <a:solidFill>
+                  <a:srgbClr val="FFFFFF"/>
+                </a:solidFill>
+                <a:latin typeface="Calibri"/>
+              </a:rPr>
+              <a:t>": "&lt;asset&gt;"},</a:t>
+            </a:r>
+          </a:p>
+          <a:p>
+            <a:r>
+              <a:rPr lang="en-US" dirty="0">
+                <a:solidFill>
+                  <a:srgbClr val="FFFFFF"/>
+                </a:solidFill>
+                <a:latin typeface="Calibri"/>
+              </a:rPr>
+              <a:t>  {"type": "textbox", "x": "${x+130}", "y": "${y+35}", "width": 620, "height": 70, "text": "{{</a:t>
+            </a:r>
+            <a:r>
+              <a:rPr lang="en-US" dirty="0" err="1">
+                <a:solidFill>
+                  <a:srgbClr val="FFFFFF"/>
+                </a:solidFill>
+                <a:latin typeface="Calibri"/>
+              </a:rPr>
+              <a:t>bold:Title</a:t>
+            </a:r>
+            <a:r>
+              <a:rPr lang="en-US" dirty="0">
+                <a:solidFill>
+                  <a:srgbClr val="FFFFFF"/>
+                </a:solidFill>
+                <a:latin typeface="Calibri"/>
+              </a:rPr>
+              <a:t>}}", "</a:t>
+            </a:r>
+            <a:r>
+              <a:rPr lang="en-US" dirty="0" err="1">
+                <a:solidFill>
+                  <a:srgbClr val="FFFFFF"/>
+                </a:solidFill>
+                <a:latin typeface="Calibri"/>
+              </a:rPr>
+              <a:t>fontSize</a:t>
+            </a:r>
+            <a:r>
+              <a:rPr lang="en-US" dirty="0">
+                <a:solidFill>
+                  <a:srgbClr val="FFFFFF"/>
+                </a:solidFill>
+                <a:latin typeface="Calibri"/>
+              </a:rPr>
+              <a:t>": 20, "</a:t>
+            </a:r>
+            <a:r>
+              <a:rPr lang="en-US" dirty="0" err="1">
+                <a:solidFill>
+                  <a:srgbClr val="FFFFFF"/>
+                </a:solidFill>
+                <a:latin typeface="Calibri"/>
+              </a:rPr>
+              <a:t>marginTop</a:t>
+            </a:r>
+            <a:r>
+              <a:rPr lang="en-US" dirty="0">
+                <a:solidFill>
+                  <a:srgbClr val="FFFFFF"/>
+                </a:solidFill>
+                <a:latin typeface="Calibri"/>
+              </a:rPr>
+              <a:t>": 0},</a:t>
+            </a:r>
+          </a:p>
+          <a:p>
+            <a:r>
+              <a:rPr lang="en-US" dirty="0">
+                <a:solidFill>
+                  <a:srgbClr val="FFFFFF"/>
+                </a:solidFill>
+                <a:latin typeface="Calibri"/>
+              </a:rPr>
+              <a:t>  {"type": "textbox", "x": "${x+130}", "y": "${y+100}", "width": 620, "height": 50, "text": "{{#8FA7C4:Description}}", "</a:t>
+            </a:r>
+            <a:r>
+              <a:rPr lang="en-US" dirty="0" err="1">
+                <a:solidFill>
+                  <a:srgbClr val="FFFFFF"/>
+                </a:solidFill>
+                <a:latin typeface="Calibri"/>
+              </a:rPr>
+              <a:t>fontSize</a:t>
+            </a:r>
+            <a:r>
+              <a:rPr lang="en-US" dirty="0">
+                <a:solidFill>
+                  <a:srgbClr val="FFFFFF"/>
+                </a:solidFill>
+                <a:latin typeface="Calibri"/>
+              </a:rPr>
+              <a:t>": 14, "</a:t>
+            </a:r>
+            <a:r>
+              <a:rPr lang="en-US" dirty="0" err="1">
+                <a:solidFill>
+                  <a:srgbClr val="FFFFFF"/>
+                </a:solidFill>
+                <a:latin typeface="Calibri"/>
+              </a:rPr>
+              <a:t>marginTop</a:t>
+            </a:r>
+            <a:r>
+              <a:rPr lang="en-US" dirty="0">
+                <a:solidFill>
+                  <a:srgbClr val="FFFFFF"/>
+                </a:solidFill>
+                <a:latin typeface="Calibri"/>
+              </a:rPr>
+              <a:t>": 0}</a:t>
+            </a:r>
+          </a:p>
+          <a:p>
+            <a:r>
+              <a:rPr lang="en-US" dirty="0">
+                <a:solidFill>
+                  <a:srgbClr val="FFFFFF"/>
+                </a:solidFill>
+                <a:latin typeface="Calibri"/>
+              </a:rPr>
+              <a:t>]</a:t>
+            </a:r>
+          </a:p>
+          <a:p>
+            <a:r>
+              <a:rPr lang="en-US" dirty="0">
+                <a:solidFill>
+                  <a:srgbClr val="FFFFFF"/>
+                </a:solidFill>
+                <a:latin typeface="Calibri"/>
+              </a:rPr>
+              <a:t>```</a:t>
             </a:r>
           </a:p>
           <a:p>
@@ -4811,6 +11037,14 @@
             </a:r>
           </a:p>
           <a:p>
+            <a:endParaRPr lang="en-US" dirty="0">
+              <a:solidFill>
+                <a:srgbClr val="FFFFFF"/>
+              </a:solidFill>
+              <a:latin typeface="Calibri"/>
+            </a:endParaRPr>
+          </a:p>
+          <a:p>
             <a:r>
               <a:rPr lang="en-US" dirty="0">
                 <a:solidFill>
@@ -4868,6 +11102,277 @@
                 <a:latin typeface="Calibri"/>
               </a:rPr>
               <a:t>gives a sharper edge. When even bracket feels too heavy, a simple vertical line does the grouping with minimal weight.</a:t>
+            </a:r>
+          </a:p>
+          <a:p>
+            <a:endParaRPr lang="en-US" dirty="0">
+              <a:solidFill>
+                <a:srgbClr val="FFFFFF"/>
+              </a:solidFill>
+              <a:latin typeface="Calibri"/>
+            </a:endParaRPr>
+          </a:p>
+          <a:p>
+            <a:r>
+              <a:rPr lang="en-US" dirty="0">
+                <a:solidFill>
+                  <a:srgbClr val="FFFFFF"/>
+                </a:solidFill>
+                <a:latin typeface="Calibri"/>
+              </a:rPr>
+              <a:t>```</a:t>
+            </a:r>
+            <a:r>
+              <a:rPr lang="en-US" dirty="0" err="1">
+                <a:solidFill>
+                  <a:srgbClr val="FFFFFF"/>
+                </a:solidFill>
+                <a:latin typeface="Calibri"/>
+              </a:rPr>
+              <a:t>json</a:t>
+            </a:r>
+            <a:endParaRPr lang="en-US" dirty="0">
+              <a:solidFill>
+                <a:srgbClr val="FFFFFF"/>
+              </a:solidFill>
+              <a:latin typeface="Calibri"/>
+            </a:endParaRPr>
+          </a:p>
+          <a:p>
+            <a:r>
+              <a:rPr lang="en-US" dirty="0">
+                <a:solidFill>
+                  <a:srgbClr val="FFFFFF"/>
+                </a:solidFill>
+                <a:latin typeface="Calibri"/>
+              </a:rPr>
+              <a:t>[</a:t>
+            </a:r>
+          </a:p>
+          <a:p>
+            <a:r>
+              <a:rPr lang="en-US" dirty="0">
+                <a:solidFill>
+                  <a:srgbClr val="FFFFFF"/>
+                </a:solidFill>
+                <a:latin typeface="Calibri"/>
+              </a:rPr>
+              <a:t>  {"type": "shape", "shape": "</a:t>
+            </a:r>
+            <a:r>
+              <a:rPr lang="en-US" dirty="0" err="1">
+                <a:solidFill>
+                  <a:srgbClr val="FFFFFF"/>
+                </a:solidFill>
+                <a:latin typeface="Calibri"/>
+              </a:rPr>
+              <a:t>rounded_rectangle</a:t>
+            </a:r>
+            <a:r>
+              <a:rPr lang="en-US" dirty="0">
+                <a:solidFill>
+                  <a:srgbClr val="FFFFFF"/>
+                </a:solidFill>
+                <a:latin typeface="Calibri"/>
+              </a:rPr>
+              <a:t>", "x": "${x}", "y": "${y}", "width": 500, "height": 80, "adjustments": [0.3], "fill": "#FFFFFF", "opacity": 0.08},</a:t>
+            </a:r>
+          </a:p>
+          <a:p>
+            <a:r>
+              <a:rPr lang="en-US" dirty="0">
+                <a:solidFill>
+                  <a:srgbClr val="FFFFFF"/>
+                </a:solidFill>
+                <a:latin typeface="Calibri"/>
+              </a:rPr>
+              <a:t>  {"type": "textbox", "x": "${x+20}", "y": "${y+10}", "width": 460, "height": 56, "text": "Item A", "</a:t>
+            </a:r>
+            <a:r>
+              <a:rPr lang="en-US" dirty="0" err="1">
+                <a:solidFill>
+                  <a:srgbClr val="FFFFFF"/>
+                </a:solidFill>
+                <a:latin typeface="Calibri"/>
+              </a:rPr>
+              <a:t>fontSize</a:t>
+            </a:r>
+            <a:r>
+              <a:rPr lang="en-US" dirty="0">
+                <a:solidFill>
+                  <a:srgbClr val="FFFFFF"/>
+                </a:solidFill>
+                <a:latin typeface="Calibri"/>
+              </a:rPr>
+              <a:t>": 16, "</a:t>
+            </a:r>
+            <a:r>
+              <a:rPr lang="en-US" dirty="0" err="1">
+                <a:solidFill>
+                  <a:srgbClr val="FFFFFF"/>
+                </a:solidFill>
+                <a:latin typeface="Calibri"/>
+              </a:rPr>
+              <a:t>marginTop</a:t>
+            </a:r>
+            <a:r>
+              <a:rPr lang="en-US" dirty="0">
+                <a:solidFill>
+                  <a:srgbClr val="FFFFFF"/>
+                </a:solidFill>
+                <a:latin typeface="Calibri"/>
+              </a:rPr>
+              <a:t>": 0},</a:t>
+            </a:r>
+          </a:p>
+          <a:p>
+            <a:r>
+              <a:rPr lang="en-US" dirty="0">
+                <a:solidFill>
+                  <a:srgbClr val="FFFFFF"/>
+                </a:solidFill>
+                <a:latin typeface="Calibri"/>
+              </a:rPr>
+              <a:t>  {"type": "shape", "x": "${x}", "y": "${y+120}", ...},</a:t>
+            </a:r>
+          </a:p>
+          <a:p>
+            <a:r>
+              <a:rPr lang="en-US" dirty="0">
+                <a:solidFill>
+                  <a:srgbClr val="FFFFFF"/>
+                </a:solidFill>
+                <a:latin typeface="Calibri"/>
+              </a:rPr>
+              <a:t>  {"type": "textbox", "x": "${x+20}", "y": "${y+130}", ...},</a:t>
+            </a:r>
+          </a:p>
+          <a:p>
+            <a:r>
+              <a:rPr lang="en-US" dirty="0">
+                <a:solidFill>
+                  <a:srgbClr val="FFFFFF"/>
+                </a:solidFill>
+                <a:latin typeface="Calibri"/>
+              </a:rPr>
+              <a:t>  {"type": "shape", "x": "${x}", "y": "${y+240}", ...},</a:t>
+            </a:r>
+          </a:p>
+          <a:p>
+            <a:r>
+              <a:rPr lang="en-US" dirty="0">
+                <a:solidFill>
+                  <a:srgbClr val="FFFFFF"/>
+                </a:solidFill>
+                <a:latin typeface="Calibri"/>
+              </a:rPr>
+              <a:t>  {"type": "textbox", "x": "${x+20}", "y": "${y+250}", ...},</a:t>
+            </a:r>
+          </a:p>
+          <a:p>
+            <a:endParaRPr lang="en-US" dirty="0">
+              <a:solidFill>
+                <a:srgbClr val="FFFFFF"/>
+              </a:solidFill>
+              <a:latin typeface="Calibri"/>
+            </a:endParaRPr>
+          </a:p>
+          <a:p>
+            <a:r>
+              <a:rPr lang="en-US" dirty="0">
+                <a:solidFill>
+                  <a:srgbClr val="FFFFFF"/>
+                </a:solidFill>
+                <a:latin typeface="Calibri"/>
+              </a:rPr>
+              <a:t>  {"type": "shape", "shape": "</a:t>
+            </a:r>
+            <a:r>
+              <a:rPr lang="en-US" dirty="0" err="1">
+                <a:solidFill>
+                  <a:srgbClr val="FFFFFF"/>
+                </a:solidFill>
+                <a:latin typeface="Calibri"/>
+              </a:rPr>
+              <a:t>right_brace</a:t>
+            </a:r>
+            <a:r>
+              <a:rPr lang="en-US" dirty="0">
+                <a:solidFill>
+                  <a:srgbClr val="FFFFFF"/>
+                </a:solidFill>
+                <a:latin typeface="Calibri"/>
+              </a:rPr>
+              <a:t>", "x": "${x+550}", "y": "${y}", "width": 50, "height": 320, "line": "#8FA7C4", "</a:t>
+            </a:r>
+            <a:r>
+              <a:rPr lang="en-US" dirty="0" err="1">
+                <a:solidFill>
+                  <a:srgbClr val="FFFFFF"/>
+                </a:solidFill>
+                <a:latin typeface="Calibri"/>
+              </a:rPr>
+              <a:t>lineWidth</a:t>
+            </a:r>
+            <a:r>
+              <a:rPr lang="en-US" dirty="0">
+                <a:solidFill>
+                  <a:srgbClr val="FFFFFF"/>
+                </a:solidFill>
+                <a:latin typeface="Calibri"/>
+              </a:rPr>
+              <a:t>": 1.5},</a:t>
+            </a:r>
+          </a:p>
+          <a:p>
+            <a:r>
+              <a:rPr lang="en-US" dirty="0">
+                <a:solidFill>
+                  <a:srgbClr val="FFFFFF"/>
+                </a:solidFill>
+                <a:latin typeface="Calibri"/>
+              </a:rPr>
+              <a:t>  {"type": "textbox", "x": "${x+650}", "y": "${y+120}", "width": 500, "height": 70, "text": "{{bold,#FF9900:Conclusion}}", "</a:t>
+            </a:r>
+            <a:r>
+              <a:rPr lang="en-US" dirty="0" err="1">
+                <a:solidFill>
+                  <a:srgbClr val="FFFFFF"/>
+                </a:solidFill>
+                <a:latin typeface="Calibri"/>
+              </a:rPr>
+              <a:t>fontSize</a:t>
+            </a:r>
+            <a:r>
+              <a:rPr lang="en-US" dirty="0">
+                <a:solidFill>
+                  <a:srgbClr val="FFFFFF"/>
+                </a:solidFill>
+                <a:latin typeface="Calibri"/>
+              </a:rPr>
+              <a:t>": 20}</a:t>
+            </a:r>
+          </a:p>
+          <a:p>
+            <a:r>
+              <a:rPr lang="en-US" dirty="0">
+                <a:solidFill>
+                  <a:srgbClr val="FFFFFF"/>
+                </a:solidFill>
+                <a:latin typeface="Calibri"/>
+              </a:rPr>
+              <a:t>]</a:t>
+            </a:r>
+          </a:p>
+          <a:p>
+            <a:r>
+              <a:rPr lang="en-US" dirty="0">
+                <a:solidFill>
+                  <a:srgbClr val="FFFFFF"/>
+                </a:solidFill>
+                <a:latin typeface="Calibri"/>
+              </a:rPr>
+              <a:t>```</a:t>
             </a:r>
             <a:endParaRPr dirty="0">
               <a:solidFill>
@@ -4958,6 +11463,14 @@
             </a:r>
           </a:p>
           <a:p>
+            <a:endParaRPr lang="en-US" dirty="0">
+              <a:solidFill>
+                <a:srgbClr val="FFFFFF"/>
+              </a:solidFill>
+              <a:latin typeface="Calibri"/>
+            </a:endParaRPr>
+          </a:p>
+          <a:p>
             <a:r>
               <a:rPr lang="en-US" dirty="0">
                 <a:solidFill>
@@ -5074,6 +11587,207 @@
                 </a:solidFill>
                 <a:latin typeface="Calibri"/>
               </a:rPr>
+              <a:t>```</a:t>
+            </a:r>
+            <a:r>
+              <a:rPr lang="en-US" dirty="0" err="1">
+                <a:solidFill>
+                  <a:srgbClr val="FFFFFF"/>
+                </a:solidFill>
+                <a:latin typeface="Calibri"/>
+              </a:rPr>
+              <a:t>json</a:t>
+            </a:r>
+            <a:endParaRPr lang="en-US" dirty="0">
+              <a:solidFill>
+                <a:srgbClr val="FFFFFF"/>
+              </a:solidFill>
+              <a:latin typeface="Calibri"/>
+            </a:endParaRPr>
+          </a:p>
+          <a:p>
+            <a:r>
+              <a:rPr lang="en-US" dirty="0">
+                <a:solidFill>
+                  <a:srgbClr val="FFFFFF"/>
+                </a:solidFill>
+                <a:latin typeface="Calibri"/>
+              </a:rPr>
+              <a:t>[</a:t>
+            </a:r>
+          </a:p>
+          <a:p>
+            <a:r>
+              <a:rPr lang="en-US" dirty="0">
+                <a:solidFill>
+                  <a:srgbClr val="FFFFFF"/>
+                </a:solidFill>
+                <a:latin typeface="Calibri"/>
+              </a:rPr>
+              <a:t>  {"type": "textbox", "x": "${x}", "y": "${y}", "width": 500, "height": 45, "text": "{{#8FA7C4:Label}}", "</a:t>
+            </a:r>
+            <a:r>
+              <a:rPr lang="en-US" dirty="0" err="1">
+                <a:solidFill>
+                  <a:srgbClr val="FFFFFF"/>
+                </a:solidFill>
+                <a:latin typeface="Calibri"/>
+              </a:rPr>
+              <a:t>fontSize</a:t>
+            </a:r>
+            <a:r>
+              <a:rPr lang="en-US" dirty="0">
+                <a:solidFill>
+                  <a:srgbClr val="FFFFFF"/>
+                </a:solidFill>
+                <a:latin typeface="Calibri"/>
+              </a:rPr>
+              <a:t>": 14, "</a:t>
+            </a:r>
+            <a:r>
+              <a:rPr lang="en-US" dirty="0" err="1">
+                <a:solidFill>
+                  <a:srgbClr val="FFFFFF"/>
+                </a:solidFill>
+                <a:latin typeface="Calibri"/>
+              </a:rPr>
+              <a:t>marginTop</a:t>
+            </a:r>
+            <a:r>
+              <a:rPr lang="en-US" dirty="0">
+                <a:solidFill>
+                  <a:srgbClr val="FFFFFF"/>
+                </a:solidFill>
+                <a:latin typeface="Calibri"/>
+              </a:rPr>
+              <a:t>": 0},</a:t>
+            </a:r>
+          </a:p>
+          <a:p>
+            <a:r>
+              <a:rPr lang="en-US" dirty="0">
+                <a:solidFill>
+                  <a:srgbClr val="FFFFFF"/>
+                </a:solidFill>
+                <a:latin typeface="Calibri"/>
+              </a:rPr>
+              <a:t>  {"type": "textbox", "x": "${x}", "y": "${y+40}", "width": 500, "height": 70, "text": "{{</a:t>
+            </a:r>
+            <a:r>
+              <a:rPr lang="en-US" dirty="0" err="1">
+                <a:solidFill>
+                  <a:srgbClr val="FFFFFF"/>
+                </a:solidFill>
+                <a:latin typeface="Calibri"/>
+              </a:rPr>
+              <a:t>bold:Value</a:t>
+            </a:r>
+            <a:r>
+              <a:rPr lang="en-US" dirty="0">
+                <a:solidFill>
+                  <a:srgbClr val="FFFFFF"/>
+                </a:solidFill>
+                <a:latin typeface="Calibri"/>
+              </a:rPr>
+              <a:t>}}", "</a:t>
+            </a:r>
+            <a:r>
+              <a:rPr lang="en-US" dirty="0" err="1">
+                <a:solidFill>
+                  <a:srgbClr val="FFFFFF"/>
+                </a:solidFill>
+                <a:latin typeface="Calibri"/>
+              </a:rPr>
+              <a:t>fontSize</a:t>
+            </a:r>
+            <a:r>
+              <a:rPr lang="en-US" dirty="0">
+                <a:solidFill>
+                  <a:srgbClr val="FFFFFF"/>
+                </a:solidFill>
+                <a:latin typeface="Calibri"/>
+              </a:rPr>
+              <a:t>": 24, "</a:t>
+            </a:r>
+            <a:r>
+              <a:rPr lang="en-US" dirty="0" err="1">
+                <a:solidFill>
+                  <a:srgbClr val="FFFFFF"/>
+                </a:solidFill>
+                <a:latin typeface="Calibri"/>
+              </a:rPr>
+              <a:t>marginTop</a:t>
+            </a:r>
+            <a:r>
+              <a:rPr lang="en-US" dirty="0">
+                <a:solidFill>
+                  <a:srgbClr val="FFFFFF"/>
+                </a:solidFill>
+                <a:latin typeface="Calibri"/>
+              </a:rPr>
+              <a:t>": 0},</a:t>
+            </a:r>
+          </a:p>
+          <a:p>
+            <a:r>
+              <a:rPr lang="en-US" dirty="0">
+                <a:solidFill>
+                  <a:srgbClr val="FFFFFF"/>
+                </a:solidFill>
+                <a:latin typeface="Calibri"/>
+              </a:rPr>
+              <a:t>  {"type": "textbox", "x": "${x}", "y": "${y+190}", ...},</a:t>
+            </a:r>
+          </a:p>
+          <a:p>
+            <a:r>
+              <a:rPr lang="en-US" dirty="0">
+                <a:solidFill>
+                  <a:srgbClr val="FFFFFF"/>
+                </a:solidFill>
+                <a:latin typeface="Calibri"/>
+              </a:rPr>
+              <a:t>  {"type": "textbox", "x": "${x}", "y": "${y+230}", ...}</a:t>
+            </a:r>
+          </a:p>
+          <a:p>
+            <a:r>
+              <a:rPr lang="en-US" dirty="0">
+                <a:solidFill>
+                  <a:srgbClr val="FFFFFF"/>
+                </a:solidFill>
+                <a:latin typeface="Calibri"/>
+              </a:rPr>
+              <a:t>]</a:t>
+            </a:r>
+          </a:p>
+          <a:p>
+            <a:r>
+              <a:rPr lang="en-US" dirty="0">
+                <a:solidFill>
+                  <a:srgbClr val="FFFFFF"/>
+                </a:solidFill>
+                <a:latin typeface="Calibri"/>
+              </a:rPr>
+              <a:t>```</a:t>
+            </a:r>
+          </a:p>
+          <a:p>
+            <a:endParaRPr lang="en-US" dirty="0">
+              <a:solidFill>
+                <a:srgbClr val="FFFFFF"/>
+              </a:solidFill>
+              <a:latin typeface="Calibri"/>
+            </a:endParaRPr>
+          </a:p>
+          <a:p>
+            <a:r>
+              <a:rPr lang="en-US" dirty="0">
+                <a:solidFill>
+                  <a:srgbClr val="FFFFFF"/>
+                </a:solidFill>
+                <a:latin typeface="Calibri"/>
+              </a:rPr>
               <a:t>Whitespace has its own strength dial. Spacing ratio alone is the lightest. Color contrast between label and value reinforces grouping</a:t>
             </a:r>
           </a:p>
@@ -5104,14 +11818,272 @@
                 </a:solidFill>
                 <a:latin typeface="Calibri"/>
               </a:rPr>
+              <a:t>```</a:t>
+            </a:r>
+            <a:r>
+              <a:rPr lang="en-US" dirty="0" err="1">
+                <a:solidFill>
+                  <a:srgbClr val="FFFFFF"/>
+                </a:solidFill>
+                <a:latin typeface="Calibri"/>
+              </a:rPr>
+              <a:t>json</a:t>
+            </a:r>
+            <a:endParaRPr lang="en-US" dirty="0">
+              <a:solidFill>
+                <a:srgbClr val="FFFFFF"/>
+              </a:solidFill>
+              <a:latin typeface="Calibri"/>
+            </a:endParaRPr>
+          </a:p>
+          <a:p>
+            <a:r>
+              <a:rPr lang="en-US" dirty="0">
+                <a:solidFill>
+                  <a:srgbClr val="FFFFFF"/>
+                </a:solidFill>
+                <a:latin typeface="Calibri"/>
+              </a:rPr>
+              <a:t>[</a:t>
+            </a:r>
+          </a:p>
+          <a:p>
+            <a:r>
+              <a:rPr lang="en-US" dirty="0">
+                <a:solidFill>
+                  <a:srgbClr val="FFFFFF"/>
+                </a:solidFill>
+                <a:latin typeface="Calibri"/>
+              </a:rPr>
+              <a:t>  {"type": "textbox", "x": "${x}", "y": "${y}", "width": 500, "height": 45, "text": "{{#8FA7C4:Label}}", "</a:t>
+            </a:r>
+            <a:r>
+              <a:rPr lang="en-US" dirty="0" err="1">
+                <a:solidFill>
+                  <a:srgbClr val="FFFFFF"/>
+                </a:solidFill>
+                <a:latin typeface="Calibri"/>
+              </a:rPr>
+              <a:t>fontSize</a:t>
+            </a:r>
+            <a:r>
+              <a:rPr lang="en-US" dirty="0">
+                <a:solidFill>
+                  <a:srgbClr val="FFFFFF"/>
+                </a:solidFill>
+                <a:latin typeface="Calibri"/>
+              </a:rPr>
+              <a:t>": 14, "</a:t>
+            </a:r>
+            <a:r>
+              <a:rPr lang="en-US" dirty="0" err="1">
+                <a:solidFill>
+                  <a:srgbClr val="FFFFFF"/>
+                </a:solidFill>
+                <a:latin typeface="Calibri"/>
+              </a:rPr>
+              <a:t>marginTop</a:t>
+            </a:r>
+            <a:r>
+              <a:rPr lang="en-US" dirty="0">
+                <a:solidFill>
+                  <a:srgbClr val="FFFFFF"/>
+                </a:solidFill>
+                <a:latin typeface="Calibri"/>
+              </a:rPr>
+              <a:t>": 0},</a:t>
+            </a:r>
+          </a:p>
+          <a:p>
+            <a:r>
+              <a:rPr lang="en-US" dirty="0">
+                <a:solidFill>
+                  <a:srgbClr val="FFFFFF"/>
+                </a:solidFill>
+                <a:latin typeface="Calibri"/>
+              </a:rPr>
+              <a:t>  {"type": "textbox", "x": "${x}", "y": "${y+40}", "width": 500, "height": 70, "text": "{{</a:t>
+            </a:r>
+            <a:r>
+              <a:rPr lang="en-US" dirty="0" err="1">
+                <a:solidFill>
+                  <a:srgbClr val="FFFFFF"/>
+                </a:solidFill>
+                <a:latin typeface="Calibri"/>
+              </a:rPr>
+              <a:t>bold:Value</a:t>
+            </a:r>
+            <a:r>
+              <a:rPr lang="en-US" dirty="0">
+                <a:solidFill>
+                  <a:srgbClr val="FFFFFF"/>
+                </a:solidFill>
+                <a:latin typeface="Calibri"/>
+              </a:rPr>
+              <a:t>}}", "</a:t>
+            </a:r>
+            <a:r>
+              <a:rPr lang="en-US" dirty="0" err="1">
+                <a:solidFill>
+                  <a:srgbClr val="FFFFFF"/>
+                </a:solidFill>
+                <a:latin typeface="Calibri"/>
+              </a:rPr>
+              <a:t>fontSize</a:t>
+            </a:r>
+            <a:r>
+              <a:rPr lang="en-US" dirty="0">
+                <a:solidFill>
+                  <a:srgbClr val="FFFFFF"/>
+                </a:solidFill>
+                <a:latin typeface="Calibri"/>
+              </a:rPr>
+              <a:t>": 24, "</a:t>
+            </a:r>
+            <a:r>
+              <a:rPr lang="en-US" dirty="0" err="1">
+                <a:solidFill>
+                  <a:srgbClr val="FFFFFF"/>
+                </a:solidFill>
+                <a:latin typeface="Calibri"/>
+              </a:rPr>
+              <a:t>marginTop</a:t>
+            </a:r>
+            <a:r>
+              <a:rPr lang="en-US" dirty="0">
+                <a:solidFill>
+                  <a:srgbClr val="FFFFFF"/>
+                </a:solidFill>
+                <a:latin typeface="Calibri"/>
+              </a:rPr>
+              <a:t>": 0},</a:t>
+            </a:r>
+          </a:p>
+          <a:p>
+            <a:endParaRPr lang="en-US" dirty="0">
+              <a:solidFill>
+                <a:srgbClr val="FFFFFF"/>
+              </a:solidFill>
+              <a:latin typeface="Calibri"/>
+            </a:endParaRPr>
+          </a:p>
+          <a:p>
+            <a:r>
+              <a:rPr lang="en-US" dirty="0">
+                <a:solidFill>
+                  <a:srgbClr val="FFFFFF"/>
+                </a:solidFill>
+                <a:latin typeface="Calibri"/>
+              </a:rPr>
+              <a:t>  {"type": "line", "x": "${x}", "y": "${y+160}", "width": 500, "height": 0, "</a:t>
+            </a:r>
+            <a:r>
+              <a:rPr lang="en-US" dirty="0" err="1">
+                <a:solidFill>
+                  <a:srgbClr val="FFFFFF"/>
+                </a:solidFill>
+                <a:latin typeface="Calibri"/>
+              </a:rPr>
+              <a:t>lineWidth</a:t>
+            </a:r>
+            <a:r>
+              <a:rPr lang="en-US" dirty="0">
+                <a:solidFill>
+                  <a:srgbClr val="FFFFFF"/>
+                </a:solidFill>
+                <a:latin typeface="Calibri"/>
+              </a:rPr>
+              <a:t>": 1.0, "</a:t>
+            </a:r>
+            <a:r>
+              <a:rPr lang="en-US" dirty="0" err="1">
+                <a:solidFill>
+                  <a:srgbClr val="FFFFFF"/>
+                </a:solidFill>
+                <a:latin typeface="Calibri"/>
+              </a:rPr>
+              <a:t>dashStyle</a:t>
+            </a:r>
+            <a:r>
+              <a:rPr lang="en-US" dirty="0">
+                <a:solidFill>
+                  <a:srgbClr val="FFFFFF"/>
+                </a:solidFill>
+                <a:latin typeface="Calibri"/>
+              </a:rPr>
+              <a:t>": "dash", "color": "#8FA7C4"},</a:t>
+            </a:r>
+          </a:p>
+          <a:p>
+            <a:endParaRPr lang="en-US" dirty="0">
+              <a:solidFill>
+                <a:srgbClr val="FFFFFF"/>
+              </a:solidFill>
+              <a:latin typeface="Calibri"/>
+            </a:endParaRPr>
+          </a:p>
+          <a:p>
+            <a:r>
+              <a:rPr lang="en-US" dirty="0">
+                <a:solidFill>
+                  <a:srgbClr val="FFFFFF"/>
+                </a:solidFill>
+                <a:latin typeface="Calibri"/>
+              </a:rPr>
+              <a:t>  {"type": "textbox", "x": "${x}", "y": "${y+190}", ...},</a:t>
+            </a:r>
+          </a:p>
+          <a:p>
+            <a:r>
+              <a:rPr lang="en-US" dirty="0">
+                <a:solidFill>
+                  <a:srgbClr val="FFFFFF"/>
+                </a:solidFill>
+                <a:latin typeface="Calibri"/>
+              </a:rPr>
+              <a:t>  {"type": "textbox", "x": "${x}", "y": "${y+230}", ...}</a:t>
+            </a:r>
+          </a:p>
+          <a:p>
+            <a:r>
+              <a:rPr lang="en-US" dirty="0">
+                <a:solidFill>
+                  <a:srgbClr val="FFFFFF"/>
+                </a:solidFill>
+                <a:latin typeface="Calibri"/>
+              </a:rPr>
+              <a:t>]</a:t>
+            </a:r>
+          </a:p>
+          <a:p>
+            <a:r>
+              <a:rPr lang="en-US" dirty="0">
+                <a:solidFill>
+                  <a:srgbClr val="FFFFFF"/>
+                </a:solidFill>
+                <a:latin typeface="Calibri"/>
+              </a:rPr>
+              <a:t>```</a:t>
+            </a:r>
+          </a:p>
+          <a:p>
+            <a:endParaRPr lang="en-US" dirty="0">
+              <a:solidFill>
+                <a:srgbClr val="FFFFFF"/>
+              </a:solidFill>
+              <a:latin typeface="Calibri"/>
+            </a:endParaRPr>
+          </a:p>
+          <a:p>
+            <a:r>
+              <a:rPr lang="en-US" dirty="0">
+                <a:solidFill>
+                  <a:srgbClr val="FFFFFF"/>
+                </a:solidFill>
+                <a:latin typeface="Calibri"/>
+              </a:rPr>
               <a:t>When whitespace stops working: too many groups without any visual anchor. The eye needs a reference point — a divider or accent line.</a:t>
             </a:r>
-            <a:endParaRPr dirty="0">
-              <a:solidFill>
-                <a:srgbClr val="FFFFFF"/>
-              </a:solidFill>
-              <a:latin typeface="Calibri"/>
-            </a:endParaRPr>
           </a:p>
         </p:txBody>
       </p:sp>
@@ -5195,6 +12167,14 @@
             </a:r>
           </a:p>
           <a:p>
+            <a:endParaRPr lang="en-US" dirty="0">
+              <a:solidFill>
+                <a:srgbClr val="FFFFFF"/>
+              </a:solidFill>
+              <a:latin typeface="Calibri"/>
+            </a:endParaRPr>
+          </a:p>
+          <a:p>
             <a:r>
               <a:rPr lang="en-US" dirty="0">
                 <a:solidFill>
@@ -5281,6 +12261,236 @@
                 </a:solidFill>
                 <a:latin typeface="Calibri"/>
               </a:rPr>
+              <a:t>```</a:t>
+            </a:r>
+            <a:r>
+              <a:rPr lang="en-US" dirty="0" err="1">
+                <a:solidFill>
+                  <a:srgbClr val="FFFFFF"/>
+                </a:solidFill>
+                <a:latin typeface="Calibri"/>
+              </a:rPr>
+              <a:t>json</a:t>
+            </a:r>
+            <a:endParaRPr lang="en-US" dirty="0">
+              <a:solidFill>
+                <a:srgbClr val="FFFFFF"/>
+              </a:solidFill>
+              <a:latin typeface="Calibri"/>
+            </a:endParaRPr>
+          </a:p>
+          <a:p>
+            <a:r>
+              <a:rPr lang="en-US" dirty="0">
+                <a:solidFill>
+                  <a:srgbClr val="FFFFFF"/>
+                </a:solidFill>
+                <a:latin typeface="Calibri"/>
+              </a:rPr>
+              <a:t>[</a:t>
+            </a:r>
+          </a:p>
+          <a:p>
+            <a:r>
+              <a:rPr lang="en-US" dirty="0">
+                <a:solidFill>
+                  <a:srgbClr val="FFFFFF"/>
+                </a:solidFill>
+                <a:latin typeface="Calibri"/>
+              </a:rPr>
+              <a:t>  {"type": "shape", "shape": "rectangle", "x": "${x}", "y": "${y}", "width": 791, "height": 620, "fill": "#FFFFFF", "opacity": 0.06},</a:t>
+            </a:r>
+          </a:p>
+          <a:p>
+            <a:r>
+              <a:rPr lang="en-US" dirty="0">
+                <a:solidFill>
+                  <a:srgbClr val="FFFFFF"/>
+                </a:solidFill>
+                <a:latin typeface="Calibri"/>
+              </a:rPr>
+              <a:t>  {"type": "shape", "shape": "</a:t>
+            </a:r>
+            <a:r>
+              <a:rPr lang="en-US" dirty="0" err="1">
+                <a:solidFill>
+                  <a:srgbClr val="FFFFFF"/>
+                </a:solidFill>
+                <a:latin typeface="Calibri"/>
+              </a:rPr>
+              <a:t>rounded_rectangle</a:t>
+            </a:r>
+            <a:r>
+              <a:rPr lang="en-US" dirty="0">
+                <a:solidFill>
+                  <a:srgbClr val="FFFFFF"/>
+                </a:solidFill>
+                <a:latin typeface="Calibri"/>
+              </a:rPr>
+              <a:t>", "x": "${x+70}", "y": "${y+70}", "width": 300, "height": 480, "adjustments": [0.05], "fill": "#FFFFFF", "opacity": 0.08, "shadow": {"type": "outer", "blur": 6, "distance": 3, "direction": 135, "color": "#000000", "opacity": 0.3}},</a:t>
+            </a:r>
+          </a:p>
+          <a:p>
+            <a:r>
+              <a:rPr lang="en-US" dirty="0">
+                <a:solidFill>
+                  <a:srgbClr val="FFFFFF"/>
+                </a:solidFill>
+                <a:latin typeface="Calibri"/>
+              </a:rPr>
+              <a:t>  {"type": "image", "x": "${x+168}", "y": "${y+118}", "width": 104, "height": 104, "</a:t>
+            </a:r>
+            <a:r>
+              <a:rPr lang="en-US" dirty="0" err="1">
+                <a:solidFill>
+                  <a:srgbClr val="FFFFFF"/>
+                </a:solidFill>
+                <a:latin typeface="Calibri"/>
+              </a:rPr>
+              <a:t>src</a:t>
+            </a:r>
+            <a:r>
+              <a:rPr lang="en-US" dirty="0">
+                <a:solidFill>
+                  <a:srgbClr val="FFFFFF"/>
+                </a:solidFill>
+                <a:latin typeface="Calibri"/>
+              </a:rPr>
+              <a:t>": "&lt;asset&gt;"},</a:t>
+            </a:r>
+          </a:p>
+          <a:p>
+            <a:r>
+              <a:rPr lang="en-US" dirty="0">
+                <a:solidFill>
+                  <a:srgbClr val="FFFFFF"/>
+                </a:solidFill>
+                <a:latin typeface="Calibri"/>
+              </a:rPr>
+              <a:t>  {"type": "textbox", "x": "${x+110}", "y": "${y+255}", "width": 220, "height": 50, "text": "{{</a:t>
+            </a:r>
+            <a:r>
+              <a:rPr lang="en-US" dirty="0" err="1">
+                <a:solidFill>
+                  <a:srgbClr val="FFFFFF"/>
+                </a:solidFill>
+                <a:latin typeface="Calibri"/>
+              </a:rPr>
+              <a:t>bold:Label</a:t>
+            </a:r>
+            <a:r>
+              <a:rPr lang="en-US" dirty="0">
+                <a:solidFill>
+                  <a:srgbClr val="FFFFFF"/>
+                </a:solidFill>
+                <a:latin typeface="Calibri"/>
+              </a:rPr>
+              <a:t>}}", "</a:t>
+            </a:r>
+            <a:r>
+              <a:rPr lang="en-US" dirty="0" err="1">
+                <a:solidFill>
+                  <a:srgbClr val="FFFFFF"/>
+                </a:solidFill>
+                <a:latin typeface="Calibri"/>
+              </a:rPr>
+              <a:t>fontSize</a:t>
+            </a:r>
+            <a:r>
+              <a:rPr lang="en-US" dirty="0">
+                <a:solidFill>
+                  <a:srgbClr val="FFFFFF"/>
+                </a:solidFill>
+                <a:latin typeface="Calibri"/>
+              </a:rPr>
+              <a:t>": 20, "align": "center", "</a:t>
+            </a:r>
+            <a:r>
+              <a:rPr lang="en-US" dirty="0" err="1">
+                <a:solidFill>
+                  <a:srgbClr val="FFFFFF"/>
+                </a:solidFill>
+                <a:latin typeface="Calibri"/>
+              </a:rPr>
+              <a:t>marginTop</a:t>
+            </a:r>
+            <a:r>
+              <a:rPr lang="en-US" dirty="0">
+                <a:solidFill>
+                  <a:srgbClr val="FFFFFF"/>
+                </a:solidFill>
+                <a:latin typeface="Calibri"/>
+              </a:rPr>
+              <a:t>": 0},</a:t>
+            </a:r>
+          </a:p>
+          <a:p>
+            <a:r>
+              <a:rPr lang="en-US" dirty="0">
+                <a:solidFill>
+                  <a:srgbClr val="FFFFFF"/>
+                </a:solidFill>
+                <a:latin typeface="Calibri"/>
+              </a:rPr>
+              <a:t>  {"type": "shape", "shape": "</a:t>
+            </a:r>
+            <a:r>
+              <a:rPr lang="en-US" dirty="0" err="1">
+                <a:solidFill>
+                  <a:srgbClr val="FFFFFF"/>
+                </a:solidFill>
+                <a:latin typeface="Calibri"/>
+              </a:rPr>
+              <a:t>rounded_rectangle</a:t>
+            </a:r>
+            <a:r>
+              <a:rPr lang="en-US" dirty="0">
+                <a:solidFill>
+                  <a:srgbClr val="FFFFFF"/>
+                </a:solidFill>
+                <a:latin typeface="Calibri"/>
+              </a:rPr>
+              <a:t>", "x": "${x+420}", "y": "${y+70}", "width": 300, "height": 480, "adjustments": [0.05], "fill": "#FFFFFF", "opacity": 0.08, "shadow": {"type": "outer", "blur": 6, "distance": 3, "direction": 135, "color": "#000000", "opacity": 0.3}}</a:t>
+            </a:r>
+          </a:p>
+          <a:p>
+            <a:r>
+              <a:rPr lang="en-US" dirty="0">
+                <a:solidFill>
+                  <a:srgbClr val="FFFFFF"/>
+                </a:solidFill>
+                <a:latin typeface="Calibri"/>
+              </a:rPr>
+              <a:t>]</a:t>
+            </a:r>
+          </a:p>
+          <a:p>
+            <a:r>
+              <a:rPr lang="en-US" dirty="0">
+                <a:solidFill>
+                  <a:srgbClr val="FFFFFF"/>
+                </a:solidFill>
+                <a:latin typeface="Calibri"/>
+              </a:rPr>
+              <a:t>```</a:t>
+            </a:r>
+          </a:p>
+          <a:p>
+            <a:endParaRPr lang="en-US" dirty="0">
+              <a:solidFill>
+                <a:srgbClr val="FFFFFF"/>
+              </a:solidFill>
+              <a:latin typeface="Calibri"/>
+            </a:endParaRPr>
+          </a:p>
+          <a:p>
+            <a:r>
+              <a:rPr lang="en-US" dirty="0">
+                <a:solidFill>
+                  <a:srgbClr val="FFFFFF"/>
+                </a:solidFill>
+                <a:latin typeface="Calibri"/>
+              </a:rPr>
               <a:t>For hierarchy to read, outer and inner need to look different. Same structural element with same modifiers and the levels collapse. The</a:t>
             </a:r>
           </a:p>
@@ -5311,6 +12521,457 @@
                 </a:solidFill>
                 <a:latin typeface="Calibri"/>
               </a:rPr>
+              <a:t>The outer container can be whitespace itself — border inner with whitespace grouping:</a:t>
+            </a:r>
+          </a:p>
+          <a:p>
+            <a:endParaRPr lang="en-US" dirty="0">
+              <a:solidFill>
+                <a:srgbClr val="FFFFFF"/>
+              </a:solidFill>
+              <a:latin typeface="Calibri"/>
+            </a:endParaRPr>
+          </a:p>
+          <a:p>
+            <a:r>
+              <a:rPr lang="en-US" dirty="0">
+                <a:solidFill>
+                  <a:srgbClr val="FFFFFF"/>
+                </a:solidFill>
+                <a:latin typeface="Calibri"/>
+              </a:rPr>
+              <a:t>```</a:t>
+            </a:r>
+            <a:r>
+              <a:rPr lang="en-US" dirty="0" err="1">
+                <a:solidFill>
+                  <a:srgbClr val="FFFFFF"/>
+                </a:solidFill>
+                <a:latin typeface="Calibri"/>
+              </a:rPr>
+              <a:t>json</a:t>
+            </a:r>
+            <a:endParaRPr lang="en-US" dirty="0">
+              <a:solidFill>
+                <a:srgbClr val="FFFFFF"/>
+              </a:solidFill>
+              <a:latin typeface="Calibri"/>
+            </a:endParaRPr>
+          </a:p>
+          <a:p>
+            <a:r>
+              <a:rPr lang="en-US" dirty="0">
+                <a:solidFill>
+                  <a:srgbClr val="FFFFFF"/>
+                </a:solidFill>
+                <a:latin typeface="Calibri"/>
+              </a:rPr>
+              <a:t>[</a:t>
+            </a:r>
+          </a:p>
+          <a:p>
+            <a:r>
+              <a:rPr lang="en-US" dirty="0">
+                <a:solidFill>
+                  <a:srgbClr val="FFFFFF"/>
+                </a:solidFill>
+                <a:latin typeface="Calibri"/>
+              </a:rPr>
+              <a:t>  {"type": "shape", "shape": "</a:t>
+            </a:r>
+            <a:r>
+              <a:rPr lang="en-US" dirty="0" err="1">
+                <a:solidFill>
+                  <a:srgbClr val="FFFFFF"/>
+                </a:solidFill>
+                <a:latin typeface="Calibri"/>
+              </a:rPr>
+              <a:t>rounded_rectangle</a:t>
+            </a:r>
+            <a:r>
+              <a:rPr lang="en-US" dirty="0">
+                <a:solidFill>
+                  <a:srgbClr val="FFFFFF"/>
+                </a:solidFill>
+                <a:latin typeface="Calibri"/>
+              </a:rPr>
+              <a:t>", "x": "${x}", "y": "${y}", "width": 480, "height": 480, "adjustments": [0.04], "line": "#8FA7C4", "</a:t>
+            </a:r>
+            <a:r>
+              <a:rPr lang="en-US" dirty="0" err="1">
+                <a:solidFill>
+                  <a:srgbClr val="FFFFFF"/>
+                </a:solidFill>
+                <a:latin typeface="Calibri"/>
+              </a:rPr>
+              <a:t>lineWidth</a:t>
+            </a:r>
+            <a:r>
+              <a:rPr lang="en-US" dirty="0">
+                <a:solidFill>
+                  <a:srgbClr val="FFFFFF"/>
+                </a:solidFill>
+                <a:latin typeface="Calibri"/>
+              </a:rPr>
+              <a:t>": 1.5},</a:t>
+            </a:r>
+          </a:p>
+          <a:p>
+            <a:r>
+              <a:rPr lang="en-US" dirty="0">
+                <a:solidFill>
+                  <a:srgbClr val="FFFFFF"/>
+                </a:solidFill>
+                <a:latin typeface="Calibri"/>
+              </a:rPr>
+              <a:t>  {"type": "textbox", "x": "${x+80}", "y": "${y+70}", "width": 340, "height": 50, "text": "{{</a:t>
+            </a:r>
+            <a:r>
+              <a:rPr lang="en-US" dirty="0" err="1">
+                <a:solidFill>
+                  <a:srgbClr val="FFFFFF"/>
+                </a:solidFill>
+                <a:latin typeface="Calibri"/>
+              </a:rPr>
+              <a:t>bold:Title</a:t>
+            </a:r>
+            <a:r>
+              <a:rPr lang="en-US" dirty="0">
+                <a:solidFill>
+                  <a:srgbClr val="FFFFFF"/>
+                </a:solidFill>
+                <a:latin typeface="Calibri"/>
+              </a:rPr>
+              <a:t>}}", "</a:t>
+            </a:r>
+            <a:r>
+              <a:rPr lang="en-US" dirty="0" err="1">
+                <a:solidFill>
+                  <a:srgbClr val="FFFFFF"/>
+                </a:solidFill>
+                <a:latin typeface="Calibri"/>
+              </a:rPr>
+              <a:t>fontSize</a:t>
+            </a:r>
+            <a:r>
+              <a:rPr lang="en-US" dirty="0">
+                <a:solidFill>
+                  <a:srgbClr val="FFFFFF"/>
+                </a:solidFill>
+                <a:latin typeface="Calibri"/>
+              </a:rPr>
+              <a:t>": 18, "align": "right", "</a:t>
+            </a:r>
+            <a:r>
+              <a:rPr lang="en-US" dirty="0" err="1">
+                <a:solidFill>
+                  <a:srgbClr val="FFFFFF"/>
+                </a:solidFill>
+                <a:latin typeface="Calibri"/>
+              </a:rPr>
+              <a:t>marginTop</a:t>
+            </a:r>
+            <a:r>
+              <a:rPr lang="en-US" dirty="0">
+                <a:solidFill>
+                  <a:srgbClr val="FFFFFF"/>
+                </a:solidFill>
+                <a:latin typeface="Calibri"/>
+              </a:rPr>
+              <a:t>": 0},</a:t>
+            </a:r>
+          </a:p>
+          <a:p>
+            <a:r>
+              <a:rPr lang="en-US" dirty="0">
+                <a:solidFill>
+                  <a:srgbClr val="FFFFFF"/>
+                </a:solidFill>
+                <a:latin typeface="Calibri"/>
+              </a:rPr>
+              <a:t>  {"type": "textbox", "x": "${x+80}", "y": "${y+125}", "width": 340, "height": 50, "text": "{{#8FA7C4:Description}}", "</a:t>
+            </a:r>
+            <a:r>
+              <a:rPr lang="en-US" dirty="0" err="1">
+                <a:solidFill>
+                  <a:srgbClr val="FFFFFF"/>
+                </a:solidFill>
+                <a:latin typeface="Calibri"/>
+              </a:rPr>
+              <a:t>fontSize</a:t>
+            </a:r>
+            <a:r>
+              <a:rPr lang="en-US" dirty="0">
+                <a:solidFill>
+                  <a:srgbClr val="FFFFFF"/>
+                </a:solidFill>
+                <a:latin typeface="Calibri"/>
+              </a:rPr>
+              <a:t>": 14, "align": "right", "</a:t>
+            </a:r>
+            <a:r>
+              <a:rPr lang="en-US" dirty="0" err="1">
+                <a:solidFill>
+                  <a:srgbClr val="FFFFFF"/>
+                </a:solidFill>
+                <a:latin typeface="Calibri"/>
+              </a:rPr>
+              <a:t>marginTop</a:t>
+            </a:r>
+            <a:r>
+              <a:rPr lang="en-US" dirty="0">
+                <a:solidFill>
+                  <a:srgbClr val="FFFFFF"/>
+                </a:solidFill>
+                <a:latin typeface="Calibri"/>
+              </a:rPr>
+              <a:t>": 0},</a:t>
+            </a:r>
+          </a:p>
+          <a:p>
+            <a:r>
+              <a:rPr lang="en-US" dirty="0">
+                <a:solidFill>
+                  <a:srgbClr val="FFFFFF"/>
+                </a:solidFill>
+                <a:latin typeface="Calibri"/>
+              </a:rPr>
+              <a:t>  {"type": "textbox", "x": "${x+80}", "y": "${y+220}", "width": 340, "height": 50, "text": "{{</a:t>
+            </a:r>
+            <a:r>
+              <a:rPr lang="en-US" dirty="0" err="1">
+                <a:solidFill>
+                  <a:srgbClr val="FFFFFF"/>
+                </a:solidFill>
+                <a:latin typeface="Calibri"/>
+              </a:rPr>
+              <a:t>bold:Title</a:t>
+            </a:r>
+            <a:r>
+              <a:rPr lang="en-US" dirty="0">
+                <a:solidFill>
+                  <a:srgbClr val="FFFFFF"/>
+                </a:solidFill>
+                <a:latin typeface="Calibri"/>
+              </a:rPr>
+              <a:t>}}", "</a:t>
+            </a:r>
+            <a:r>
+              <a:rPr lang="en-US" dirty="0" err="1">
+                <a:solidFill>
+                  <a:srgbClr val="FFFFFF"/>
+                </a:solidFill>
+                <a:latin typeface="Calibri"/>
+              </a:rPr>
+              <a:t>fontSize</a:t>
+            </a:r>
+            <a:r>
+              <a:rPr lang="en-US" dirty="0">
+                <a:solidFill>
+                  <a:srgbClr val="FFFFFF"/>
+                </a:solidFill>
+                <a:latin typeface="Calibri"/>
+              </a:rPr>
+              <a:t>": 18, "align": "right", "</a:t>
+            </a:r>
+            <a:r>
+              <a:rPr lang="en-US" dirty="0" err="1">
+                <a:solidFill>
+                  <a:srgbClr val="FFFFFF"/>
+                </a:solidFill>
+                <a:latin typeface="Calibri"/>
+              </a:rPr>
+              <a:t>marginTop</a:t>
+            </a:r>
+            <a:r>
+              <a:rPr lang="en-US" dirty="0">
+                <a:solidFill>
+                  <a:srgbClr val="FFFFFF"/>
+                </a:solidFill>
+                <a:latin typeface="Calibri"/>
+              </a:rPr>
+              <a:t>": 0},</a:t>
+            </a:r>
+          </a:p>
+          <a:p>
+            <a:r>
+              <a:rPr lang="en-US" dirty="0">
+                <a:solidFill>
+                  <a:srgbClr val="FFFFFF"/>
+                </a:solidFill>
+                <a:latin typeface="Calibri"/>
+              </a:rPr>
+              <a:t>  {"type": "textbox", "x": "${x+80}", "y": "${y+275}", "width": 340, "height": 50, "text": "{{#8FA7C4:Description}}", "</a:t>
+            </a:r>
+            <a:r>
+              <a:rPr lang="en-US" dirty="0" err="1">
+                <a:solidFill>
+                  <a:srgbClr val="FFFFFF"/>
+                </a:solidFill>
+                <a:latin typeface="Calibri"/>
+              </a:rPr>
+              <a:t>fontSize</a:t>
+            </a:r>
+            <a:r>
+              <a:rPr lang="en-US" dirty="0">
+                <a:solidFill>
+                  <a:srgbClr val="FFFFFF"/>
+                </a:solidFill>
+                <a:latin typeface="Calibri"/>
+              </a:rPr>
+              <a:t>": 14, "align": "right", "</a:t>
+            </a:r>
+            <a:r>
+              <a:rPr lang="en-US" dirty="0" err="1">
+                <a:solidFill>
+                  <a:srgbClr val="FFFFFF"/>
+                </a:solidFill>
+                <a:latin typeface="Calibri"/>
+              </a:rPr>
+              <a:t>marginTop</a:t>
+            </a:r>
+            <a:r>
+              <a:rPr lang="en-US" dirty="0">
+                <a:solidFill>
+                  <a:srgbClr val="FFFFFF"/>
+                </a:solidFill>
+                <a:latin typeface="Calibri"/>
+              </a:rPr>
+              <a:t>": 0},</a:t>
+            </a:r>
+          </a:p>
+          <a:p>
+            <a:r>
+              <a:rPr lang="en-US" dirty="0">
+                <a:solidFill>
+                  <a:srgbClr val="FFFFFF"/>
+                </a:solidFill>
+                <a:latin typeface="Calibri"/>
+              </a:rPr>
+              <a:t>  {"type": "line", "x": "${x+60}", "y": "${y+350}", "width": 360, "height": 0, "</a:t>
+            </a:r>
+            <a:r>
+              <a:rPr lang="en-US" dirty="0" err="1">
+                <a:solidFill>
+                  <a:srgbClr val="FFFFFF"/>
+                </a:solidFill>
+                <a:latin typeface="Calibri"/>
+              </a:rPr>
+              <a:t>lineWidth</a:t>
+            </a:r>
+            <a:r>
+              <a:rPr lang="en-US" dirty="0">
+                <a:solidFill>
+                  <a:srgbClr val="FFFFFF"/>
+                </a:solidFill>
+                <a:latin typeface="Calibri"/>
+              </a:rPr>
+              <a:t>": 1.0, "</a:t>
+            </a:r>
+            <a:r>
+              <a:rPr lang="en-US" dirty="0" err="1">
+                <a:solidFill>
+                  <a:srgbClr val="FFFFFF"/>
+                </a:solidFill>
+                <a:latin typeface="Calibri"/>
+              </a:rPr>
+              <a:t>dashStyle</a:t>
+            </a:r>
+            <a:r>
+              <a:rPr lang="en-US" dirty="0">
+                <a:solidFill>
+                  <a:srgbClr val="FFFFFF"/>
+                </a:solidFill>
+                <a:latin typeface="Calibri"/>
+              </a:rPr>
+              <a:t>": "dash", "color": "#8FA7C4"},</a:t>
+            </a:r>
+          </a:p>
+          <a:p>
+            <a:r>
+              <a:rPr lang="en-US" dirty="0">
+                <a:solidFill>
+                  <a:srgbClr val="FFFFFF"/>
+                </a:solidFill>
+                <a:latin typeface="Calibri"/>
+              </a:rPr>
+              <a:t>  {"type": "textbox", "x": "${x+80}", "y": "${y+380}", "width": 340, "height": 50, "text": "{{#8FA7C4:Small label}}", "</a:t>
+            </a:r>
+            <a:r>
+              <a:rPr lang="en-US" dirty="0" err="1">
+                <a:solidFill>
+                  <a:srgbClr val="FFFFFF"/>
+                </a:solidFill>
+                <a:latin typeface="Calibri"/>
+              </a:rPr>
+              <a:t>fontSize</a:t>
+            </a:r>
+            <a:r>
+              <a:rPr lang="en-US" dirty="0">
+                <a:solidFill>
+                  <a:srgbClr val="FFFFFF"/>
+                </a:solidFill>
+                <a:latin typeface="Calibri"/>
+              </a:rPr>
+              <a:t>": 12, "align": "right", "</a:t>
+            </a:r>
+            <a:r>
+              <a:rPr lang="en-US" dirty="0" err="1">
+                <a:solidFill>
+                  <a:srgbClr val="FFFFFF"/>
+                </a:solidFill>
+                <a:latin typeface="Calibri"/>
+              </a:rPr>
+              <a:t>marginTop</a:t>
+            </a:r>
+            <a:r>
+              <a:rPr lang="en-US" dirty="0">
+                <a:solidFill>
+                  <a:srgbClr val="FFFFFF"/>
+                </a:solidFill>
+                <a:latin typeface="Calibri"/>
+              </a:rPr>
+              <a:t>": 0}</a:t>
+            </a:r>
+          </a:p>
+          <a:p>
+            <a:r>
+              <a:rPr lang="en-US" dirty="0">
+                <a:solidFill>
+                  <a:srgbClr val="FFFFFF"/>
+                </a:solidFill>
+                <a:latin typeface="Calibri"/>
+              </a:rPr>
+              <a:t>]</a:t>
+            </a:r>
+          </a:p>
+          <a:p>
+            <a:r>
+              <a:rPr lang="en-US" dirty="0">
+                <a:solidFill>
+                  <a:srgbClr val="FFFFFF"/>
+                </a:solidFill>
+                <a:latin typeface="Calibri"/>
+              </a:rPr>
+              <a:t>```</a:t>
+            </a:r>
+          </a:p>
+          <a:p>
+            <a:endParaRPr lang="en-US" dirty="0">
+              <a:solidFill>
+                <a:srgbClr val="FFFFFF"/>
+              </a:solidFill>
+              <a:latin typeface="Calibri"/>
+            </a:endParaRPr>
+          </a:p>
+          <a:p>
+            <a:r>
+              <a:rPr lang="en-US" dirty="0">
+                <a:solidFill>
+                  <a:srgbClr val="FFFFFF"/>
+                </a:solidFill>
+                <a:latin typeface="Calibri"/>
+              </a:rPr>
               <a:t>Three levels of nesting and a slide starts looking like a wireframe. Two levels is usually enough.</a:t>
             </a:r>
           </a:p>
@@ -5341,7 +13002,7 @@
                 </a:solidFill>
                 <a:latin typeface="Calibri"/>
               </a:rPr>
-              <a:t>pattern. The outer container can be whitespace itself — no shape at all, just alignment implying the group.</a:t>
+              <a:t>pattern.</a:t>
             </a:r>
             <a:endParaRPr dirty="0">
               <a:solidFill>
@@ -5427,6 +13088,14 @@
             </a:r>
           </a:p>
           <a:p>
+            <a:endParaRPr lang="en-US" dirty="0">
+              <a:solidFill>
+                <a:srgbClr val="FFFFFF"/>
+              </a:solidFill>
+              <a:latin typeface="Calibri"/>
+            </a:endParaRPr>
+          </a:p>
+          <a:p>
             <a:r>
               <a:rPr lang="en-US" dirty="0">
                 <a:solidFill>
@@ -5494,29 +13163,18 @@
                 </a:solidFill>
                 <a:latin typeface="Calibri"/>
               </a:rPr>
-              <a:t>subtle anchor and becomes a bold color bar. A thin accent line and a thick color bar are the same structural element at different</a:t>
-            </a:r>
-          </a:p>
-          <a:p>
-            <a:r>
-              <a:rPr lang="en-US" dirty="0">
-                <a:solidFill>
-                  <a:srgbClr val="FFFFFF"/>
-                </a:solidFill>
-                <a:latin typeface="Calibri"/>
-              </a:rPr>
-              <a:t>intensities. Add shadow to float the whole thing. Same building blocks, but intensity turns them into something that feels completely</a:t>
-            </a:r>
-          </a:p>
-          <a:p>
-            <a:r>
-              <a:rPr lang="en-US" dirty="0">
-                <a:solidFill>
-                  <a:srgbClr val="FFFFFF"/>
-                </a:solidFill>
-                <a:latin typeface="Calibri"/>
-              </a:rPr>
-              <a:t>different.</a:t>
+              <a:t>subtle anchor and becomes a bold color bar. Add shadow to float the whole thing. Same building blocks, but intensity turns them into</a:t>
+            </a:r>
+          </a:p>
+          <a:p>
+            <a:r>
+              <a:rPr lang="en-US" dirty="0">
+                <a:solidFill>
+                  <a:srgbClr val="FFFFFF"/>
+                </a:solidFill>
+                <a:latin typeface="Calibri"/>
+              </a:rPr>
+              <a:t>something that feels completely different.</a:t>
             </a:r>
           </a:p>
           <a:p>
@@ -5535,6 +13193,131 @@
                 </a:solidFill>
                 <a:latin typeface="Calibri"/>
               </a:rPr>
+              <a:t>```</a:t>
+            </a:r>
+            <a:r>
+              <a:rPr lang="en-US" dirty="0" err="1">
+                <a:solidFill>
+                  <a:srgbClr val="FFFFFF"/>
+                </a:solidFill>
+                <a:latin typeface="Calibri"/>
+              </a:rPr>
+              <a:t>json</a:t>
+            </a:r>
+            <a:endParaRPr lang="en-US" dirty="0">
+              <a:solidFill>
+                <a:srgbClr val="FFFFFF"/>
+              </a:solidFill>
+              <a:latin typeface="Calibri"/>
+            </a:endParaRPr>
+          </a:p>
+          <a:p>
+            <a:r>
+              <a:rPr lang="en-US" dirty="0">
+                <a:solidFill>
+                  <a:srgbClr val="FFFFFF"/>
+                </a:solidFill>
+                <a:latin typeface="Calibri"/>
+              </a:rPr>
+              <a:t>[</a:t>
+            </a:r>
+          </a:p>
+          <a:p>
+            <a:r>
+              <a:rPr lang="en-US" dirty="0">
+                <a:solidFill>
+                  <a:srgbClr val="FFFFFF"/>
+                </a:solidFill>
+                <a:latin typeface="Calibri"/>
+              </a:rPr>
+              <a:t>  {"type": "shape", "shape": "rectangle", "x": "${x}", "y": "${y}", "width": 520, "height": 620, "fill": "#FFFFFF", "opacity": 0.07, "shadow": {"type": "outer", "blur": 8, "distance": 4, "direction": 135, "color": "#000000", "opacity": 0.3}},</a:t>
+            </a:r>
+          </a:p>
+          <a:p>
+            <a:r>
+              <a:rPr lang="en-US" dirty="0">
+                <a:solidFill>
+                  <a:srgbClr val="FFFFFF"/>
+                </a:solidFill>
+                <a:latin typeface="Calibri"/>
+              </a:rPr>
+              <a:t>  {"type": "line", "x": "${x}", "y": "${y}", "width": 0, "height": 620, "</a:t>
+            </a:r>
+            <a:r>
+              <a:rPr lang="en-US" dirty="0" err="1">
+                <a:solidFill>
+                  <a:srgbClr val="FFFFFF"/>
+                </a:solidFill>
+                <a:latin typeface="Calibri"/>
+              </a:rPr>
+              <a:t>lineWidth</a:t>
+            </a:r>
+            <a:r>
+              <a:rPr lang="en-US" dirty="0">
+                <a:solidFill>
+                  <a:srgbClr val="FFFFFF"/>
+                </a:solidFill>
+                <a:latin typeface="Calibri"/>
+              </a:rPr>
+              <a:t>": 8.0, "</a:t>
+            </a:r>
+            <a:r>
+              <a:rPr lang="en-US" dirty="0" err="1">
+                <a:solidFill>
+                  <a:srgbClr val="FFFFFF"/>
+                </a:solidFill>
+                <a:latin typeface="Calibri"/>
+              </a:rPr>
+              <a:t>lineGradient</a:t>
+            </a:r>
+            <a:r>
+              <a:rPr lang="en-US" dirty="0">
+                <a:solidFill>
+                  <a:srgbClr val="FFFFFF"/>
+                </a:solidFill>
+                <a:latin typeface="Calibri"/>
+              </a:rPr>
+              <a:t>": {"stops": [{"position": 0.0, "color": "#FF9900"}, {"position": 1.0, "color": "#FF5C85"}], "angle": 270.0}}</a:t>
+            </a:r>
+          </a:p>
+          <a:p>
+            <a:r>
+              <a:rPr lang="en-US" dirty="0">
+                <a:solidFill>
+                  <a:srgbClr val="FFFFFF"/>
+                </a:solidFill>
+                <a:latin typeface="Calibri"/>
+              </a:rPr>
+              <a:t>]</a:t>
+            </a:r>
+          </a:p>
+          <a:p>
+            <a:r>
+              <a:rPr lang="en-US" dirty="0">
+                <a:solidFill>
+                  <a:srgbClr val="FFFFFF"/>
+                </a:solidFill>
+                <a:latin typeface="Calibri"/>
+              </a:rPr>
+              <a:t>```</a:t>
+            </a:r>
+          </a:p>
+          <a:p>
+            <a:endParaRPr lang="en-US" dirty="0">
+              <a:solidFill>
+                <a:srgbClr val="FFFFFF"/>
+              </a:solidFill>
+              <a:latin typeface="Calibri"/>
+            </a:endParaRPr>
+          </a:p>
+          <a:p>
+            <a:r>
+              <a:rPr lang="en-US" dirty="0">
+                <a:solidFill>
+                  <a:srgbClr val="FFFFFF"/>
+                </a:solidFill>
+                <a:latin typeface="Calibri"/>
+              </a:rPr>
               <a:t>Now push further. Dark opaque fill to absorb light. Gradient border for color movement. Glow to make the border bleed outward. Shadow</a:t>
             </a:r>
           </a:p>
@@ -5558,6 +13341,138 @@
                 <a:latin typeface="Calibri"/>
               </a:rPr>
               <a:t>gradient and it becomes a simple bordered card. Every modifier is a dial.</a:t>
+            </a:r>
+          </a:p>
+          <a:p>
+            <a:endParaRPr lang="en-US" dirty="0">
+              <a:solidFill>
+                <a:srgbClr val="FFFFFF"/>
+              </a:solidFill>
+              <a:latin typeface="Calibri"/>
+            </a:endParaRPr>
+          </a:p>
+          <a:p>
+            <a:r>
+              <a:rPr lang="en-US" dirty="0">
+                <a:solidFill>
+                  <a:srgbClr val="FFFFFF"/>
+                </a:solidFill>
+                <a:latin typeface="Calibri"/>
+              </a:rPr>
+              <a:t>```</a:t>
+            </a:r>
+            <a:r>
+              <a:rPr lang="en-US" dirty="0" err="1">
+                <a:solidFill>
+                  <a:srgbClr val="FFFFFF"/>
+                </a:solidFill>
+                <a:latin typeface="Calibri"/>
+              </a:rPr>
+              <a:t>json</a:t>
+            </a:r>
+            <a:endParaRPr lang="en-US" dirty="0">
+              <a:solidFill>
+                <a:srgbClr val="FFFFFF"/>
+              </a:solidFill>
+              <a:latin typeface="Calibri"/>
+            </a:endParaRPr>
+          </a:p>
+          <a:p>
+            <a:r>
+              <a:rPr lang="en-US" dirty="0">
+                <a:solidFill>
+                  <a:srgbClr val="FFFFFF"/>
+                </a:solidFill>
+                <a:latin typeface="Calibri"/>
+              </a:rPr>
+              <a:t>[</a:t>
+            </a:r>
+          </a:p>
+          <a:p>
+            <a:r>
+              <a:rPr lang="en-US" dirty="0">
+                <a:solidFill>
+                  <a:srgbClr val="FFFFFF"/>
+                </a:solidFill>
+                <a:latin typeface="Calibri"/>
+              </a:rPr>
+              <a:t>  {"type": "shape", "shape": "</a:t>
+            </a:r>
+            <a:r>
+              <a:rPr lang="en-US" dirty="0" err="1">
+                <a:solidFill>
+                  <a:srgbClr val="FFFFFF"/>
+                </a:solidFill>
+                <a:latin typeface="Calibri"/>
+              </a:rPr>
+              <a:t>rounded_rectangle</a:t>
+            </a:r>
+            <a:r>
+              <a:rPr lang="en-US" dirty="0">
+                <a:solidFill>
+                  <a:srgbClr val="FFFFFF"/>
+                </a:solidFill>
+                <a:latin typeface="Calibri"/>
+              </a:rPr>
+              <a:t>", "width": 780, "height": 300, "adjustments": [0.06], "fill": "#0A0A0A", "</a:t>
+            </a:r>
+            <a:r>
+              <a:rPr lang="en-US" dirty="0" err="1">
+                <a:solidFill>
+                  <a:srgbClr val="FFFFFF"/>
+                </a:solidFill>
+                <a:latin typeface="Calibri"/>
+              </a:rPr>
+              <a:t>lineWidth</a:t>
+            </a:r>
+            <a:r>
+              <a:rPr lang="en-US" dirty="0">
+                <a:solidFill>
+                  <a:srgbClr val="FFFFFF"/>
+                </a:solidFill>
+                <a:latin typeface="Calibri"/>
+              </a:rPr>
+              <a:t>": 1.5, "</a:t>
+            </a:r>
+            <a:r>
+              <a:rPr lang="en-US" dirty="0" err="1">
+                <a:solidFill>
+                  <a:srgbClr val="FFFFFF"/>
+                </a:solidFill>
+                <a:latin typeface="Calibri"/>
+              </a:rPr>
+              <a:t>lineGradient</a:t>
+            </a:r>
+            <a:r>
+              <a:rPr lang="en-US" dirty="0">
+                <a:solidFill>
+                  <a:srgbClr val="FFFFFF"/>
+                </a:solidFill>
+                <a:latin typeface="Calibri"/>
+              </a:rPr>
+              <a:t>": {"stops": [{"position": 0.0, "color": "#AD5CFF"}, {"position": 1.0, "color": "#FF5C85"}], "angle": 135.0}, "glow": {"radius": 20, "color": "#AD5CFF", "opacity": 0.5}}</a:t>
+            </a:r>
+          </a:p>
+          <a:p>
+            <a:r>
+              <a:rPr lang="en-US" dirty="0">
+                <a:solidFill>
+                  <a:srgbClr val="FFFFFF"/>
+                </a:solidFill>
+                <a:latin typeface="Calibri"/>
+              </a:rPr>
+              <a:t>]</a:t>
+            </a:r>
+          </a:p>
+          <a:p>
+            <a:r>
+              <a:rPr lang="en-US" dirty="0">
+                <a:solidFill>
+                  <a:srgbClr val="FFFFFF"/>
+                </a:solidFill>
+                <a:latin typeface="Calibri"/>
+              </a:rPr>
+              <a:t>```</a:t>
             </a:r>
             <a:endParaRPr dirty="0">
               <a:solidFill>
@@ -5767,7 +13682,7 @@
           <a:p>
             <a:fld id="{5BCAD085-E8A6-8845-BD4E-CB4CCA059FC4}" type="datetimeFigureOut">
               <a:rPr lang="en-US" smtClean="0"/>
-              <a:t>4/2/26</a:t>
+              <a:t>4/9/26</a:t>
             </a:fld>
             <a:endParaRPr lang="en-US"/>
           </a:p>
@@ -5935,7 +13850,7 @@
           <a:p>
             <a:fld id="{5BCAD085-E8A6-8845-BD4E-CB4CCA059FC4}" type="datetimeFigureOut">
               <a:rPr lang="en-US" smtClean="0"/>
-              <a:t>4/2/26</a:t>
+              <a:t>4/9/26</a:t>
             </a:fld>
             <a:endParaRPr lang="en-US"/>
           </a:p>
@@ -6113,7 +14028,7 @@
           <a:p>
             <a:fld id="{5BCAD085-E8A6-8845-BD4E-CB4CCA059FC4}" type="datetimeFigureOut">
               <a:rPr lang="en-US" smtClean="0"/>
-              <a:t>4/2/26</a:t>
+              <a:t>4/9/26</a:t>
             </a:fld>
             <a:endParaRPr lang="en-US"/>
           </a:p>
@@ -6281,7 +14196,7 @@
           <a:p>
             <a:fld id="{5BCAD085-E8A6-8845-BD4E-CB4CCA059FC4}" type="datetimeFigureOut">
               <a:rPr lang="en-US" smtClean="0"/>
-              <a:t>4/2/26</a:t>
+              <a:t>4/9/26</a:t>
             </a:fld>
             <a:endParaRPr lang="en-US"/>
           </a:p>
@@ -6526,7 +14441,7 @@
           <a:p>
             <a:fld id="{5BCAD085-E8A6-8845-BD4E-CB4CCA059FC4}" type="datetimeFigureOut">
               <a:rPr lang="en-US" smtClean="0"/>
-              <a:t>4/2/26</a:t>
+              <a:t>4/9/26</a:t>
             </a:fld>
             <a:endParaRPr lang="en-US"/>
           </a:p>
@@ -6811,7 +14726,7 @@
           <a:p>
             <a:fld id="{5BCAD085-E8A6-8845-BD4E-CB4CCA059FC4}" type="datetimeFigureOut">
               <a:rPr lang="en-US" smtClean="0"/>
-              <a:t>4/2/26</a:t>
+              <a:t>4/9/26</a:t>
             </a:fld>
             <a:endParaRPr lang="en-US"/>
           </a:p>
@@ -7230,7 +15145,7 @@
           <a:p>
             <a:fld id="{5BCAD085-E8A6-8845-BD4E-CB4CCA059FC4}" type="datetimeFigureOut">
               <a:rPr lang="en-US" smtClean="0"/>
-              <a:t>4/2/26</a:t>
+              <a:t>4/9/26</a:t>
             </a:fld>
             <a:endParaRPr lang="en-US"/>
           </a:p>
@@ -7347,7 +15262,7 @@
           <a:p>
             <a:fld id="{5BCAD085-E8A6-8845-BD4E-CB4CCA059FC4}" type="datetimeFigureOut">
               <a:rPr lang="en-US" smtClean="0"/>
-              <a:t>4/2/26</a:t>
+              <a:t>4/9/26</a:t>
             </a:fld>
             <a:endParaRPr lang="en-US"/>
           </a:p>
@@ -7450,7 +15365,7 @@
           <a:p>
             <a:fld id="{5BCAD085-E8A6-8845-BD4E-CB4CCA059FC4}" type="datetimeFigureOut">
               <a:rPr lang="en-US" smtClean="0"/>
-              <a:t>4/2/26</a:t>
+              <a:t>4/9/26</a:t>
             </a:fld>
             <a:endParaRPr lang="en-US"/>
           </a:p>
@@ -7725,7 +15640,7 @@
           <a:p>
             <a:fld id="{5BCAD085-E8A6-8845-BD4E-CB4CCA059FC4}" type="datetimeFigureOut">
               <a:rPr lang="en-US" smtClean="0"/>
-              <a:t>4/2/26</a:t>
+              <a:t>4/9/26</a:t>
             </a:fld>
             <a:endParaRPr lang="en-US"/>
           </a:p>
@@ -7977,7 +15892,7 @@
           <a:p>
             <a:fld id="{5BCAD085-E8A6-8845-BD4E-CB4CCA059FC4}" type="datetimeFigureOut">
               <a:rPr lang="en-US" smtClean="0"/>
-              <a:t>4/2/26</a:t>
+              <a:t>4/9/26</a:t>
             </a:fld>
             <a:endParaRPr lang="en-US"/>
           </a:p>
@@ -8188,7 +16103,7 @@
           <a:p>
             <a:fld id="{5BCAD085-E8A6-8845-BD4E-CB4CCA059FC4}" type="datetimeFigureOut">
               <a:rPr lang="en-US" smtClean="0"/>
-              <a:t>4/2/26</a:t>
+              <a:t>4/9/26</a:t>
             </a:fld>
             <a:endParaRPr lang="en-US"/>
           </a:p>
@@ -12341,7 +20256,13 @@
   <p:cSld>
     <p:spTree>
       <p:nvGrpSpPr>
-        <p:cNvPr id="1" name=""/>
+        <p:cNvPr id="1" name="">
+          <a:extLst>
+            <a:ext uri="{FF2B5EF4-FFF2-40B4-BE49-F238E27FC236}">
+              <a16:creationId xmlns:a16="http://schemas.microsoft.com/office/drawing/2014/main" id="{5FC7E393-A463-4849-AB9C-E46C70918E36}"/>
+            </a:ext>
+          </a:extLst>
+        </p:cNvPr>
         <p:cNvGrpSpPr/>
         <p:nvPr/>
       </p:nvGrpSpPr>
@@ -12355,7 +20276,13 @@
       </p:grpSpPr>
       <p:sp>
         <p:nvSpPr>
-          <p:cNvPr id="2" name="Title 1"/>
+          <p:cNvPr id="2" name="Title 1">
+            <a:extLst>
+              <a:ext uri="{FF2B5EF4-FFF2-40B4-BE49-F238E27FC236}">
+                <a16:creationId xmlns:a16="http://schemas.microsoft.com/office/drawing/2014/main" id="{E627F96A-1A44-7AC1-7D00-CCBC4445C496}"/>
+              </a:ext>
+            </a:extLst>
+          </p:cNvPr>
           <p:cNvSpPr>
             <a:spLocks noGrp="1"/>
           </p:cNvSpPr>
@@ -12369,289 +20296,256 @@
           <a:lstStyle/>
           <a:p>
             <a:r>
-              <a:rPr dirty="0"/>
-              <a:t>styled-table</a:t>
-            </a:r>
+              <a:rPr lang="en-US" dirty="0"/>
+              <a:t>Sharp-stop</a:t>
+            </a:r>
+            <a:endParaRPr dirty="0"/>
           </a:p>
         </p:txBody>
       </p:sp>
-      <p:graphicFrame>
-        <p:nvGraphicFramePr>
-          <p:cNvPr id="3" name="Table 2"/>
-          <p:cNvGraphicFramePr>
-            <a:graphicFrameLocks noGrp="1"/>
-          </p:cNvGraphicFramePr>
-          <p:nvPr>
-            <p:extLst>
-              <p:ext uri="{D42A27DB-BD31-4B8C-83A1-F6EECF244321}">
-                <p14:modId xmlns:p14="http://schemas.microsoft.com/office/powerpoint/2010/main" val="3560023568"/>
-              </p:ext>
-            </p:extLst>
-          </p:nvPr>
-        </p:nvGraphicFramePr>
-        <p:xfrm>
-          <a:off x="3105150" y="2070100"/>
-          <a:ext cx="5981700" cy="2717800"/>
-        </p:xfrm>
-        <a:graphic>
-          <a:graphicData uri="http://schemas.openxmlformats.org/drawingml/2006/table">
-            <a:tbl>
-              <a:tblPr firstRow="1">
-                <a:tableStyleId>{5C22544A-7EE6-4342-B048-85BDC9FD1C3A}</a:tableStyleId>
-              </a:tblPr>
-              <a:tblGrid>
-                <a:gridCol w="508000">
-                  <a:extLst>
-                    <a:ext uri="{9D8B030D-6E8A-4147-A177-3AD203B41FA5}">
-                      <a16:colId xmlns:a16="http://schemas.microsoft.com/office/drawing/2014/main" val="20000"/>
-                    </a:ext>
-                  </a:extLst>
-                </a:gridCol>
-                <a:gridCol w="2736850">
-                  <a:extLst>
-                    <a:ext uri="{9D8B030D-6E8A-4147-A177-3AD203B41FA5}">
-                      <a16:colId xmlns:a16="http://schemas.microsoft.com/office/drawing/2014/main" val="20003"/>
-                    </a:ext>
-                  </a:extLst>
-                </a:gridCol>
-                <a:gridCol w="2736850">
-                  <a:extLst>
-                    <a:ext uri="{9D8B030D-6E8A-4147-A177-3AD203B41FA5}">
-                      <a16:colId xmlns:a16="http://schemas.microsoft.com/office/drawing/2014/main" val="20004"/>
-                    </a:ext>
-                  </a:extLst>
-                </a:gridCol>
-              </a:tblGrid>
-              <a:tr h="603250">
-                <a:tc>
-                  <a:txBody>
-                    <a:bodyPr/>
-                    <a:lstStyle/>
-                    <a:p>
-                      <a:pPr algn="ctr"/>
-                      <a:r>
-                        <a:rPr lang="en-US" altLang="ja-JP" sz="1800" b="1">
-                          <a:solidFill>
-                            <a:srgbClr val="FF9900"/>
-                          </a:solidFill>
-                          <a:latin typeface="Calibri"/>
-                        </a:rPr>
-                        <a:t>#</a:t>
-                      </a:r>
-                      <a:endParaRPr lang="en-US" altLang="ja-JP" sz="1800" b="1" dirty="0">
-                        <a:solidFill>
-                          <a:srgbClr val="FF9900"/>
-                        </a:solidFill>
-                        <a:latin typeface="Calibri"/>
-                      </a:endParaRPr>
-                    </a:p>
-                  </a:txBody>
-                  <a:tcPr marL="107950" marR="107950" marT="107950" marB="107950" anchor="ctr">
-                    <a:solidFill>
-                      <a:srgbClr val="161D26"/>
-                    </a:solidFill>
-                  </a:tcPr>
-                </a:tc>
-                <a:tc>
-                  <a:txBody>
-                    <a:bodyPr/>
-                    <a:lstStyle/>
-                    <a:p>
-                      <a:pPr algn="ctr"/>
-                      <a:r>
-                        <a:rPr lang="en-US" sz="1800" b="1" dirty="0">
-                          <a:solidFill>
-                            <a:srgbClr val="FFFFFF"/>
-                          </a:solidFill>
-                          <a:latin typeface="Calibri"/>
-                        </a:rPr>
-                        <a:t>Category A</a:t>
-                      </a:r>
-                    </a:p>
-                  </a:txBody>
-                  <a:tcPr marL="107950" marR="107950" marT="107950" marB="107950" anchor="ctr">
-                    <a:solidFill>
-                      <a:srgbClr val="161D26"/>
-                    </a:solidFill>
-                  </a:tcPr>
-                </a:tc>
-                <a:tc>
-                  <a:txBody>
-                    <a:bodyPr/>
-                    <a:lstStyle/>
-                    <a:p>
-                      <a:pPr algn="ctr"/>
-                      <a:r>
-                        <a:rPr lang="en-US" sz="1800" b="1" dirty="0">
-                          <a:solidFill>
-                            <a:srgbClr val="FFFFFF"/>
-                          </a:solidFill>
-                          <a:latin typeface="Calibri"/>
-                        </a:rPr>
-                        <a:t>Category B</a:t>
-                      </a:r>
-                    </a:p>
-                  </a:txBody>
-                  <a:tcPr marL="107950" marR="107950" marT="107950" marB="107950" anchor="ctr">
-                    <a:solidFill>
-                      <a:srgbClr val="161D26"/>
-                    </a:solidFill>
-                  </a:tcPr>
-                </a:tc>
-                <a:extLst>
-                  <a:ext uri="{0D108BD9-81ED-4DB2-BD59-A6C34878D82A}">
-                    <a16:rowId xmlns:a16="http://schemas.microsoft.com/office/drawing/2014/main" val="10000"/>
-                  </a:ext>
-                </a:extLst>
-              </a:tr>
-              <a:tr h="793750">
-                <a:tc>
-                  <a:txBody>
-                    <a:bodyPr/>
-                    <a:lstStyle/>
-                    <a:p>
-                      <a:pPr algn="ctr"/>
-                      <a:r>
-                        <a:rPr lang="en-US" sz="1800" b="1" dirty="0">
-                          <a:solidFill>
-                            <a:srgbClr val="FF9900"/>
-                          </a:solidFill>
-                          <a:latin typeface="Calibri"/>
-                        </a:rPr>
-                        <a:t>1</a:t>
-                      </a:r>
-                    </a:p>
-                  </a:txBody>
-                  <a:tcPr marL="107950" marR="107950" marT="107950" marB="107950" anchor="ctr">
-                    <a:solidFill>
-                      <a:srgbClr val="161D26"/>
-                    </a:solidFill>
-                  </a:tcPr>
-                </a:tc>
-                <a:tc rowSpan="2">
-                  <a:txBody>
-                    <a:bodyPr/>
-                    <a:lstStyle/>
-                    <a:p>
-                      <a:r>
-                        <a:rPr lang="en-US" sz="1800" dirty="0">
-                          <a:solidFill>
-                            <a:srgbClr val="FFFFFF"/>
-                          </a:solidFill>
-                          <a:latin typeface="Calibri"/>
-                        </a:rPr>
-                        <a:t>Pattern</a:t>
-                      </a:r>
-                      <a:endParaRPr lang="en-US" sz="1800" dirty="0">
-                        <a:solidFill>
-                          <a:srgbClr val="FFFFFF"/>
-                        </a:solidFill>
-                      </a:endParaRPr>
-                    </a:p>
-                  </a:txBody>
-                  <a:tcPr marL="107950" marR="107950" marT="107950" marB="107950" anchor="ctr">
-                    <a:solidFill>
-                      <a:srgbClr val="000000"/>
-                    </a:solidFill>
-                  </a:tcPr>
-                </a:tc>
-                <a:tc>
-                  <a:txBody>
-                    <a:bodyPr/>
-                    <a:lstStyle/>
-                    <a:p>
-                      <a:pPr algn="r"/>
-                      <a:r>
-                        <a:rPr lang="en-US" sz="1800" b="1" dirty="0">
-                          <a:solidFill>
-                            <a:srgbClr val="FF693C"/>
-                          </a:solidFill>
-                          <a:latin typeface="Calibri"/>
-                        </a:rPr>
-                        <a:t>Resource A</a:t>
-                      </a:r>
-                    </a:p>
-                  </a:txBody>
-                  <a:tcPr marL="107950" marR="107950" marT="107950" marB="107950" anchor="ctr">
-                    <a:solidFill>
-                      <a:srgbClr val="161D26"/>
-                    </a:solidFill>
-                  </a:tcPr>
-                </a:tc>
-                <a:extLst>
-                  <a:ext uri="{0D108BD9-81ED-4DB2-BD59-A6C34878D82A}">
-                    <a16:rowId xmlns:a16="http://schemas.microsoft.com/office/drawing/2014/main" val="10003"/>
-                  </a:ext>
-                </a:extLst>
-              </a:tr>
-              <a:tr h="1320800">
-                <a:tc>
-                  <a:txBody>
-                    <a:bodyPr/>
-                    <a:lstStyle/>
-                    <a:p>
-                      <a:pPr algn="ctr"/>
-                      <a:r>
-                        <a:rPr lang="en-US" sz="1800" b="1" dirty="0">
-                          <a:solidFill>
-                            <a:srgbClr val="FF9900"/>
-                          </a:solidFill>
-                          <a:latin typeface="Calibri"/>
-                        </a:rPr>
-                        <a:t>2</a:t>
-                      </a:r>
-                    </a:p>
-                  </a:txBody>
-                  <a:tcPr marL="107950" marR="107950" marT="107950" marB="107950" anchor="ctr">
-                    <a:solidFill>
-                      <a:srgbClr val="161D26"/>
-                    </a:solidFill>
-                  </a:tcPr>
-                </a:tc>
-                <a:tc vMerge="1">
-                  <a:txBody>
-                    <a:bodyPr/>
-                    <a:lstStyle/>
-                    <a:p>
-                      <a:endParaRPr/>
-                    </a:p>
-                  </a:txBody>
-                  <a:tcPr/>
-                </a:tc>
-                <a:tc>
-                  <a:txBody>
-                    <a:bodyPr/>
-                    <a:lstStyle/>
-                    <a:p>
-                      <a:pPr algn="r"/>
-                      <a:r>
-                        <a:rPr lang="en-US" sz="1800" b="1" dirty="0">
-                          <a:solidFill>
-                            <a:srgbClr val="FF693C"/>
-                          </a:solidFill>
-                          <a:latin typeface="Calibri"/>
-                        </a:rPr>
-                        <a:t>Resource B</a:t>
-                      </a:r>
-                    </a:p>
-                  </a:txBody>
-                  <a:tcPr marL="107950" marR="107950" marT="107950" marB="107950" anchor="ctr">
-                    <a:solidFill>
-                      <a:srgbClr val="161D26"/>
-                    </a:solidFill>
-                  </a:tcPr>
-                </a:tc>
-                <a:extLst>
-                  <a:ext uri="{0D108BD9-81ED-4DB2-BD59-A6C34878D82A}">
-                    <a16:rowId xmlns:a16="http://schemas.microsoft.com/office/drawing/2014/main" val="10004"/>
-                  </a:ext>
-                </a:extLst>
-              </a:tr>
-            </a:tbl>
-          </a:graphicData>
-        </a:graphic>
-      </p:graphicFrame>
+      <p:sp>
+        <p:nvSpPr>
+          <p:cNvPr id="5" name="Rounded Rectangle 1">
+            <a:extLst>
+              <a:ext uri="{FF2B5EF4-FFF2-40B4-BE49-F238E27FC236}">
+                <a16:creationId xmlns:a16="http://schemas.microsoft.com/office/drawing/2014/main" id="{39CA12C2-BCE8-739E-015C-8189F46F080F}"/>
+              </a:ext>
+            </a:extLst>
+          </p:cNvPr>
+          <p:cNvSpPr/>
+          <p:nvPr/>
+        </p:nvSpPr>
+        <p:spPr>
+          <a:xfrm>
+            <a:off x="1397000" y="2432613"/>
+            <a:ext cx="3175000" cy="1905000"/>
+          </a:xfrm>
+          <a:prstGeom prst="roundRect">
+            <a:avLst>
+              <a:gd name="adj" fmla="val 5000"/>
+            </a:avLst>
+          </a:prstGeom>
+          <a:gradFill rotWithShape="1">
+            <a:gsLst>
+              <a:gs pos="0">
+                <a:srgbClr val="232F3E"/>
+              </a:gs>
+              <a:gs pos="49900">
+                <a:srgbClr val="232F3E"/>
+              </a:gs>
+              <a:gs pos="50100">
+                <a:srgbClr val="FF9900"/>
+              </a:gs>
+              <a:gs pos="100000">
+                <a:srgbClr val="FF9900"/>
+              </a:gs>
+            </a:gsLst>
+            <a:lin ang="0" scaled="1"/>
+          </a:gradFill>
+          <a:ln>
+            <a:noFill/>
+          </a:ln>
+        </p:spPr>
+        <p:style>
+          <a:lnRef idx="1">
+            <a:schemeClr val="accent1"/>
+          </a:lnRef>
+          <a:fillRef idx="3">
+            <a:schemeClr val="accent1"/>
+          </a:fillRef>
+          <a:effectRef idx="2">
+            <a:schemeClr val="accent1"/>
+          </a:effectRef>
+          <a:fontRef idx="minor">
+            <a:schemeClr val="lt1"/>
+          </a:fontRef>
+        </p:style>
+        <p:txBody>
+          <a:bodyPr rtlCol="0" anchor="ctr"/>
+          <a:lstStyle/>
+          <a:p>
+            <a:pPr algn="ctr"/>
+            <a:endParaRPr/>
+          </a:p>
+        </p:txBody>
+      </p:sp>
+      <p:sp>
+        <p:nvSpPr>
+          <p:cNvPr id="6" name="Rounded Rectangle 1">
+            <a:extLst>
+              <a:ext uri="{FF2B5EF4-FFF2-40B4-BE49-F238E27FC236}">
+                <a16:creationId xmlns:a16="http://schemas.microsoft.com/office/drawing/2014/main" id="{6DADA959-F289-C91C-AE13-188F51B1EFC1}"/>
+              </a:ext>
+            </a:extLst>
+          </p:cNvPr>
+          <p:cNvSpPr/>
+          <p:nvPr/>
+        </p:nvSpPr>
+        <p:spPr>
+          <a:xfrm>
+            <a:off x="6622808" y="2133118"/>
+            <a:ext cx="4127983" cy="2503990"/>
+          </a:xfrm>
+          <a:prstGeom prst="roundRect">
+            <a:avLst>
+              <a:gd name="adj" fmla="val 5000"/>
+            </a:avLst>
+          </a:prstGeom>
+          <a:gradFill rotWithShape="1">
+            <a:gsLst>
+              <a:gs pos="0">
+                <a:srgbClr val="232F3E"/>
+              </a:gs>
+              <a:gs pos="19000">
+                <a:srgbClr val="232F3E"/>
+              </a:gs>
+              <a:gs pos="20000">
+                <a:srgbClr val="FFFFFF">
+                  <a:alpha val="0"/>
+                </a:srgbClr>
+              </a:gs>
+              <a:gs pos="100000">
+                <a:srgbClr val="FFFFFF">
+                  <a:alpha val="0"/>
+                </a:srgbClr>
+              </a:gs>
+            </a:gsLst>
+            <a:lin ang="5400000" scaled="1"/>
+          </a:gradFill>
+          <a:ln w="12700">
+            <a:solidFill>
+              <a:srgbClr val="CCCCCC"/>
+            </a:solidFill>
+          </a:ln>
+        </p:spPr>
+        <p:style>
+          <a:lnRef idx="1">
+            <a:schemeClr val="accent1"/>
+          </a:lnRef>
+          <a:fillRef idx="3">
+            <a:schemeClr val="accent1"/>
+          </a:fillRef>
+          <a:effectRef idx="2">
+            <a:schemeClr val="accent1"/>
+          </a:effectRef>
+          <a:fontRef idx="minor">
+            <a:schemeClr val="lt1"/>
+          </a:fontRef>
+        </p:style>
+        <p:txBody>
+          <a:bodyPr rtlCol="0" anchor="ctr"/>
+          <a:lstStyle/>
+          <a:p>
+            <a:pPr algn="ctr"/>
+            <a:endParaRPr/>
+          </a:p>
+        </p:txBody>
+      </p:sp>
+      <p:sp>
+        <p:nvSpPr>
+          <p:cNvPr id="7" name="TextBox 2">
+            <a:extLst>
+              <a:ext uri="{FF2B5EF4-FFF2-40B4-BE49-F238E27FC236}">
+                <a16:creationId xmlns:a16="http://schemas.microsoft.com/office/drawing/2014/main" id="{0DC8050B-D4BE-D48B-9732-2CAB6DA1CA7A}"/>
+              </a:ext>
+            </a:extLst>
+          </p:cNvPr>
+          <p:cNvSpPr txBox="1"/>
+          <p:nvPr/>
+        </p:nvSpPr>
+        <p:spPr>
+          <a:xfrm>
+            <a:off x="6813308" y="2209318"/>
+            <a:ext cx="2687417" cy="381000"/>
+          </a:xfrm>
+          <a:prstGeom prst="rect">
+            <a:avLst/>
+          </a:prstGeom>
+          <a:noFill/>
+          <a:ln>
+            <a:noFill/>
+          </a:ln>
+        </p:spPr>
+        <p:txBody>
+          <a:bodyPr wrap="square">
+            <a:normAutofit/>
+          </a:bodyPr>
+          <a:lstStyle/>
+          <a:p>
+            <a:pPr algn="l"/>
+            <a:r>
+              <a:rPr sz="1800">
+                <a:solidFill>
+                  <a:srgbClr val="FFFFFF"/>
+                </a:solidFill>
+                <a:latin typeface="Calibri"/>
+              </a:rPr>
+              <a:t>Title</a:t>
+            </a:r>
+          </a:p>
+        </p:txBody>
+      </p:sp>
+      <p:cxnSp>
+        <p:nvCxnSpPr>
+          <p:cNvPr id="8" name="Connector 1">
+            <a:extLst>
+              <a:ext uri="{FF2B5EF4-FFF2-40B4-BE49-F238E27FC236}">
+                <a16:creationId xmlns:a16="http://schemas.microsoft.com/office/drawing/2014/main" id="{A5112F69-B3EF-CAB9-A5FB-089A7AEF829D}"/>
+              </a:ext>
+            </a:extLst>
+          </p:cNvPr>
+          <p:cNvCxnSpPr/>
+          <p:nvPr/>
+        </p:nvCxnSpPr>
+        <p:spPr>
+          <a:xfrm>
+            <a:off x="1651000" y="5431421"/>
+            <a:ext cx="8890000" cy="0"/>
+          </a:xfrm>
+          <a:prstGeom prst="line">
+            <a:avLst/>
+          </a:prstGeom>
+          <a:ln w="76200">
+            <a:gradFill rotWithShape="1">
+              <a:gsLst>
+                <a:gs pos="0">
+                  <a:srgbClr val="232F3E"/>
+                </a:gs>
+                <a:gs pos="49900">
+                  <a:srgbClr val="232F3E"/>
+                </a:gs>
+                <a:gs pos="50100">
+                  <a:srgbClr val="FF9900"/>
+                </a:gs>
+                <a:gs pos="100000">
+                  <a:srgbClr val="FF9900"/>
+                </a:gs>
+              </a:gsLst>
+              <a:lin ang="0" scaled="1"/>
+            </a:gradFill>
+          </a:ln>
+        </p:spPr>
+        <p:style>
+          <a:lnRef idx="2">
+            <a:schemeClr val="accent1"/>
+          </a:lnRef>
+          <a:fillRef idx="0">
+            <a:schemeClr val="accent1"/>
+          </a:fillRef>
+          <a:effectRef idx="1">
+            <a:schemeClr val="accent1"/>
+          </a:effectRef>
+          <a:fontRef idx="minor">
+            <a:schemeClr val="tx1"/>
+          </a:fontRef>
+        </p:style>
+      </p:cxnSp>
     </p:spTree>
+    <p:extLst>
+      <p:ext uri="{BB962C8B-B14F-4D97-AF65-F5344CB8AC3E}">
+        <p14:creationId xmlns:p14="http://schemas.microsoft.com/office/powerpoint/2010/main" val="1371943478"/>
+      </p:ext>
+    </p:extLst>
   </p:cSld>
   <p:clrMapOvr>
     <a:masterClrMapping/>
